--- a/output/wordlabs-locate-3day.pptx
+++ b/output/wordlabs-locate-3day.pptx
@@ -4240,7 +4240,7 @@
                 <a:ea typeface="Calibri" pitchFamily="34" charset="-122"/>
                 <a:cs typeface="Calibri" pitchFamily="34" charset="-120"/>
               </a:rPr>
-              <a:t>"to find or place something"</a:t>
+              <a:t>"to find or place"</a:t>
             </a:r>
             <a:endParaRPr lang="en-US" sz="2200" dirty="0"/>
           </a:p>
@@ -5288,7 +5288,7 @@
                 <a:ea typeface="Calibri" pitchFamily="34" charset="-122"/>
                 <a:cs typeface="Calibri" pitchFamily="34" charset="-120"/>
               </a:rPr>
-              <a:t>Word Labs  •  wordlabs.app  •  Root: 'locate' = to find or place something</a:t>
+              <a:t>Word Labs  •  wordlabs.app  •  Root: 'locate' = to find or place</a:t>
             </a:r>
             <a:endParaRPr lang="en-US" sz="800" dirty="0"/>
           </a:p>
@@ -5622,7 +5622,7 @@
                 <a:ea typeface="Trebuchet MS" pitchFamily="34" charset="-122"/>
                 <a:cs typeface="Trebuchet MS" pitchFamily="34" charset="-120"/>
               </a:rPr>
-              <a:t>0</a:t>
+              <a:t>1</a:t>
             </a:r>
             <a:pPr algn="ctr" indent="0" marL="0">
               <a:buNone/>
@@ -5928,7 +5928,7 @@
                 <a:ea typeface="Calibri" pitchFamily="34" charset="-122"/>
                 <a:cs typeface="Calibri" pitchFamily="34" charset="-120"/>
               </a:rPr>
-              <a:t>Word Labs  •  wordlabs.app  •  Root: 'locate' = to find or place something</a:t>
+              <a:t>Word Labs  •  wordlabs.app  •  Root: 'locate' = to find or place</a:t>
             </a:r>
             <a:endParaRPr lang="en-US" sz="800" dirty="0"/>
           </a:p>
@@ -6040,7 +6040,7 @@
                 <a:ea typeface="Calibri" pitchFamily="34" charset="-122"/>
                 <a:cs typeface="Calibri" pitchFamily="34" charset="-120"/>
               </a:rPr>
-              <a:t>We need to </a:t>
+              <a:t>Can you </a:t>
             </a:r>
             <a:pPr algn="l" indent="0" marL="0">
               <a:buNone/>
@@ -6071,7 +6071,7 @@
                 <a:ea typeface="Calibri" pitchFamily="34" charset="-122"/>
                 <a:cs typeface="Calibri" pitchFamily="34" charset="-120"/>
               </a:rPr>
-              <a:t> the missing equipment and record its exact </a:t>
+              <a:t> the </a:t>
             </a:r>
             <a:pPr algn="l" indent="0" marL="0">
               <a:buNone/>
@@ -6088,7 +6088,7 @@
                 <a:ea typeface="Calibri" pitchFamily="34" charset="-122"/>
                 <a:cs typeface="Calibri" pitchFamily="34" charset="-120"/>
               </a:rPr>
-              <a:t>location</a:t>
+              <a:t>relocation</a:t>
             </a:r>
             <a:pPr algn="l" indent="0" marL="0">
               <a:buNone/>
@@ -6102,7 +6102,7 @@
                 <a:ea typeface="Calibri" pitchFamily="34" charset="-122"/>
                 <a:cs typeface="Calibri" pitchFamily="34" charset="-120"/>
               </a:rPr>
-              <a:t> before the end of the day.</a:t>
+              <a:t> centre on this map?</a:t>
             </a:r>
             <a:endParaRPr lang="en-US" sz="1800" dirty="0"/>
           </a:p>
@@ -6385,7 +6385,7 @@
                 <a:ea typeface="Trebuchet MS" pitchFamily="34" charset="-122"/>
                 <a:cs typeface="Trebuchet MS" pitchFamily="34" charset="-120"/>
               </a:rPr>
-              <a:t>location</a:t>
+              <a:t>relocation</a:t>
             </a:r>
             <a:endParaRPr lang="en-US" sz="1400" dirty="0"/>
           </a:p>
@@ -6716,7 +6716,7 @@
                 <a:ea typeface="Calibri" pitchFamily="34" charset="-122"/>
                 <a:cs typeface="Calibri" pitchFamily="34" charset="-120"/>
               </a:rPr>
-              <a:t>Word Labs  •  wordlabs.app  •  Root: 'locate' = to find or place something</a:t>
+              <a:t>Word Labs  •  wordlabs.app  •  Root: 'locate' = to find or place</a:t>
             </a:r>
             <a:endParaRPr lang="en-US" sz="800" dirty="0"/>
           </a:p>
@@ -7543,7 +7543,7 @@
                 <a:ea typeface="Calibri" pitchFamily="34" charset="-122"/>
                 <a:cs typeface="Calibri" pitchFamily="34" charset="-120"/>
               </a:rPr>
-              <a:t>Word Labs  •  wordlabs.app  •  Root: 'locate' = to find or place something</a:t>
+              <a:t>Word Labs  •  wordlabs.app  •  Root: 'locate' = to find or place</a:t>
             </a:r>
             <a:endParaRPr lang="en-US" sz="800" dirty="0"/>
           </a:p>
@@ -8416,7 +8416,7 @@
                 <a:ea typeface="Calibri" pitchFamily="34" charset="-122"/>
                 <a:cs typeface="Calibri" pitchFamily="34" charset="-120"/>
               </a:rPr>
-              <a:t>Word Labs  •  wordlabs.app  •  Root: 'locate' = to find or place something</a:t>
+              <a:t>Word Labs  •  wordlabs.app  •  Root: 'locate' = to find or place</a:t>
             </a:r>
             <a:endParaRPr lang="en-US" sz="800" dirty="0"/>
           </a:p>
@@ -9421,7 +9421,7 @@
                 <a:ea typeface="Calibri" pitchFamily="34" charset="-122"/>
                 <a:cs typeface="Calibri" pitchFamily="34" charset="-120"/>
               </a:rPr>
-              <a:t>Word Labs  •  wordlabs.app  •  Root: 'locate' = to find or place something</a:t>
+              <a:t>Word Labs  •  wordlabs.app  •  Root: 'locate' = to find or place</a:t>
             </a:r>
             <a:endParaRPr lang="en-US" sz="800" dirty="0"/>
           </a:p>
@@ -10756,7 +10756,7 @@
                 <a:ea typeface="Calibri" pitchFamily="34" charset="-122"/>
                 <a:cs typeface="Calibri" pitchFamily="34" charset="-120"/>
               </a:rPr>
-              <a:t>Word Labs  •  wordlabs.app  •  Root: 'locate' = to find or place something</a:t>
+              <a:t>Word Labs  •  wordlabs.app  •  Root: 'locate' = to find or place</a:t>
             </a:r>
             <a:endParaRPr lang="en-US" sz="800" dirty="0"/>
           </a:p>
@@ -10895,7 +10895,7 @@
                 <a:ea typeface="Trebuchet MS" pitchFamily="34" charset="-122"/>
                 <a:cs typeface="Trebuchet MS" pitchFamily="34" charset="-120"/>
               </a:rPr>
-              <a:t>location</a:t>
+              <a:t>relocation</a:t>
             </a:r>
             <a:endParaRPr lang="en-US" sz="2800" dirty="0"/>
           </a:p>
@@ -11583,7 +11583,7 @@
                 <a:ea typeface="Calibri" pitchFamily="34" charset="-122"/>
                 <a:cs typeface="Calibri" pitchFamily="34" charset="-120"/>
               </a:rPr>
-              <a:t>Word Labs  •  wordlabs.app  •  Root: 'locate' = to find or place something</a:t>
+              <a:t>Word Labs  •  wordlabs.app  •  Root: 'locate' = to find or place</a:t>
             </a:r>
             <a:endParaRPr lang="en-US" sz="800" dirty="0"/>
           </a:p>
@@ -11722,7 +11722,7 @@
                 <a:ea typeface="Trebuchet MS" pitchFamily="34" charset="-122"/>
                 <a:cs typeface="Trebuchet MS" pitchFamily="34" charset="-120"/>
               </a:rPr>
-              <a:t>location</a:t>
+              <a:t>relocation</a:t>
             </a:r>
             <a:endParaRPr lang="en-US" sz="2800" dirty="0"/>
           </a:p>
@@ -11802,7 +11802,7 @@
         </p:nvSpPr>
         <p:spPr>
           <a:xfrm>
-            <a:off x="2938272" y="2258568"/>
+            <a:off x="2221992" y="2258568"/>
             <a:ext cx="1828800" cy="292608"/>
           </a:xfrm>
           <a:prstGeom prst="rect">
@@ -11811,11 +11811,11 @@
             </a:avLst>
           </a:prstGeom>
           <a:solidFill>
-            <a:srgbClr val="CCFBF1"/>
+            <a:srgbClr val="DDD6FE"/>
           </a:solidFill>
           <a:ln w="19050">
             <a:solidFill>
-              <a:srgbClr val="0D9488"/>
+              <a:srgbClr val="7C3AED"/>
             </a:solidFill>
             <a:prstDash val="solid"/>
           </a:ln>
@@ -11836,7 +11836,7 @@
         </p:nvSpPr>
         <p:spPr>
           <a:xfrm>
-            <a:off x="2938272" y="2258568"/>
+            <a:off x="2221992" y="2258568"/>
             <a:ext cx="1828800" cy="292608"/>
           </a:xfrm>
           <a:prstGeom prst="rect">
@@ -11855,13 +11855,13 @@
             <a:r>
               <a:rPr lang="en-US" sz="1300" b="1" dirty="0">
                 <a:solidFill>
-                  <a:srgbClr val="0F766E"/>
+                  <a:srgbClr val="4C1D95"/>
                 </a:solidFill>
                 <a:latin typeface="Trebuchet MS" pitchFamily="34" charset="0"/>
                 <a:ea typeface="Trebuchet MS" pitchFamily="34" charset="-122"/>
                 <a:cs typeface="Trebuchet MS" pitchFamily="34" charset="-120"/>
               </a:rPr>
-              <a:t>locate</a:t>
+              <a:t>re</a:t>
             </a:r>
             <a:endParaRPr lang="en-US" sz="1300" dirty="0"/>
           </a:p>
@@ -11875,7 +11875,7 @@
         </p:nvSpPr>
         <p:spPr>
           <a:xfrm>
-            <a:off x="2938272" y="2569464"/>
+            <a:off x="2221992" y="2569464"/>
             <a:ext cx="1828800" cy="201168"/>
           </a:xfrm>
           <a:prstGeom prst="rect">
@@ -11900,7 +11900,7 @@
                 <a:ea typeface="Calibri" pitchFamily="34" charset="-122"/>
                 <a:cs typeface="Calibri" pitchFamily="34" charset="-120"/>
               </a:rPr>
-              <a:t>to find or place</a:t>
+              <a:t>again</a:t>
             </a:r>
             <a:endParaRPr lang="en-US" sz="850" dirty="0"/>
           </a:p>
@@ -11908,52 +11908,13 @@
       </p:sp>
       <p:sp>
         <p:nvSpPr>
-          <p:cNvPr id="19" name="Text 17"/>
-          <p:cNvSpPr/>
-          <p:nvPr/>
-        </p:nvSpPr>
-        <p:spPr>
-          <a:xfrm>
-            <a:off x="2938272" y="2752344"/>
-            <a:ext cx="1828800" cy="182880"/>
-          </a:xfrm>
-          <a:prstGeom prst="rect">
-            <a:avLst/>
-          </a:prstGeom>
-          <a:noFill/>
-          <a:ln/>
-        </p:spPr>
-        <p:txBody>
-          <a:bodyPr wrap="square" lIns="0" tIns="0" rIns="0" bIns="0" rtlCol="0" anchor="t"/>
-          <a:lstStyle/>
-          <a:p>
-            <a:pPr algn="ctr" indent="0" marL="0">
-              <a:buNone/>
-            </a:pPr>
-            <a:r>
-              <a:rPr lang="en-US" sz="700" i="1" dirty="0">
-                <a:solidFill>
-                  <a:srgbClr val="94A3B8"/>
-                </a:solidFill>
-                <a:latin typeface="Calibri" pitchFamily="34" charset="0"/>
-                <a:ea typeface="Calibri" pitchFamily="34" charset="-122"/>
-                <a:cs typeface="Calibri" pitchFamily="34" charset="-120"/>
-              </a:rPr>
-              <a:t>'e' dropped before vowel suffix</a:t>
-            </a:r>
-            <a:endParaRPr lang="en-US" sz="700" dirty="0"/>
-          </a:p>
-        </p:txBody>
-      </p:sp>
-      <p:sp>
-        <p:nvSpPr>
-          <p:cNvPr id="20" name="Shape 18"/>
-          <p:cNvSpPr/>
-          <p:nvPr/>
-        </p:nvSpPr>
-        <p:spPr>
-          <a:xfrm>
-            <a:off x="5803392" y="2258568"/>
+          <p:cNvPr id="19" name="Shape 17"/>
+          <p:cNvSpPr/>
+          <p:nvPr/>
+        </p:nvSpPr>
+        <p:spPr>
+          <a:xfrm>
+            <a:off x="4370832" y="2258568"/>
             <a:ext cx="1828800" cy="292608"/>
           </a:xfrm>
           <a:prstGeom prst="rect">
@@ -11962,11 +11923,11 @@
             </a:avLst>
           </a:prstGeom>
           <a:solidFill>
-            <a:srgbClr val="FCE7F3"/>
+            <a:srgbClr val="CCFBF1"/>
           </a:solidFill>
           <a:ln w="19050">
             <a:solidFill>
-              <a:srgbClr val="DB2777"/>
+              <a:srgbClr val="0D9488"/>
             </a:solidFill>
             <a:prstDash val="solid"/>
           </a:ln>
@@ -11981,13 +11942,13 @@
       </p:sp>
       <p:sp>
         <p:nvSpPr>
-          <p:cNvPr id="21" name="Text 19"/>
-          <p:cNvSpPr/>
-          <p:nvPr/>
-        </p:nvSpPr>
-        <p:spPr>
-          <a:xfrm>
-            <a:off x="5803392" y="2258568"/>
+          <p:cNvPr id="20" name="Text 18"/>
+          <p:cNvSpPr/>
+          <p:nvPr/>
+        </p:nvSpPr>
+        <p:spPr>
+          <a:xfrm>
+            <a:off x="4370832" y="2258568"/>
             <a:ext cx="1828800" cy="292608"/>
           </a:xfrm>
           <a:prstGeom prst="rect">
@@ -12006,13 +11967,13 @@
             <a:r>
               <a:rPr lang="en-US" sz="1300" b="1" dirty="0">
                 <a:solidFill>
-                  <a:srgbClr val="9D174D"/>
+                  <a:srgbClr val="0F766E"/>
                 </a:solidFill>
                 <a:latin typeface="Trebuchet MS" pitchFamily="34" charset="0"/>
                 <a:ea typeface="Trebuchet MS" pitchFamily="34" charset="-122"/>
                 <a:cs typeface="Trebuchet MS" pitchFamily="34" charset="-120"/>
               </a:rPr>
-              <a:t>ion</a:t>
+              <a:t>locate</a:t>
             </a:r>
             <a:endParaRPr lang="en-US" sz="1300" dirty="0"/>
           </a:p>
@@ -12020,13 +11981,13 @@
       </p:sp>
       <p:sp>
         <p:nvSpPr>
-          <p:cNvPr id="22" name="Text 20"/>
-          <p:cNvSpPr/>
-          <p:nvPr/>
-        </p:nvSpPr>
-        <p:spPr>
-          <a:xfrm>
-            <a:off x="5803392" y="2569464"/>
+          <p:cNvPr id="21" name="Text 19"/>
+          <p:cNvSpPr/>
+          <p:nvPr/>
+        </p:nvSpPr>
+        <p:spPr>
+          <a:xfrm>
+            <a:off x="4370832" y="2569464"/>
             <a:ext cx="1828800" cy="201168"/>
           </a:xfrm>
           <a:prstGeom prst="rect">
@@ -12051,7 +12012,7 @@
                 <a:ea typeface="Calibri" pitchFamily="34" charset="-122"/>
                 <a:cs typeface="Calibri" pitchFamily="34" charset="-120"/>
               </a:rPr>
-              <a:t>act or result of</a:t>
+              <a:t>to find or place</a:t>
             </a:r>
             <a:endParaRPr lang="en-US" sz="850" dirty="0"/>
           </a:p>
@@ -12059,7 +12020,158 @@
       </p:sp>
       <p:sp>
         <p:nvSpPr>
+          <p:cNvPr id="22" name="Text 20"/>
+          <p:cNvSpPr/>
+          <p:nvPr/>
+        </p:nvSpPr>
+        <p:spPr>
+          <a:xfrm>
+            <a:off x="4370832" y="2752344"/>
+            <a:ext cx="1828800" cy="182880"/>
+          </a:xfrm>
+          <a:prstGeom prst="rect">
+            <a:avLst/>
+          </a:prstGeom>
+          <a:noFill/>
+          <a:ln/>
+        </p:spPr>
+        <p:txBody>
+          <a:bodyPr wrap="square" lIns="0" tIns="0" rIns="0" bIns="0" rtlCol="0" anchor="t"/>
+          <a:lstStyle/>
+          <a:p>
+            <a:pPr algn="ctr" indent="0" marL="0">
+              <a:buNone/>
+            </a:pPr>
+            <a:r>
+              <a:rPr lang="en-US" sz="700" i="1" dirty="0">
+                <a:solidFill>
+                  <a:srgbClr val="94A3B8"/>
+                </a:solidFill>
+                <a:latin typeface="Calibri" pitchFamily="34" charset="0"/>
+                <a:ea typeface="Calibri" pitchFamily="34" charset="-122"/>
+                <a:cs typeface="Calibri" pitchFamily="34" charset="-120"/>
+              </a:rPr>
+              <a:t>'e' dropped before vowel suffix</a:t>
+            </a:r>
+            <a:endParaRPr lang="en-US" sz="700" dirty="0"/>
+          </a:p>
+        </p:txBody>
+      </p:sp>
+      <p:sp>
+        <p:nvSpPr>
           <p:cNvPr id="23" name="Shape 21"/>
+          <p:cNvSpPr/>
+          <p:nvPr/>
+        </p:nvSpPr>
+        <p:spPr>
+          <a:xfrm>
+            <a:off x="6519672" y="2258568"/>
+            <a:ext cx="1828800" cy="292608"/>
+          </a:xfrm>
+          <a:prstGeom prst="rect">
+            <a:avLst>
+              <a:gd name="adj" fmla="val 25000"/>
+            </a:avLst>
+          </a:prstGeom>
+          <a:solidFill>
+            <a:srgbClr val="FCE7F3"/>
+          </a:solidFill>
+          <a:ln w="19050">
+            <a:solidFill>
+              <a:srgbClr val="DB2777"/>
+            </a:solidFill>
+            <a:prstDash val="solid"/>
+          </a:ln>
+          <a:effectLst>
+            <a:outerShdw sx="100000" sy="100000" kx="0" ky="0" algn="bl" rotWithShape="0" blurRad="101600" dist="38100" dir="8100000">
+              <a:srgbClr val="000000">
+                <a:alpha val="12000"/>
+              </a:srgbClr>
+            </a:outerShdw>
+          </a:effectLst>
+        </p:spPr>
+      </p:sp>
+      <p:sp>
+        <p:nvSpPr>
+          <p:cNvPr id="24" name="Text 22"/>
+          <p:cNvSpPr/>
+          <p:nvPr/>
+        </p:nvSpPr>
+        <p:spPr>
+          <a:xfrm>
+            <a:off x="6519672" y="2258568"/>
+            <a:ext cx="1828800" cy="292608"/>
+          </a:xfrm>
+          <a:prstGeom prst="rect">
+            <a:avLst/>
+          </a:prstGeom>
+          <a:noFill/>
+          <a:ln/>
+        </p:spPr>
+        <p:txBody>
+          <a:bodyPr wrap="square" lIns="0" tIns="0" rIns="0" bIns="0" rtlCol="0" anchor="ctr"/>
+          <a:lstStyle/>
+          <a:p>
+            <a:pPr algn="ctr" indent="0" marL="0">
+              <a:buNone/>
+            </a:pPr>
+            <a:r>
+              <a:rPr lang="en-US" sz="1300" b="1" dirty="0">
+                <a:solidFill>
+                  <a:srgbClr val="9D174D"/>
+                </a:solidFill>
+                <a:latin typeface="Trebuchet MS" pitchFamily="34" charset="0"/>
+                <a:ea typeface="Trebuchet MS" pitchFamily="34" charset="-122"/>
+                <a:cs typeface="Trebuchet MS" pitchFamily="34" charset="-120"/>
+              </a:rPr>
+              <a:t>ion</a:t>
+            </a:r>
+            <a:endParaRPr lang="en-US" sz="1300" dirty="0"/>
+          </a:p>
+        </p:txBody>
+      </p:sp>
+      <p:sp>
+        <p:nvSpPr>
+          <p:cNvPr id="25" name="Text 23"/>
+          <p:cNvSpPr/>
+          <p:nvPr/>
+        </p:nvSpPr>
+        <p:spPr>
+          <a:xfrm>
+            <a:off x="6519672" y="2569464"/>
+            <a:ext cx="1828800" cy="201168"/>
+          </a:xfrm>
+          <a:prstGeom prst="rect">
+            <a:avLst/>
+          </a:prstGeom>
+          <a:noFill/>
+          <a:ln/>
+        </p:spPr>
+        <p:txBody>
+          <a:bodyPr wrap="square" lIns="0" tIns="0" rIns="0" bIns="0" rtlCol="0" anchor="t"/>
+          <a:lstStyle/>
+          <a:p>
+            <a:pPr algn="ctr" indent="0" marL="0">
+              <a:buNone/>
+            </a:pPr>
+            <a:r>
+              <a:rPr lang="en-US" sz="850" dirty="0">
+                <a:solidFill>
+                  <a:srgbClr val="475569"/>
+                </a:solidFill>
+                <a:latin typeface="Calibri" pitchFamily="34" charset="0"/>
+                <a:ea typeface="Calibri" pitchFamily="34" charset="-122"/>
+                <a:cs typeface="Calibri" pitchFamily="34" charset="-120"/>
+              </a:rPr>
+              <a:t>act or process of</a:t>
+            </a:r>
+            <a:endParaRPr lang="en-US" sz="850" dirty="0"/>
+          </a:p>
+        </p:txBody>
+      </p:sp>
+      <p:sp>
+        <p:nvSpPr>
+          <p:cNvPr id="26" name="Shape 24"/>
           <p:cNvSpPr/>
           <p:nvPr/>
         </p:nvSpPr>
@@ -12086,7 +12198,7 @@
       </p:sp>
       <p:sp>
         <p:nvSpPr>
-          <p:cNvPr id="24" name="Text 22"/>
+          <p:cNvPr id="27" name="Text 25"/>
           <p:cNvSpPr/>
           <p:nvPr/>
         </p:nvSpPr>
@@ -12125,7 +12237,7 @@
       </p:sp>
       <p:sp>
         <p:nvSpPr>
-          <p:cNvPr id="25" name="Shape 23"/>
+          <p:cNvPr id="28" name="Shape 26"/>
           <p:cNvSpPr/>
           <p:nvPr/>
         </p:nvSpPr>
@@ -12152,7 +12264,7 @@
       </p:sp>
       <p:sp>
         <p:nvSpPr>
-          <p:cNvPr id="26" name="Text 24"/>
+          <p:cNvPr id="29" name="Text 27"/>
           <p:cNvSpPr/>
           <p:nvPr/>
         </p:nvSpPr>
@@ -12191,7 +12303,7 @@
       </p:sp>
       <p:sp>
         <p:nvSpPr>
-          <p:cNvPr id="27" name="Shape 25"/>
+          <p:cNvPr id="30" name="Shape 28"/>
           <p:cNvSpPr/>
           <p:nvPr/>
         </p:nvSpPr>
@@ -12218,7 +12330,7 @@
       </p:sp>
       <p:sp>
         <p:nvSpPr>
-          <p:cNvPr id="28" name="Text 26"/>
+          <p:cNvPr id="31" name="Text 29"/>
           <p:cNvSpPr/>
           <p:nvPr/>
         </p:nvSpPr>
@@ -12257,7 +12369,7 @@
       </p:sp>
       <p:sp>
         <p:nvSpPr>
-          <p:cNvPr id="29" name="Shape 27"/>
+          <p:cNvPr id="32" name="Shape 30"/>
           <p:cNvSpPr/>
           <p:nvPr/>
         </p:nvSpPr>
@@ -12284,7 +12396,7 @@
       </p:sp>
       <p:sp>
         <p:nvSpPr>
-          <p:cNvPr id="30" name="Text 28"/>
+          <p:cNvPr id="33" name="Text 31"/>
           <p:cNvSpPr/>
           <p:nvPr/>
         </p:nvSpPr>
@@ -12607,7 +12719,7 @@
                 <a:ea typeface="Calibri" pitchFamily="34" charset="-122"/>
                 <a:cs typeface="Calibri" pitchFamily="34" charset="-120"/>
               </a:rPr>
-              <a:t>Word Labs  •  wordlabs.app  •  Root: 'locate' = to find or place something</a:t>
+              <a:t>Word Labs  •  wordlabs.app  •  Root: 'locate' = to find or place</a:t>
             </a:r>
             <a:endParaRPr lang="en-US" sz="800" dirty="0"/>
           </a:p>
@@ -12746,7 +12858,7 @@
                 <a:ea typeface="Trebuchet MS" pitchFamily="34" charset="-122"/>
                 <a:cs typeface="Trebuchet MS" pitchFamily="34" charset="-120"/>
               </a:rPr>
-              <a:t>location</a:t>
+              <a:t>relocation</a:t>
             </a:r>
             <a:endParaRPr lang="en-US" sz="2800" dirty="0"/>
           </a:p>
@@ -12826,7 +12938,7 @@
         </p:nvSpPr>
         <p:spPr>
           <a:xfrm>
-            <a:off x="2938272" y="2258568"/>
+            <a:off x="2221992" y="2258568"/>
             <a:ext cx="1828800" cy="292608"/>
           </a:xfrm>
           <a:prstGeom prst="rect">
@@ -12835,11 +12947,11 @@
             </a:avLst>
           </a:prstGeom>
           <a:solidFill>
-            <a:srgbClr val="CCFBF1"/>
+            <a:srgbClr val="DDD6FE"/>
           </a:solidFill>
           <a:ln w="19050">
             <a:solidFill>
-              <a:srgbClr val="0D9488"/>
+              <a:srgbClr val="7C3AED"/>
             </a:solidFill>
             <a:prstDash val="solid"/>
           </a:ln>
@@ -12860,7 +12972,7 @@
         </p:nvSpPr>
         <p:spPr>
           <a:xfrm>
-            <a:off x="2938272" y="2258568"/>
+            <a:off x="2221992" y="2258568"/>
             <a:ext cx="1828800" cy="292608"/>
           </a:xfrm>
           <a:prstGeom prst="rect">
@@ -12879,13 +12991,13 @@
             <a:r>
               <a:rPr lang="en-US" sz="1300" b="1" dirty="0">
                 <a:solidFill>
-                  <a:srgbClr val="0F766E"/>
+                  <a:srgbClr val="4C1D95"/>
                 </a:solidFill>
                 <a:latin typeface="Trebuchet MS" pitchFamily="34" charset="0"/>
                 <a:ea typeface="Trebuchet MS" pitchFamily="34" charset="-122"/>
                 <a:cs typeface="Trebuchet MS" pitchFamily="34" charset="-120"/>
               </a:rPr>
-              <a:t>locate</a:t>
+              <a:t>re</a:t>
             </a:r>
             <a:endParaRPr lang="en-US" sz="1300" dirty="0"/>
           </a:p>
@@ -12899,7 +13011,7 @@
         </p:nvSpPr>
         <p:spPr>
           <a:xfrm>
-            <a:off x="2938272" y="2569464"/>
+            <a:off x="2221992" y="2569464"/>
             <a:ext cx="1828800" cy="201168"/>
           </a:xfrm>
           <a:prstGeom prst="rect">
@@ -12924,7 +13036,7 @@
                 <a:ea typeface="Calibri" pitchFamily="34" charset="-122"/>
                 <a:cs typeface="Calibri" pitchFamily="34" charset="-120"/>
               </a:rPr>
-              <a:t>to find or place</a:t>
+              <a:t>again</a:t>
             </a:r>
             <a:endParaRPr lang="en-US" sz="850" dirty="0"/>
           </a:p>
@@ -12932,52 +13044,13 @@
       </p:sp>
       <p:sp>
         <p:nvSpPr>
-          <p:cNvPr id="19" name="Text 17"/>
-          <p:cNvSpPr/>
-          <p:nvPr/>
-        </p:nvSpPr>
-        <p:spPr>
-          <a:xfrm>
-            <a:off x="2938272" y="2752344"/>
-            <a:ext cx="1828800" cy="182880"/>
-          </a:xfrm>
-          <a:prstGeom prst="rect">
-            <a:avLst/>
-          </a:prstGeom>
-          <a:noFill/>
-          <a:ln/>
-        </p:spPr>
-        <p:txBody>
-          <a:bodyPr wrap="square" lIns="0" tIns="0" rIns="0" bIns="0" rtlCol="0" anchor="t"/>
-          <a:lstStyle/>
-          <a:p>
-            <a:pPr algn="ctr" indent="0" marL="0">
-              <a:buNone/>
-            </a:pPr>
-            <a:r>
-              <a:rPr lang="en-US" sz="700" i="1" dirty="0">
-                <a:solidFill>
-                  <a:srgbClr val="94A3B8"/>
-                </a:solidFill>
-                <a:latin typeface="Calibri" pitchFamily="34" charset="0"/>
-                <a:ea typeface="Calibri" pitchFamily="34" charset="-122"/>
-                <a:cs typeface="Calibri" pitchFamily="34" charset="-120"/>
-              </a:rPr>
-              <a:t>'e' dropped before vowel suffix</a:t>
-            </a:r>
-            <a:endParaRPr lang="en-US" sz="700" dirty="0"/>
-          </a:p>
-        </p:txBody>
-      </p:sp>
-      <p:sp>
-        <p:nvSpPr>
-          <p:cNvPr id="20" name="Shape 18"/>
-          <p:cNvSpPr/>
-          <p:nvPr/>
-        </p:nvSpPr>
-        <p:spPr>
-          <a:xfrm>
-            <a:off x="5803392" y="2258568"/>
+          <p:cNvPr id="19" name="Shape 17"/>
+          <p:cNvSpPr/>
+          <p:nvPr/>
+        </p:nvSpPr>
+        <p:spPr>
+          <a:xfrm>
+            <a:off x="4370832" y="2258568"/>
             <a:ext cx="1828800" cy="292608"/>
           </a:xfrm>
           <a:prstGeom prst="rect">
@@ -12986,11 +13059,11 @@
             </a:avLst>
           </a:prstGeom>
           <a:solidFill>
-            <a:srgbClr val="FCE7F3"/>
+            <a:srgbClr val="CCFBF1"/>
           </a:solidFill>
           <a:ln w="19050">
             <a:solidFill>
-              <a:srgbClr val="DB2777"/>
+              <a:srgbClr val="0D9488"/>
             </a:solidFill>
             <a:prstDash val="solid"/>
           </a:ln>
@@ -13005,13 +13078,13 @@
       </p:sp>
       <p:sp>
         <p:nvSpPr>
-          <p:cNvPr id="21" name="Text 19"/>
-          <p:cNvSpPr/>
-          <p:nvPr/>
-        </p:nvSpPr>
-        <p:spPr>
-          <a:xfrm>
-            <a:off x="5803392" y="2258568"/>
+          <p:cNvPr id="20" name="Text 18"/>
+          <p:cNvSpPr/>
+          <p:nvPr/>
+        </p:nvSpPr>
+        <p:spPr>
+          <a:xfrm>
+            <a:off x="4370832" y="2258568"/>
             <a:ext cx="1828800" cy="292608"/>
           </a:xfrm>
           <a:prstGeom prst="rect">
@@ -13030,13 +13103,13 @@
             <a:r>
               <a:rPr lang="en-US" sz="1300" b="1" dirty="0">
                 <a:solidFill>
-                  <a:srgbClr val="9D174D"/>
+                  <a:srgbClr val="0F766E"/>
                 </a:solidFill>
                 <a:latin typeface="Trebuchet MS" pitchFamily="34" charset="0"/>
                 <a:ea typeface="Trebuchet MS" pitchFamily="34" charset="-122"/>
                 <a:cs typeface="Trebuchet MS" pitchFamily="34" charset="-120"/>
               </a:rPr>
-              <a:t>ion</a:t>
+              <a:t>locate</a:t>
             </a:r>
             <a:endParaRPr lang="en-US" sz="1300" dirty="0"/>
           </a:p>
@@ -13044,13 +13117,13 @@
       </p:sp>
       <p:sp>
         <p:nvSpPr>
-          <p:cNvPr id="22" name="Text 20"/>
-          <p:cNvSpPr/>
-          <p:nvPr/>
-        </p:nvSpPr>
-        <p:spPr>
-          <a:xfrm>
-            <a:off x="5803392" y="2569464"/>
+          <p:cNvPr id="21" name="Text 19"/>
+          <p:cNvSpPr/>
+          <p:nvPr/>
+        </p:nvSpPr>
+        <p:spPr>
+          <a:xfrm>
+            <a:off x="4370832" y="2569464"/>
             <a:ext cx="1828800" cy="201168"/>
           </a:xfrm>
           <a:prstGeom prst="rect">
@@ -13075,7 +13148,7 @@
                 <a:ea typeface="Calibri" pitchFamily="34" charset="-122"/>
                 <a:cs typeface="Calibri" pitchFamily="34" charset="-120"/>
               </a:rPr>
-              <a:t>act or result of</a:t>
+              <a:t>to find or place</a:t>
             </a:r>
             <a:endParaRPr lang="en-US" sz="850" dirty="0"/>
           </a:p>
@@ -13083,7 +13156,158 @@
       </p:sp>
       <p:sp>
         <p:nvSpPr>
+          <p:cNvPr id="22" name="Text 20"/>
+          <p:cNvSpPr/>
+          <p:nvPr/>
+        </p:nvSpPr>
+        <p:spPr>
+          <a:xfrm>
+            <a:off x="4370832" y="2752344"/>
+            <a:ext cx="1828800" cy="182880"/>
+          </a:xfrm>
+          <a:prstGeom prst="rect">
+            <a:avLst/>
+          </a:prstGeom>
+          <a:noFill/>
+          <a:ln/>
+        </p:spPr>
+        <p:txBody>
+          <a:bodyPr wrap="square" lIns="0" tIns="0" rIns="0" bIns="0" rtlCol="0" anchor="t"/>
+          <a:lstStyle/>
+          <a:p>
+            <a:pPr algn="ctr" indent="0" marL="0">
+              <a:buNone/>
+            </a:pPr>
+            <a:r>
+              <a:rPr lang="en-US" sz="700" i="1" dirty="0">
+                <a:solidFill>
+                  <a:srgbClr val="94A3B8"/>
+                </a:solidFill>
+                <a:latin typeface="Calibri" pitchFamily="34" charset="0"/>
+                <a:ea typeface="Calibri" pitchFamily="34" charset="-122"/>
+                <a:cs typeface="Calibri" pitchFamily="34" charset="-120"/>
+              </a:rPr>
+              <a:t>'e' dropped before vowel suffix</a:t>
+            </a:r>
+            <a:endParaRPr lang="en-US" sz="700" dirty="0"/>
+          </a:p>
+        </p:txBody>
+      </p:sp>
+      <p:sp>
+        <p:nvSpPr>
           <p:cNvPr id="23" name="Shape 21"/>
+          <p:cNvSpPr/>
+          <p:nvPr/>
+        </p:nvSpPr>
+        <p:spPr>
+          <a:xfrm>
+            <a:off x="6519672" y="2258568"/>
+            <a:ext cx="1828800" cy="292608"/>
+          </a:xfrm>
+          <a:prstGeom prst="rect">
+            <a:avLst>
+              <a:gd name="adj" fmla="val 25000"/>
+            </a:avLst>
+          </a:prstGeom>
+          <a:solidFill>
+            <a:srgbClr val="FCE7F3"/>
+          </a:solidFill>
+          <a:ln w="19050">
+            <a:solidFill>
+              <a:srgbClr val="DB2777"/>
+            </a:solidFill>
+            <a:prstDash val="solid"/>
+          </a:ln>
+          <a:effectLst>
+            <a:outerShdw sx="100000" sy="100000" kx="0" ky="0" algn="bl" rotWithShape="0" blurRad="101600" dist="38100" dir="8100000">
+              <a:srgbClr val="000000">
+                <a:alpha val="12000"/>
+              </a:srgbClr>
+            </a:outerShdw>
+          </a:effectLst>
+        </p:spPr>
+      </p:sp>
+      <p:sp>
+        <p:nvSpPr>
+          <p:cNvPr id="24" name="Text 22"/>
+          <p:cNvSpPr/>
+          <p:nvPr/>
+        </p:nvSpPr>
+        <p:spPr>
+          <a:xfrm>
+            <a:off x="6519672" y="2258568"/>
+            <a:ext cx="1828800" cy="292608"/>
+          </a:xfrm>
+          <a:prstGeom prst="rect">
+            <a:avLst/>
+          </a:prstGeom>
+          <a:noFill/>
+          <a:ln/>
+        </p:spPr>
+        <p:txBody>
+          <a:bodyPr wrap="square" lIns="0" tIns="0" rIns="0" bIns="0" rtlCol="0" anchor="ctr"/>
+          <a:lstStyle/>
+          <a:p>
+            <a:pPr algn="ctr" indent="0" marL="0">
+              <a:buNone/>
+            </a:pPr>
+            <a:r>
+              <a:rPr lang="en-US" sz="1300" b="1" dirty="0">
+                <a:solidFill>
+                  <a:srgbClr val="9D174D"/>
+                </a:solidFill>
+                <a:latin typeface="Trebuchet MS" pitchFamily="34" charset="0"/>
+                <a:ea typeface="Trebuchet MS" pitchFamily="34" charset="-122"/>
+                <a:cs typeface="Trebuchet MS" pitchFamily="34" charset="-120"/>
+              </a:rPr>
+              <a:t>ion</a:t>
+            </a:r>
+            <a:endParaRPr lang="en-US" sz="1300" dirty="0"/>
+          </a:p>
+        </p:txBody>
+      </p:sp>
+      <p:sp>
+        <p:nvSpPr>
+          <p:cNvPr id="25" name="Text 23"/>
+          <p:cNvSpPr/>
+          <p:nvPr/>
+        </p:nvSpPr>
+        <p:spPr>
+          <a:xfrm>
+            <a:off x="6519672" y="2569464"/>
+            <a:ext cx="1828800" cy="201168"/>
+          </a:xfrm>
+          <a:prstGeom prst="rect">
+            <a:avLst/>
+          </a:prstGeom>
+          <a:noFill/>
+          <a:ln/>
+        </p:spPr>
+        <p:txBody>
+          <a:bodyPr wrap="square" lIns="0" tIns="0" rIns="0" bIns="0" rtlCol="0" anchor="t"/>
+          <a:lstStyle/>
+          <a:p>
+            <a:pPr algn="ctr" indent="0" marL="0">
+              <a:buNone/>
+            </a:pPr>
+            <a:r>
+              <a:rPr lang="en-US" sz="850" dirty="0">
+                <a:solidFill>
+                  <a:srgbClr val="475569"/>
+                </a:solidFill>
+                <a:latin typeface="Calibri" pitchFamily="34" charset="0"/>
+                <a:ea typeface="Calibri" pitchFamily="34" charset="-122"/>
+                <a:cs typeface="Calibri" pitchFamily="34" charset="-120"/>
+              </a:rPr>
+              <a:t>act or process of</a:t>
+            </a:r>
+            <a:endParaRPr lang="en-US" sz="850" dirty="0"/>
+          </a:p>
+        </p:txBody>
+      </p:sp>
+      <p:sp>
+        <p:nvSpPr>
+          <p:cNvPr id="26" name="Shape 24"/>
           <p:cNvSpPr/>
           <p:nvPr/>
         </p:nvSpPr>
@@ -13110,7 +13334,7 @@
       </p:sp>
       <p:sp>
         <p:nvSpPr>
-          <p:cNvPr id="24" name="Text 22"/>
+          <p:cNvPr id="27" name="Text 25"/>
           <p:cNvSpPr/>
           <p:nvPr/>
         </p:nvSpPr>
@@ -13149,7 +13373,7 @@
       </p:sp>
       <p:sp>
         <p:nvSpPr>
-          <p:cNvPr id="25" name="Shape 23"/>
+          <p:cNvPr id="28" name="Shape 26"/>
           <p:cNvSpPr/>
           <p:nvPr/>
         </p:nvSpPr>
@@ -13176,14 +13400,14 @@
       </p:sp>
       <p:sp>
         <p:nvSpPr>
-          <p:cNvPr id="26" name="Shape 24"/>
-          <p:cNvSpPr/>
-          <p:nvPr/>
-        </p:nvSpPr>
-        <p:spPr>
-          <a:xfrm>
-            <a:off x="2313432" y="3364992"/>
-            <a:ext cx="1645920" cy="475488"/>
+          <p:cNvPr id="29" name="Shape 27"/>
+          <p:cNvSpPr/>
+          <p:nvPr/>
+        </p:nvSpPr>
+        <p:spPr>
+          <a:xfrm>
+            <a:off x="1975104" y="3364992"/>
+            <a:ext cx="1554480" cy="475488"/>
           </a:xfrm>
           <a:prstGeom prst="rect">
             <a:avLst>
@@ -13203,14 +13427,14 @@
       </p:sp>
       <p:sp>
         <p:nvSpPr>
-          <p:cNvPr id="27" name="Text 25"/>
-          <p:cNvSpPr/>
-          <p:nvPr/>
-        </p:nvSpPr>
-        <p:spPr>
-          <a:xfrm>
-            <a:off x="2313432" y="3364992"/>
-            <a:ext cx="1645920" cy="475488"/>
+          <p:cNvPr id="30" name="Text 28"/>
+          <p:cNvSpPr/>
+          <p:nvPr/>
+        </p:nvSpPr>
+        <p:spPr>
+          <a:xfrm>
+            <a:off x="1975104" y="3364992"/>
+            <a:ext cx="1554480" cy="475488"/>
           </a:xfrm>
           <a:prstGeom prst="rect">
             <a:avLst/>
@@ -13234,7 +13458,7 @@
                 <a:ea typeface="Trebuchet MS" pitchFamily="34" charset="-122"/>
                 <a:cs typeface="Trebuchet MS" pitchFamily="34" charset="-120"/>
               </a:rPr>
-              <a:t>lo</a:t>
+              <a:t>re</a:t>
             </a:r>
             <a:endParaRPr lang="en-US" sz="1400" dirty="0"/>
           </a:p>
@@ -13242,14 +13466,14 @@
       </p:sp>
       <p:sp>
         <p:nvSpPr>
-          <p:cNvPr id="28" name="Text 26"/>
-          <p:cNvSpPr/>
-          <p:nvPr/>
-        </p:nvSpPr>
-        <p:spPr>
-          <a:xfrm>
-            <a:off x="3959352" y="3364992"/>
-            <a:ext cx="411480" cy="475488"/>
+          <p:cNvPr id="31" name="Text 29"/>
+          <p:cNvSpPr/>
+          <p:nvPr/>
+        </p:nvSpPr>
+        <p:spPr>
+          <a:xfrm>
+            <a:off x="3529584" y="3364992"/>
+            <a:ext cx="73152" cy="475488"/>
           </a:xfrm>
           <a:prstGeom prst="rect">
             <a:avLst/>
@@ -13281,14 +13505,14 @@
       </p:sp>
       <p:sp>
         <p:nvSpPr>
-          <p:cNvPr id="29" name="Shape 27"/>
-          <p:cNvSpPr/>
-          <p:nvPr/>
-        </p:nvSpPr>
-        <p:spPr>
-          <a:xfrm>
-            <a:off x="4370832" y="3364992"/>
-            <a:ext cx="1645920" cy="475488"/>
+          <p:cNvPr id="32" name="Shape 30"/>
+          <p:cNvSpPr/>
+          <p:nvPr/>
+        </p:nvSpPr>
+        <p:spPr>
+          <a:xfrm>
+            <a:off x="3602736" y="3364992"/>
+            <a:ext cx="1554480" cy="475488"/>
           </a:xfrm>
           <a:prstGeom prst="rect">
             <a:avLst>
@@ -13308,14 +13532,14 @@
       </p:sp>
       <p:sp>
         <p:nvSpPr>
-          <p:cNvPr id="30" name="Text 28"/>
-          <p:cNvSpPr/>
-          <p:nvPr/>
-        </p:nvSpPr>
-        <p:spPr>
-          <a:xfrm>
-            <a:off x="4370832" y="3364992"/>
-            <a:ext cx="1645920" cy="475488"/>
+          <p:cNvPr id="33" name="Text 31"/>
+          <p:cNvSpPr/>
+          <p:nvPr/>
+        </p:nvSpPr>
+        <p:spPr>
+          <a:xfrm>
+            <a:off x="3602736" y="3364992"/>
+            <a:ext cx="1554480" cy="475488"/>
           </a:xfrm>
           <a:prstGeom prst="rect">
             <a:avLst/>
@@ -13339,7 +13563,7 @@
                 <a:ea typeface="Trebuchet MS" pitchFamily="34" charset="-122"/>
                 <a:cs typeface="Trebuchet MS" pitchFamily="34" charset="-120"/>
               </a:rPr>
-              <a:t>ca</a:t>
+              <a:t>lo</a:t>
             </a:r>
             <a:endParaRPr lang="en-US" sz="1400" dirty="0"/>
           </a:p>
@@ -13347,14 +13571,14 @@
       </p:sp>
       <p:sp>
         <p:nvSpPr>
-          <p:cNvPr id="31" name="Text 29"/>
-          <p:cNvSpPr/>
-          <p:nvPr/>
-        </p:nvSpPr>
-        <p:spPr>
-          <a:xfrm>
-            <a:off x="6016752" y="3364992"/>
-            <a:ext cx="411480" cy="475488"/>
+          <p:cNvPr id="34" name="Text 32"/>
+          <p:cNvSpPr/>
+          <p:nvPr/>
+        </p:nvSpPr>
+        <p:spPr>
+          <a:xfrm>
+            <a:off x="5157216" y="3364992"/>
+            <a:ext cx="73152" cy="475488"/>
           </a:xfrm>
           <a:prstGeom prst="rect">
             <a:avLst/>
@@ -13386,14 +13610,14 @@
       </p:sp>
       <p:sp>
         <p:nvSpPr>
-          <p:cNvPr id="32" name="Shape 30"/>
-          <p:cNvSpPr/>
-          <p:nvPr/>
-        </p:nvSpPr>
-        <p:spPr>
-          <a:xfrm>
-            <a:off x="6428232" y="3364992"/>
-            <a:ext cx="1645920" cy="475488"/>
+          <p:cNvPr id="35" name="Shape 33"/>
+          <p:cNvSpPr/>
+          <p:nvPr/>
+        </p:nvSpPr>
+        <p:spPr>
+          <a:xfrm>
+            <a:off x="5230368" y="3364992"/>
+            <a:ext cx="1554480" cy="475488"/>
           </a:xfrm>
           <a:prstGeom prst="rect">
             <a:avLst>
@@ -13413,14 +13637,14 @@
       </p:sp>
       <p:sp>
         <p:nvSpPr>
-          <p:cNvPr id="33" name="Text 31"/>
-          <p:cNvSpPr/>
-          <p:nvPr/>
-        </p:nvSpPr>
-        <p:spPr>
-          <a:xfrm>
-            <a:off x="6428232" y="3364992"/>
-            <a:ext cx="1645920" cy="475488"/>
+          <p:cNvPr id="36" name="Text 34"/>
+          <p:cNvSpPr/>
+          <p:nvPr/>
+        </p:nvSpPr>
+        <p:spPr>
+          <a:xfrm>
+            <a:off x="5230368" y="3364992"/>
+            <a:ext cx="1554480" cy="475488"/>
           </a:xfrm>
           <a:prstGeom prst="rect">
             <a:avLst/>
@@ -13444,6 +13668,111 @@
                 <a:ea typeface="Trebuchet MS" pitchFamily="34" charset="-122"/>
                 <a:cs typeface="Trebuchet MS" pitchFamily="34" charset="-120"/>
               </a:rPr>
+              <a:t>ca</a:t>
+            </a:r>
+            <a:endParaRPr lang="en-US" sz="1400" dirty="0"/>
+          </a:p>
+        </p:txBody>
+      </p:sp>
+      <p:sp>
+        <p:nvSpPr>
+          <p:cNvPr id="37" name="Text 35"/>
+          <p:cNvSpPr/>
+          <p:nvPr/>
+        </p:nvSpPr>
+        <p:spPr>
+          <a:xfrm>
+            <a:off x="6784848" y="3364992"/>
+            <a:ext cx="73152" cy="475488"/>
+          </a:xfrm>
+          <a:prstGeom prst="rect">
+            <a:avLst/>
+          </a:prstGeom>
+          <a:noFill/>
+          <a:ln/>
+        </p:spPr>
+        <p:txBody>
+          <a:bodyPr wrap="square" lIns="0" tIns="0" rIns="0" bIns="0" rtlCol="0" anchor="ctr"/>
+          <a:lstStyle/>
+          <a:p>
+            <a:pPr algn="ctr" indent="0" marL="0">
+              <a:buNone/>
+            </a:pPr>
+            <a:r>
+              <a:rPr lang="en-US" sz="1600" b="1" dirty="0">
+                <a:solidFill>
+                  <a:srgbClr val="0D9488"/>
+                </a:solidFill>
+                <a:latin typeface="Trebuchet MS" pitchFamily="34" charset="0"/>
+                <a:ea typeface="Trebuchet MS" pitchFamily="34" charset="-122"/>
+                <a:cs typeface="Trebuchet MS" pitchFamily="34" charset="-120"/>
+              </a:rPr>
+              <a:t>·</a:t>
+            </a:r>
+            <a:endParaRPr lang="en-US" sz="1600" dirty="0"/>
+          </a:p>
+        </p:txBody>
+      </p:sp>
+      <p:sp>
+        <p:nvSpPr>
+          <p:cNvPr id="38" name="Shape 36"/>
+          <p:cNvSpPr/>
+          <p:nvPr/>
+        </p:nvSpPr>
+        <p:spPr>
+          <a:xfrm>
+            <a:off x="6858000" y="3364992"/>
+            <a:ext cx="1554480" cy="475488"/>
+          </a:xfrm>
+          <a:prstGeom prst="rect">
+            <a:avLst>
+              <a:gd name="adj" fmla="val 9615"/>
+            </a:avLst>
+          </a:prstGeom>
+          <a:solidFill>
+            <a:srgbClr val="FFFFFF"/>
+          </a:solidFill>
+          <a:ln w="12700">
+            <a:solidFill>
+              <a:srgbClr val="0D9488"/>
+            </a:solidFill>
+            <a:prstDash val="solid"/>
+          </a:ln>
+        </p:spPr>
+      </p:sp>
+      <p:sp>
+        <p:nvSpPr>
+          <p:cNvPr id="39" name="Text 37"/>
+          <p:cNvSpPr/>
+          <p:nvPr/>
+        </p:nvSpPr>
+        <p:spPr>
+          <a:xfrm>
+            <a:off x="6858000" y="3364992"/>
+            <a:ext cx="1554480" cy="475488"/>
+          </a:xfrm>
+          <a:prstGeom prst="rect">
+            <a:avLst/>
+          </a:prstGeom>
+          <a:noFill/>
+          <a:ln/>
+        </p:spPr>
+        <p:txBody>
+          <a:bodyPr wrap="square" lIns="0" tIns="0" rIns="0" bIns="0" rtlCol="0" anchor="ctr"/>
+          <a:lstStyle/>
+          <a:p>
+            <a:pPr algn="ctr" indent="0" marL="0">
+              <a:buNone/>
+            </a:pPr>
+            <a:r>
+              <a:rPr lang="en-US" sz="1400" b="1" dirty="0">
+                <a:solidFill>
+                  <a:srgbClr val="0D9488"/>
+                </a:solidFill>
+                <a:latin typeface="Trebuchet MS" pitchFamily="34" charset="0"/>
+                <a:ea typeface="Trebuchet MS" pitchFamily="34" charset="-122"/>
+                <a:cs typeface="Trebuchet MS" pitchFamily="34" charset="-120"/>
+              </a:rPr>
               <a:t>tion</a:t>
             </a:r>
             <a:endParaRPr lang="en-US" sz="1400" dirty="0"/>
@@ -13452,7 +13781,7 @@
       </p:sp>
       <p:sp>
         <p:nvSpPr>
-          <p:cNvPr id="34" name="Shape 32"/>
+          <p:cNvPr id="40" name="Shape 38"/>
           <p:cNvSpPr/>
           <p:nvPr/>
         </p:nvSpPr>
@@ -13479,7 +13808,7 @@
       </p:sp>
       <p:sp>
         <p:nvSpPr>
-          <p:cNvPr id="35" name="Text 33"/>
+          <p:cNvPr id="41" name="Text 39"/>
           <p:cNvSpPr/>
           <p:nvPr/>
         </p:nvSpPr>
@@ -13518,7 +13847,7 @@
       </p:sp>
       <p:sp>
         <p:nvSpPr>
-          <p:cNvPr id="36" name="Shape 34"/>
+          <p:cNvPr id="42" name="Shape 40"/>
           <p:cNvSpPr/>
           <p:nvPr/>
         </p:nvSpPr>
@@ -13545,7 +13874,7 @@
       </p:sp>
       <p:sp>
         <p:nvSpPr>
-          <p:cNvPr id="37" name="Text 35"/>
+          <p:cNvPr id="43" name="Text 41"/>
           <p:cNvSpPr/>
           <p:nvPr/>
         </p:nvSpPr>
@@ -13777,7 +14106,7 @@
                 <a:ea typeface="Calibri" pitchFamily="34" charset="-122"/>
                 <a:cs typeface="Calibri" pitchFamily="34" charset="-120"/>
               </a:rPr>
-              <a:t>Root 'locate' — to find or place something</a:t>
+              <a:t>Root 'locate' — to find or place</a:t>
             </a:r>
             <a:endParaRPr lang="en-US" sz="1600" dirty="0"/>
           </a:p>
@@ -14133,7 +14462,7 @@
                 <a:ea typeface="Calibri" pitchFamily="34" charset="-122"/>
                 <a:cs typeface="Calibri" pitchFamily="34" charset="-120"/>
               </a:rPr>
-              <a:t>Word Labs  •  wordlabs.app  •  Root: 'locate' = to find or place something</a:t>
+              <a:t>Word Labs  •  wordlabs.app  •  Root: 'locate' = to find or place</a:t>
             </a:r>
             <a:endParaRPr lang="en-US" sz="800" dirty="0"/>
           </a:p>
@@ -14272,7 +14601,7 @@
                 <a:ea typeface="Trebuchet MS" pitchFamily="34" charset="-122"/>
                 <a:cs typeface="Trebuchet MS" pitchFamily="34" charset="-120"/>
               </a:rPr>
-              <a:t>location</a:t>
+              <a:t>relocation</a:t>
             </a:r>
             <a:endParaRPr lang="en-US" sz="2800" dirty="0"/>
           </a:p>
@@ -14352,7 +14681,7 @@
         </p:nvSpPr>
         <p:spPr>
           <a:xfrm>
-            <a:off x="2938272" y="2258568"/>
+            <a:off x="2221992" y="2258568"/>
             <a:ext cx="1828800" cy="292608"/>
           </a:xfrm>
           <a:prstGeom prst="rect">
@@ -14361,11 +14690,11 @@
             </a:avLst>
           </a:prstGeom>
           <a:solidFill>
-            <a:srgbClr val="CCFBF1"/>
+            <a:srgbClr val="DDD6FE"/>
           </a:solidFill>
           <a:ln w="19050">
             <a:solidFill>
-              <a:srgbClr val="0D9488"/>
+              <a:srgbClr val="7C3AED"/>
             </a:solidFill>
             <a:prstDash val="solid"/>
           </a:ln>
@@ -14386,7 +14715,7 @@
         </p:nvSpPr>
         <p:spPr>
           <a:xfrm>
-            <a:off x="2938272" y="2258568"/>
+            <a:off x="2221992" y="2258568"/>
             <a:ext cx="1828800" cy="292608"/>
           </a:xfrm>
           <a:prstGeom prst="rect">
@@ -14405,13 +14734,13 @@
             <a:r>
               <a:rPr lang="en-US" sz="1300" b="1" dirty="0">
                 <a:solidFill>
-                  <a:srgbClr val="0F766E"/>
+                  <a:srgbClr val="4C1D95"/>
                 </a:solidFill>
                 <a:latin typeface="Trebuchet MS" pitchFamily="34" charset="0"/>
                 <a:ea typeface="Trebuchet MS" pitchFamily="34" charset="-122"/>
                 <a:cs typeface="Trebuchet MS" pitchFamily="34" charset="-120"/>
               </a:rPr>
-              <a:t>locate</a:t>
+              <a:t>re</a:t>
             </a:r>
             <a:endParaRPr lang="en-US" sz="1300" dirty="0"/>
           </a:p>
@@ -14425,7 +14754,7 @@
         </p:nvSpPr>
         <p:spPr>
           <a:xfrm>
-            <a:off x="2938272" y="2569464"/>
+            <a:off x="2221992" y="2569464"/>
             <a:ext cx="1828800" cy="201168"/>
           </a:xfrm>
           <a:prstGeom prst="rect">
@@ -14450,7 +14779,7 @@
                 <a:ea typeface="Calibri" pitchFamily="34" charset="-122"/>
                 <a:cs typeface="Calibri" pitchFamily="34" charset="-120"/>
               </a:rPr>
-              <a:t>to find or place</a:t>
+              <a:t>again</a:t>
             </a:r>
             <a:endParaRPr lang="en-US" sz="850" dirty="0"/>
           </a:p>
@@ -14458,52 +14787,13 @@
       </p:sp>
       <p:sp>
         <p:nvSpPr>
-          <p:cNvPr id="19" name="Text 17"/>
-          <p:cNvSpPr/>
-          <p:nvPr/>
-        </p:nvSpPr>
-        <p:spPr>
-          <a:xfrm>
-            <a:off x="2938272" y="2752344"/>
-            <a:ext cx="1828800" cy="182880"/>
-          </a:xfrm>
-          <a:prstGeom prst="rect">
-            <a:avLst/>
-          </a:prstGeom>
-          <a:noFill/>
-          <a:ln/>
-        </p:spPr>
-        <p:txBody>
-          <a:bodyPr wrap="square" lIns="0" tIns="0" rIns="0" bIns="0" rtlCol="0" anchor="t"/>
-          <a:lstStyle/>
-          <a:p>
-            <a:pPr algn="ctr" indent="0" marL="0">
-              <a:buNone/>
-            </a:pPr>
-            <a:r>
-              <a:rPr lang="en-US" sz="700" i="1" dirty="0">
-                <a:solidFill>
-                  <a:srgbClr val="94A3B8"/>
-                </a:solidFill>
-                <a:latin typeface="Calibri" pitchFamily="34" charset="0"/>
-                <a:ea typeface="Calibri" pitchFamily="34" charset="-122"/>
-                <a:cs typeface="Calibri" pitchFamily="34" charset="-120"/>
-              </a:rPr>
-              <a:t>'e' dropped before vowel suffix</a:t>
-            </a:r>
-            <a:endParaRPr lang="en-US" sz="700" dirty="0"/>
-          </a:p>
-        </p:txBody>
-      </p:sp>
-      <p:sp>
-        <p:nvSpPr>
-          <p:cNvPr id="20" name="Shape 18"/>
-          <p:cNvSpPr/>
-          <p:nvPr/>
-        </p:nvSpPr>
-        <p:spPr>
-          <a:xfrm>
-            <a:off x="5803392" y="2258568"/>
+          <p:cNvPr id="19" name="Shape 17"/>
+          <p:cNvSpPr/>
+          <p:nvPr/>
+        </p:nvSpPr>
+        <p:spPr>
+          <a:xfrm>
+            <a:off x="4370832" y="2258568"/>
             <a:ext cx="1828800" cy="292608"/>
           </a:xfrm>
           <a:prstGeom prst="rect">
@@ -14512,11 +14802,11 @@
             </a:avLst>
           </a:prstGeom>
           <a:solidFill>
-            <a:srgbClr val="FCE7F3"/>
+            <a:srgbClr val="CCFBF1"/>
           </a:solidFill>
           <a:ln w="19050">
             <a:solidFill>
-              <a:srgbClr val="DB2777"/>
+              <a:srgbClr val="0D9488"/>
             </a:solidFill>
             <a:prstDash val="solid"/>
           </a:ln>
@@ -14531,13 +14821,13 @@
       </p:sp>
       <p:sp>
         <p:nvSpPr>
-          <p:cNvPr id="21" name="Text 19"/>
-          <p:cNvSpPr/>
-          <p:nvPr/>
-        </p:nvSpPr>
-        <p:spPr>
-          <a:xfrm>
-            <a:off x="5803392" y="2258568"/>
+          <p:cNvPr id="20" name="Text 18"/>
+          <p:cNvSpPr/>
+          <p:nvPr/>
+        </p:nvSpPr>
+        <p:spPr>
+          <a:xfrm>
+            <a:off x="4370832" y="2258568"/>
             <a:ext cx="1828800" cy="292608"/>
           </a:xfrm>
           <a:prstGeom prst="rect">
@@ -14556,13 +14846,13 @@
             <a:r>
               <a:rPr lang="en-US" sz="1300" b="1" dirty="0">
                 <a:solidFill>
-                  <a:srgbClr val="9D174D"/>
+                  <a:srgbClr val="0F766E"/>
                 </a:solidFill>
                 <a:latin typeface="Trebuchet MS" pitchFamily="34" charset="0"/>
                 <a:ea typeface="Trebuchet MS" pitchFamily="34" charset="-122"/>
                 <a:cs typeface="Trebuchet MS" pitchFamily="34" charset="-120"/>
               </a:rPr>
-              <a:t>ion</a:t>
+              <a:t>locate</a:t>
             </a:r>
             <a:endParaRPr lang="en-US" sz="1300" dirty="0"/>
           </a:p>
@@ -14570,13 +14860,13 @@
       </p:sp>
       <p:sp>
         <p:nvSpPr>
-          <p:cNvPr id="22" name="Text 20"/>
-          <p:cNvSpPr/>
-          <p:nvPr/>
-        </p:nvSpPr>
-        <p:spPr>
-          <a:xfrm>
-            <a:off x="5803392" y="2569464"/>
+          <p:cNvPr id="21" name="Text 19"/>
+          <p:cNvSpPr/>
+          <p:nvPr/>
+        </p:nvSpPr>
+        <p:spPr>
+          <a:xfrm>
+            <a:off x="4370832" y="2569464"/>
             <a:ext cx="1828800" cy="201168"/>
           </a:xfrm>
           <a:prstGeom prst="rect">
@@ -14601,7 +14891,7 @@
                 <a:ea typeface="Calibri" pitchFamily="34" charset="-122"/>
                 <a:cs typeface="Calibri" pitchFamily="34" charset="-120"/>
               </a:rPr>
-              <a:t>act or result of</a:t>
+              <a:t>to find or place</a:t>
             </a:r>
             <a:endParaRPr lang="en-US" sz="850" dirty="0"/>
           </a:p>
@@ -14609,7 +14899,158 @@
       </p:sp>
       <p:sp>
         <p:nvSpPr>
+          <p:cNvPr id="22" name="Text 20"/>
+          <p:cNvSpPr/>
+          <p:nvPr/>
+        </p:nvSpPr>
+        <p:spPr>
+          <a:xfrm>
+            <a:off x="4370832" y="2752344"/>
+            <a:ext cx="1828800" cy="182880"/>
+          </a:xfrm>
+          <a:prstGeom prst="rect">
+            <a:avLst/>
+          </a:prstGeom>
+          <a:noFill/>
+          <a:ln/>
+        </p:spPr>
+        <p:txBody>
+          <a:bodyPr wrap="square" lIns="0" tIns="0" rIns="0" bIns="0" rtlCol="0" anchor="t"/>
+          <a:lstStyle/>
+          <a:p>
+            <a:pPr algn="ctr" indent="0" marL="0">
+              <a:buNone/>
+            </a:pPr>
+            <a:r>
+              <a:rPr lang="en-US" sz="700" i="1" dirty="0">
+                <a:solidFill>
+                  <a:srgbClr val="94A3B8"/>
+                </a:solidFill>
+                <a:latin typeface="Calibri" pitchFamily="34" charset="0"/>
+                <a:ea typeface="Calibri" pitchFamily="34" charset="-122"/>
+                <a:cs typeface="Calibri" pitchFamily="34" charset="-120"/>
+              </a:rPr>
+              <a:t>'e' dropped before vowel suffix</a:t>
+            </a:r>
+            <a:endParaRPr lang="en-US" sz="700" dirty="0"/>
+          </a:p>
+        </p:txBody>
+      </p:sp>
+      <p:sp>
+        <p:nvSpPr>
           <p:cNvPr id="23" name="Shape 21"/>
+          <p:cNvSpPr/>
+          <p:nvPr/>
+        </p:nvSpPr>
+        <p:spPr>
+          <a:xfrm>
+            <a:off x="6519672" y="2258568"/>
+            <a:ext cx="1828800" cy="292608"/>
+          </a:xfrm>
+          <a:prstGeom prst="rect">
+            <a:avLst>
+              <a:gd name="adj" fmla="val 25000"/>
+            </a:avLst>
+          </a:prstGeom>
+          <a:solidFill>
+            <a:srgbClr val="FCE7F3"/>
+          </a:solidFill>
+          <a:ln w="19050">
+            <a:solidFill>
+              <a:srgbClr val="DB2777"/>
+            </a:solidFill>
+            <a:prstDash val="solid"/>
+          </a:ln>
+          <a:effectLst>
+            <a:outerShdw sx="100000" sy="100000" kx="0" ky="0" algn="bl" rotWithShape="0" blurRad="101600" dist="38100" dir="8100000">
+              <a:srgbClr val="000000">
+                <a:alpha val="12000"/>
+              </a:srgbClr>
+            </a:outerShdw>
+          </a:effectLst>
+        </p:spPr>
+      </p:sp>
+      <p:sp>
+        <p:nvSpPr>
+          <p:cNvPr id="24" name="Text 22"/>
+          <p:cNvSpPr/>
+          <p:nvPr/>
+        </p:nvSpPr>
+        <p:spPr>
+          <a:xfrm>
+            <a:off x="6519672" y="2258568"/>
+            <a:ext cx="1828800" cy="292608"/>
+          </a:xfrm>
+          <a:prstGeom prst="rect">
+            <a:avLst/>
+          </a:prstGeom>
+          <a:noFill/>
+          <a:ln/>
+        </p:spPr>
+        <p:txBody>
+          <a:bodyPr wrap="square" lIns="0" tIns="0" rIns="0" bIns="0" rtlCol="0" anchor="ctr"/>
+          <a:lstStyle/>
+          <a:p>
+            <a:pPr algn="ctr" indent="0" marL="0">
+              <a:buNone/>
+            </a:pPr>
+            <a:r>
+              <a:rPr lang="en-US" sz="1300" b="1" dirty="0">
+                <a:solidFill>
+                  <a:srgbClr val="9D174D"/>
+                </a:solidFill>
+                <a:latin typeface="Trebuchet MS" pitchFamily="34" charset="0"/>
+                <a:ea typeface="Trebuchet MS" pitchFamily="34" charset="-122"/>
+                <a:cs typeface="Trebuchet MS" pitchFamily="34" charset="-120"/>
+              </a:rPr>
+              <a:t>ion</a:t>
+            </a:r>
+            <a:endParaRPr lang="en-US" sz="1300" dirty="0"/>
+          </a:p>
+        </p:txBody>
+      </p:sp>
+      <p:sp>
+        <p:nvSpPr>
+          <p:cNvPr id="25" name="Text 23"/>
+          <p:cNvSpPr/>
+          <p:nvPr/>
+        </p:nvSpPr>
+        <p:spPr>
+          <a:xfrm>
+            <a:off x="6519672" y="2569464"/>
+            <a:ext cx="1828800" cy="201168"/>
+          </a:xfrm>
+          <a:prstGeom prst="rect">
+            <a:avLst/>
+          </a:prstGeom>
+          <a:noFill/>
+          <a:ln/>
+        </p:spPr>
+        <p:txBody>
+          <a:bodyPr wrap="square" lIns="0" tIns="0" rIns="0" bIns="0" rtlCol="0" anchor="t"/>
+          <a:lstStyle/>
+          <a:p>
+            <a:pPr algn="ctr" indent="0" marL="0">
+              <a:buNone/>
+            </a:pPr>
+            <a:r>
+              <a:rPr lang="en-US" sz="850" dirty="0">
+                <a:solidFill>
+                  <a:srgbClr val="475569"/>
+                </a:solidFill>
+                <a:latin typeface="Calibri" pitchFamily="34" charset="0"/>
+                <a:ea typeface="Calibri" pitchFamily="34" charset="-122"/>
+                <a:cs typeface="Calibri" pitchFamily="34" charset="-120"/>
+              </a:rPr>
+              <a:t>act or process of</a:t>
+            </a:r>
+            <a:endParaRPr lang="en-US" sz="850" dirty="0"/>
+          </a:p>
+        </p:txBody>
+      </p:sp>
+      <p:sp>
+        <p:nvSpPr>
+          <p:cNvPr id="26" name="Shape 24"/>
           <p:cNvSpPr/>
           <p:nvPr/>
         </p:nvSpPr>
@@ -14636,7 +15077,7 @@
       </p:sp>
       <p:sp>
         <p:nvSpPr>
-          <p:cNvPr id="24" name="Text 22"/>
+          <p:cNvPr id="27" name="Text 25"/>
           <p:cNvSpPr/>
           <p:nvPr/>
         </p:nvSpPr>
@@ -14675,7 +15116,7 @@
       </p:sp>
       <p:sp>
         <p:nvSpPr>
-          <p:cNvPr id="25" name="Shape 23"/>
+          <p:cNvPr id="28" name="Shape 26"/>
           <p:cNvSpPr/>
           <p:nvPr/>
         </p:nvSpPr>
@@ -14702,14 +15143,14 @@
       </p:sp>
       <p:sp>
         <p:nvSpPr>
-          <p:cNvPr id="26" name="Shape 24"/>
-          <p:cNvSpPr/>
-          <p:nvPr/>
-        </p:nvSpPr>
-        <p:spPr>
-          <a:xfrm>
-            <a:off x="2313432" y="3364992"/>
-            <a:ext cx="1645920" cy="475488"/>
+          <p:cNvPr id="29" name="Shape 27"/>
+          <p:cNvSpPr/>
+          <p:nvPr/>
+        </p:nvSpPr>
+        <p:spPr>
+          <a:xfrm>
+            <a:off x="1975104" y="3364992"/>
+            <a:ext cx="1554480" cy="475488"/>
           </a:xfrm>
           <a:prstGeom prst="rect">
             <a:avLst>
@@ -14729,14 +15170,14 @@
       </p:sp>
       <p:sp>
         <p:nvSpPr>
-          <p:cNvPr id="27" name="Text 25"/>
-          <p:cNvSpPr/>
-          <p:nvPr/>
-        </p:nvSpPr>
-        <p:spPr>
-          <a:xfrm>
-            <a:off x="2313432" y="3364992"/>
-            <a:ext cx="1645920" cy="475488"/>
+          <p:cNvPr id="30" name="Text 28"/>
+          <p:cNvSpPr/>
+          <p:nvPr/>
+        </p:nvSpPr>
+        <p:spPr>
+          <a:xfrm>
+            <a:off x="1975104" y="3364992"/>
+            <a:ext cx="1554480" cy="475488"/>
           </a:xfrm>
           <a:prstGeom prst="rect">
             <a:avLst/>
@@ -14760,7 +15201,7 @@
                 <a:ea typeface="Trebuchet MS" pitchFamily="34" charset="-122"/>
                 <a:cs typeface="Trebuchet MS" pitchFamily="34" charset="-120"/>
               </a:rPr>
-              <a:t>lo</a:t>
+              <a:t>re</a:t>
             </a:r>
             <a:endParaRPr lang="en-US" sz="1400" dirty="0"/>
           </a:p>
@@ -14768,14 +15209,14 @@
       </p:sp>
       <p:sp>
         <p:nvSpPr>
-          <p:cNvPr id="28" name="Text 26"/>
-          <p:cNvSpPr/>
-          <p:nvPr/>
-        </p:nvSpPr>
-        <p:spPr>
-          <a:xfrm>
-            <a:off x="3959352" y="3364992"/>
-            <a:ext cx="411480" cy="475488"/>
+          <p:cNvPr id="31" name="Text 29"/>
+          <p:cNvSpPr/>
+          <p:nvPr/>
+        </p:nvSpPr>
+        <p:spPr>
+          <a:xfrm>
+            <a:off x="3529584" y="3364992"/>
+            <a:ext cx="73152" cy="475488"/>
           </a:xfrm>
           <a:prstGeom prst="rect">
             <a:avLst/>
@@ -14807,14 +15248,14 @@
       </p:sp>
       <p:sp>
         <p:nvSpPr>
-          <p:cNvPr id="29" name="Shape 27"/>
-          <p:cNvSpPr/>
-          <p:nvPr/>
-        </p:nvSpPr>
-        <p:spPr>
-          <a:xfrm>
-            <a:off x="4370832" y="3364992"/>
-            <a:ext cx="1645920" cy="475488"/>
+          <p:cNvPr id="32" name="Shape 30"/>
+          <p:cNvSpPr/>
+          <p:nvPr/>
+        </p:nvSpPr>
+        <p:spPr>
+          <a:xfrm>
+            <a:off x="3602736" y="3364992"/>
+            <a:ext cx="1554480" cy="475488"/>
           </a:xfrm>
           <a:prstGeom prst="rect">
             <a:avLst>
@@ -14834,14 +15275,14 @@
       </p:sp>
       <p:sp>
         <p:nvSpPr>
-          <p:cNvPr id="30" name="Text 28"/>
-          <p:cNvSpPr/>
-          <p:nvPr/>
-        </p:nvSpPr>
-        <p:spPr>
-          <a:xfrm>
-            <a:off x="4370832" y="3364992"/>
-            <a:ext cx="1645920" cy="475488"/>
+          <p:cNvPr id="33" name="Text 31"/>
+          <p:cNvSpPr/>
+          <p:nvPr/>
+        </p:nvSpPr>
+        <p:spPr>
+          <a:xfrm>
+            <a:off x="3602736" y="3364992"/>
+            <a:ext cx="1554480" cy="475488"/>
           </a:xfrm>
           <a:prstGeom prst="rect">
             <a:avLst/>
@@ -14865,7 +15306,7 @@
                 <a:ea typeface="Trebuchet MS" pitchFamily="34" charset="-122"/>
                 <a:cs typeface="Trebuchet MS" pitchFamily="34" charset="-120"/>
               </a:rPr>
-              <a:t>ca</a:t>
+              <a:t>lo</a:t>
             </a:r>
             <a:endParaRPr lang="en-US" sz="1400" dirty="0"/>
           </a:p>
@@ -14873,14 +15314,14 @@
       </p:sp>
       <p:sp>
         <p:nvSpPr>
-          <p:cNvPr id="31" name="Text 29"/>
-          <p:cNvSpPr/>
-          <p:nvPr/>
-        </p:nvSpPr>
-        <p:spPr>
-          <a:xfrm>
-            <a:off x="6016752" y="3364992"/>
-            <a:ext cx="411480" cy="475488"/>
+          <p:cNvPr id="34" name="Text 32"/>
+          <p:cNvSpPr/>
+          <p:nvPr/>
+        </p:nvSpPr>
+        <p:spPr>
+          <a:xfrm>
+            <a:off x="5157216" y="3364992"/>
+            <a:ext cx="73152" cy="475488"/>
           </a:xfrm>
           <a:prstGeom prst="rect">
             <a:avLst/>
@@ -14912,14 +15353,14 @@
       </p:sp>
       <p:sp>
         <p:nvSpPr>
-          <p:cNvPr id="32" name="Shape 30"/>
-          <p:cNvSpPr/>
-          <p:nvPr/>
-        </p:nvSpPr>
-        <p:spPr>
-          <a:xfrm>
-            <a:off x="6428232" y="3364992"/>
-            <a:ext cx="1645920" cy="475488"/>
+          <p:cNvPr id="35" name="Shape 33"/>
+          <p:cNvSpPr/>
+          <p:nvPr/>
+        </p:nvSpPr>
+        <p:spPr>
+          <a:xfrm>
+            <a:off x="5230368" y="3364992"/>
+            <a:ext cx="1554480" cy="475488"/>
           </a:xfrm>
           <a:prstGeom prst="rect">
             <a:avLst>
@@ -14939,14 +15380,14 @@
       </p:sp>
       <p:sp>
         <p:nvSpPr>
-          <p:cNvPr id="33" name="Text 31"/>
-          <p:cNvSpPr/>
-          <p:nvPr/>
-        </p:nvSpPr>
-        <p:spPr>
-          <a:xfrm>
-            <a:off x="6428232" y="3364992"/>
-            <a:ext cx="1645920" cy="475488"/>
+          <p:cNvPr id="36" name="Text 34"/>
+          <p:cNvSpPr/>
+          <p:nvPr/>
+        </p:nvSpPr>
+        <p:spPr>
+          <a:xfrm>
+            <a:off x="5230368" y="3364992"/>
+            <a:ext cx="1554480" cy="475488"/>
           </a:xfrm>
           <a:prstGeom prst="rect">
             <a:avLst/>
@@ -14970,6 +15411,111 @@
                 <a:ea typeface="Trebuchet MS" pitchFamily="34" charset="-122"/>
                 <a:cs typeface="Trebuchet MS" pitchFamily="34" charset="-120"/>
               </a:rPr>
+              <a:t>ca</a:t>
+            </a:r>
+            <a:endParaRPr lang="en-US" sz="1400" dirty="0"/>
+          </a:p>
+        </p:txBody>
+      </p:sp>
+      <p:sp>
+        <p:nvSpPr>
+          <p:cNvPr id="37" name="Text 35"/>
+          <p:cNvSpPr/>
+          <p:nvPr/>
+        </p:nvSpPr>
+        <p:spPr>
+          <a:xfrm>
+            <a:off x="6784848" y="3364992"/>
+            <a:ext cx="73152" cy="475488"/>
+          </a:xfrm>
+          <a:prstGeom prst="rect">
+            <a:avLst/>
+          </a:prstGeom>
+          <a:noFill/>
+          <a:ln/>
+        </p:spPr>
+        <p:txBody>
+          <a:bodyPr wrap="square" lIns="0" tIns="0" rIns="0" bIns="0" rtlCol="0" anchor="ctr"/>
+          <a:lstStyle/>
+          <a:p>
+            <a:pPr algn="ctr" indent="0" marL="0">
+              <a:buNone/>
+            </a:pPr>
+            <a:r>
+              <a:rPr lang="en-US" sz="1600" b="1" dirty="0">
+                <a:solidFill>
+                  <a:srgbClr val="0D9488"/>
+                </a:solidFill>
+                <a:latin typeface="Trebuchet MS" pitchFamily="34" charset="0"/>
+                <a:ea typeface="Trebuchet MS" pitchFamily="34" charset="-122"/>
+                <a:cs typeface="Trebuchet MS" pitchFamily="34" charset="-120"/>
+              </a:rPr>
+              <a:t>·</a:t>
+            </a:r>
+            <a:endParaRPr lang="en-US" sz="1600" dirty="0"/>
+          </a:p>
+        </p:txBody>
+      </p:sp>
+      <p:sp>
+        <p:nvSpPr>
+          <p:cNvPr id="38" name="Shape 36"/>
+          <p:cNvSpPr/>
+          <p:nvPr/>
+        </p:nvSpPr>
+        <p:spPr>
+          <a:xfrm>
+            <a:off x="6858000" y="3364992"/>
+            <a:ext cx="1554480" cy="475488"/>
+          </a:xfrm>
+          <a:prstGeom prst="rect">
+            <a:avLst>
+              <a:gd name="adj" fmla="val 9615"/>
+            </a:avLst>
+          </a:prstGeom>
+          <a:solidFill>
+            <a:srgbClr val="FFFFFF"/>
+          </a:solidFill>
+          <a:ln w="12700">
+            <a:solidFill>
+              <a:srgbClr val="0D9488"/>
+            </a:solidFill>
+            <a:prstDash val="solid"/>
+          </a:ln>
+        </p:spPr>
+      </p:sp>
+      <p:sp>
+        <p:nvSpPr>
+          <p:cNvPr id="39" name="Text 37"/>
+          <p:cNvSpPr/>
+          <p:nvPr/>
+        </p:nvSpPr>
+        <p:spPr>
+          <a:xfrm>
+            <a:off x="6858000" y="3364992"/>
+            <a:ext cx="1554480" cy="475488"/>
+          </a:xfrm>
+          <a:prstGeom prst="rect">
+            <a:avLst/>
+          </a:prstGeom>
+          <a:noFill/>
+          <a:ln/>
+        </p:spPr>
+        <p:txBody>
+          <a:bodyPr wrap="square" lIns="0" tIns="0" rIns="0" bIns="0" rtlCol="0" anchor="ctr"/>
+          <a:lstStyle/>
+          <a:p>
+            <a:pPr algn="ctr" indent="0" marL="0">
+              <a:buNone/>
+            </a:pPr>
+            <a:r>
+              <a:rPr lang="en-US" sz="1400" b="1" dirty="0">
+                <a:solidFill>
+                  <a:srgbClr val="0D9488"/>
+                </a:solidFill>
+                <a:latin typeface="Trebuchet MS" pitchFamily="34" charset="0"/>
+                <a:ea typeface="Trebuchet MS" pitchFamily="34" charset="-122"/>
+                <a:cs typeface="Trebuchet MS" pitchFamily="34" charset="-120"/>
+              </a:rPr>
               <a:t>tion</a:t>
             </a:r>
             <a:endParaRPr lang="en-US" sz="1400" dirty="0"/>
@@ -14978,7 +15524,7 @@
       </p:sp>
       <p:sp>
         <p:nvSpPr>
-          <p:cNvPr id="34" name="Shape 32"/>
+          <p:cNvPr id="40" name="Shape 38"/>
           <p:cNvSpPr/>
           <p:nvPr/>
         </p:nvSpPr>
@@ -15005,7 +15551,7 @@
       </p:sp>
       <p:sp>
         <p:nvSpPr>
-          <p:cNvPr id="35" name="Text 33"/>
+          <p:cNvPr id="41" name="Text 39"/>
           <p:cNvSpPr/>
           <p:nvPr/>
         </p:nvSpPr>
@@ -15044,7 +15590,7 @@
       </p:sp>
       <p:sp>
         <p:nvSpPr>
-          <p:cNvPr id="36" name="Shape 34"/>
+          <p:cNvPr id="42" name="Shape 40"/>
           <p:cNvSpPr/>
           <p:nvPr/>
         </p:nvSpPr>
@@ -15071,14 +15617,14 @@
       </p:sp>
       <p:sp>
         <p:nvSpPr>
-          <p:cNvPr id="37" name="Shape 35"/>
-          <p:cNvSpPr/>
-          <p:nvPr/>
-        </p:nvSpPr>
-        <p:spPr>
-          <a:xfrm>
-            <a:off x="2124837" y="4169664"/>
-            <a:ext cx="685800" cy="384048"/>
+          <p:cNvPr id="43" name="Shape 41"/>
+          <p:cNvSpPr/>
+          <p:nvPr/>
+        </p:nvSpPr>
+        <p:spPr>
+          <a:xfrm>
+            <a:off x="1951330" y="4169664"/>
+            <a:ext cx="676656" cy="384048"/>
           </a:xfrm>
           <a:prstGeom prst="rect">
             <a:avLst>
@@ -15098,14 +15644,14 @@
       </p:sp>
       <p:sp>
         <p:nvSpPr>
-          <p:cNvPr id="38" name="Text 36"/>
-          <p:cNvSpPr/>
-          <p:nvPr/>
-        </p:nvSpPr>
-        <p:spPr>
-          <a:xfrm>
-            <a:off x="2124837" y="4169664"/>
-            <a:ext cx="685800" cy="384048"/>
+          <p:cNvPr id="44" name="Text 42"/>
+          <p:cNvSpPr/>
+          <p:nvPr/>
+        </p:nvSpPr>
+        <p:spPr>
+          <a:xfrm>
+            <a:off x="1951330" y="4169664"/>
+            <a:ext cx="676656" cy="384048"/>
           </a:xfrm>
           <a:prstGeom prst="rect">
             <a:avLst/>
@@ -15129,7 +15675,7 @@
                 <a:ea typeface="Trebuchet MS" pitchFamily="34" charset="-122"/>
                 <a:cs typeface="Trebuchet MS" pitchFamily="34" charset="-120"/>
               </a:rPr>
-              <a:t>l</a:t>
+              <a:t>r</a:t>
             </a:r>
             <a:endParaRPr lang="en-US" sz="900" dirty="0"/>
           </a:p>
@@ -15137,14 +15683,14 @@
       </p:sp>
       <p:sp>
         <p:nvSpPr>
-          <p:cNvPr id="39" name="Shape 37"/>
-          <p:cNvSpPr/>
-          <p:nvPr/>
-        </p:nvSpPr>
-        <p:spPr>
-          <a:xfrm>
-            <a:off x="3033522" y="4169664"/>
-            <a:ext cx="685800" cy="384048"/>
+          <p:cNvPr id="45" name="Shape 43"/>
+          <p:cNvSpPr/>
+          <p:nvPr/>
+        </p:nvSpPr>
+        <p:spPr>
+          <a:xfrm>
+            <a:off x="2677363" y="4169664"/>
+            <a:ext cx="676656" cy="384048"/>
           </a:xfrm>
           <a:prstGeom prst="rect">
             <a:avLst>
@@ -15164,14 +15710,14 @@
       </p:sp>
       <p:sp>
         <p:nvSpPr>
-          <p:cNvPr id="40" name="Text 38"/>
-          <p:cNvSpPr/>
-          <p:nvPr/>
-        </p:nvSpPr>
-        <p:spPr>
-          <a:xfrm>
-            <a:off x="3033522" y="4169664"/>
-            <a:ext cx="685800" cy="384048"/>
+          <p:cNvPr id="46" name="Text 44"/>
+          <p:cNvSpPr/>
+          <p:nvPr/>
+        </p:nvSpPr>
+        <p:spPr>
+          <a:xfrm>
+            <a:off x="2677363" y="4169664"/>
+            <a:ext cx="676656" cy="384048"/>
           </a:xfrm>
           <a:prstGeom prst="rect">
             <a:avLst/>
@@ -15195,7 +15741,7 @@
                 <a:ea typeface="Trebuchet MS" pitchFamily="34" charset="-122"/>
                 <a:cs typeface="Trebuchet MS" pitchFamily="34" charset="-120"/>
               </a:rPr>
-              <a:t>o</a:t>
+              <a:t>e</a:t>
             </a:r>
             <a:endParaRPr lang="en-US" sz="900" dirty="0"/>
           </a:p>
@@ -15203,14 +15749,14 @@
       </p:sp>
       <p:sp>
         <p:nvSpPr>
-          <p:cNvPr id="41" name="Shape 39"/>
-          <p:cNvSpPr/>
-          <p:nvPr/>
-        </p:nvSpPr>
-        <p:spPr>
-          <a:xfrm>
-            <a:off x="3942207" y="4169664"/>
-            <a:ext cx="685800" cy="384048"/>
+          <p:cNvPr id="47" name="Shape 45"/>
+          <p:cNvSpPr/>
+          <p:nvPr/>
+        </p:nvSpPr>
+        <p:spPr>
+          <a:xfrm>
+            <a:off x="3403397" y="4169664"/>
+            <a:ext cx="676656" cy="384048"/>
           </a:xfrm>
           <a:prstGeom prst="rect">
             <a:avLst>
@@ -15230,14 +15776,14 @@
       </p:sp>
       <p:sp>
         <p:nvSpPr>
-          <p:cNvPr id="42" name="Text 40"/>
-          <p:cNvSpPr/>
-          <p:nvPr/>
-        </p:nvSpPr>
-        <p:spPr>
-          <a:xfrm>
-            <a:off x="3942207" y="4169664"/>
-            <a:ext cx="685800" cy="384048"/>
+          <p:cNvPr id="48" name="Text 46"/>
+          <p:cNvSpPr/>
+          <p:nvPr/>
+        </p:nvSpPr>
+        <p:spPr>
+          <a:xfrm>
+            <a:off x="3403397" y="4169664"/>
+            <a:ext cx="676656" cy="384048"/>
           </a:xfrm>
           <a:prstGeom prst="rect">
             <a:avLst/>
@@ -15261,6 +15807,138 @@
                 <a:ea typeface="Trebuchet MS" pitchFamily="34" charset="-122"/>
                 <a:cs typeface="Trebuchet MS" pitchFamily="34" charset="-120"/>
               </a:rPr>
+              <a:t>l</a:t>
+            </a:r>
+            <a:endParaRPr lang="en-US" sz="900" dirty="0"/>
+          </a:p>
+        </p:txBody>
+      </p:sp>
+      <p:sp>
+        <p:nvSpPr>
+          <p:cNvPr id="49" name="Shape 47"/>
+          <p:cNvSpPr/>
+          <p:nvPr/>
+        </p:nvSpPr>
+        <p:spPr>
+          <a:xfrm>
+            <a:off x="4129430" y="4169664"/>
+            <a:ext cx="676656" cy="384048"/>
+          </a:xfrm>
+          <a:prstGeom prst="rect">
+            <a:avLst>
+              <a:gd name="adj" fmla="val 9524"/>
+            </a:avLst>
+          </a:prstGeom>
+          <a:solidFill>
+            <a:srgbClr val="FFFFFF"/>
+          </a:solidFill>
+          <a:ln w="12700">
+            <a:solidFill>
+              <a:srgbClr val="DB2777"/>
+            </a:solidFill>
+            <a:prstDash val="solid"/>
+          </a:ln>
+        </p:spPr>
+      </p:sp>
+      <p:sp>
+        <p:nvSpPr>
+          <p:cNvPr id="50" name="Text 48"/>
+          <p:cNvSpPr/>
+          <p:nvPr/>
+        </p:nvSpPr>
+        <p:spPr>
+          <a:xfrm>
+            <a:off x="4129430" y="4169664"/>
+            <a:ext cx="676656" cy="384048"/>
+          </a:xfrm>
+          <a:prstGeom prst="rect">
+            <a:avLst/>
+          </a:prstGeom>
+          <a:noFill/>
+          <a:ln/>
+        </p:spPr>
+        <p:txBody>
+          <a:bodyPr wrap="square" lIns="0" tIns="0" rIns="0" bIns="0" rtlCol="0" anchor="ctr"/>
+          <a:lstStyle/>
+          <a:p>
+            <a:pPr algn="ctr" indent="0" marL="0">
+              <a:buNone/>
+            </a:pPr>
+            <a:r>
+              <a:rPr lang="en-US" sz="900" b="1" dirty="0">
+                <a:solidFill>
+                  <a:srgbClr val="9D174D"/>
+                </a:solidFill>
+                <a:latin typeface="Trebuchet MS" pitchFamily="34" charset="0"/>
+                <a:ea typeface="Trebuchet MS" pitchFamily="34" charset="-122"/>
+                <a:cs typeface="Trebuchet MS" pitchFamily="34" charset="-120"/>
+              </a:rPr>
+              <a:t>o</a:t>
+            </a:r>
+            <a:endParaRPr lang="en-US" sz="900" dirty="0"/>
+          </a:p>
+        </p:txBody>
+      </p:sp>
+      <p:sp>
+        <p:nvSpPr>
+          <p:cNvPr id="51" name="Shape 49"/>
+          <p:cNvSpPr/>
+          <p:nvPr/>
+        </p:nvSpPr>
+        <p:spPr>
+          <a:xfrm>
+            <a:off x="4855464" y="4169664"/>
+            <a:ext cx="676656" cy="384048"/>
+          </a:xfrm>
+          <a:prstGeom prst="rect">
+            <a:avLst>
+              <a:gd name="adj" fmla="val 9524"/>
+            </a:avLst>
+          </a:prstGeom>
+          <a:solidFill>
+            <a:srgbClr val="FFFFFF"/>
+          </a:solidFill>
+          <a:ln w="12700">
+            <a:solidFill>
+              <a:srgbClr val="DB2777"/>
+            </a:solidFill>
+            <a:prstDash val="solid"/>
+          </a:ln>
+        </p:spPr>
+      </p:sp>
+      <p:sp>
+        <p:nvSpPr>
+          <p:cNvPr id="52" name="Text 50"/>
+          <p:cNvSpPr/>
+          <p:nvPr/>
+        </p:nvSpPr>
+        <p:spPr>
+          <a:xfrm>
+            <a:off x="4855464" y="4169664"/>
+            <a:ext cx="676656" cy="384048"/>
+          </a:xfrm>
+          <a:prstGeom prst="rect">
+            <a:avLst/>
+          </a:prstGeom>
+          <a:noFill/>
+          <a:ln/>
+        </p:spPr>
+        <p:txBody>
+          <a:bodyPr wrap="square" lIns="0" tIns="0" rIns="0" bIns="0" rtlCol="0" anchor="ctr"/>
+          <a:lstStyle/>
+          <a:p>
+            <a:pPr algn="ctr" indent="0" marL="0">
+              <a:buNone/>
+            </a:pPr>
+            <a:r>
+              <a:rPr lang="en-US" sz="900" b="1" dirty="0">
+                <a:solidFill>
+                  <a:srgbClr val="9D174D"/>
+                </a:solidFill>
+                <a:latin typeface="Trebuchet MS" pitchFamily="34" charset="0"/>
+                <a:ea typeface="Trebuchet MS" pitchFamily="34" charset="-122"/>
+                <a:cs typeface="Trebuchet MS" pitchFamily="34" charset="-120"/>
+              </a:rPr>
               <a:t>c</a:t>
             </a:r>
             <a:endParaRPr lang="en-US" sz="900" dirty="0"/>
@@ -15269,14 +15947,14 @@
       </p:sp>
       <p:sp>
         <p:nvSpPr>
-          <p:cNvPr id="43" name="Text 41"/>
-          <p:cNvSpPr/>
-          <p:nvPr/>
-        </p:nvSpPr>
-        <p:spPr>
-          <a:xfrm>
-            <a:off x="3942207" y="4572000"/>
-            <a:ext cx="685800" cy="219456"/>
+          <p:cNvPr id="53" name="Text 51"/>
+          <p:cNvSpPr/>
+          <p:nvPr/>
+        </p:nvSpPr>
+        <p:spPr>
+          <a:xfrm>
+            <a:off x="4855464" y="4572000"/>
+            <a:ext cx="676656" cy="219456"/>
           </a:xfrm>
           <a:prstGeom prst="rect">
             <a:avLst/>
@@ -15308,14 +15986,14 @@
       </p:sp>
       <p:sp>
         <p:nvSpPr>
-          <p:cNvPr id="44" name="Shape 42"/>
-          <p:cNvSpPr/>
-          <p:nvPr/>
-        </p:nvSpPr>
-        <p:spPr>
-          <a:xfrm>
-            <a:off x="4850892" y="4169664"/>
-            <a:ext cx="685800" cy="384048"/>
+          <p:cNvPr id="54" name="Shape 52"/>
+          <p:cNvSpPr/>
+          <p:nvPr/>
+        </p:nvSpPr>
+        <p:spPr>
+          <a:xfrm>
+            <a:off x="5581498" y="4169664"/>
+            <a:ext cx="676656" cy="384048"/>
           </a:xfrm>
           <a:prstGeom prst="rect">
             <a:avLst>
@@ -15335,14 +16013,14 @@
       </p:sp>
       <p:sp>
         <p:nvSpPr>
-          <p:cNvPr id="45" name="Text 43"/>
-          <p:cNvSpPr/>
-          <p:nvPr/>
-        </p:nvSpPr>
-        <p:spPr>
-          <a:xfrm>
-            <a:off x="4850892" y="4169664"/>
-            <a:ext cx="685800" cy="384048"/>
+          <p:cNvPr id="55" name="Text 53"/>
+          <p:cNvSpPr/>
+          <p:nvPr/>
+        </p:nvSpPr>
+        <p:spPr>
+          <a:xfrm>
+            <a:off x="5581498" y="4169664"/>
+            <a:ext cx="676656" cy="384048"/>
           </a:xfrm>
           <a:prstGeom prst="rect">
             <a:avLst/>
@@ -15374,14 +16052,14 @@
       </p:sp>
       <p:sp>
         <p:nvSpPr>
-          <p:cNvPr id="46" name="Shape 44"/>
-          <p:cNvSpPr/>
-          <p:nvPr/>
-        </p:nvSpPr>
-        <p:spPr>
-          <a:xfrm>
-            <a:off x="5759577" y="4169664"/>
-            <a:ext cx="685800" cy="384048"/>
+          <p:cNvPr id="56" name="Shape 54"/>
+          <p:cNvSpPr/>
+          <p:nvPr/>
+        </p:nvSpPr>
+        <p:spPr>
+          <a:xfrm>
+            <a:off x="6307531" y="4169664"/>
+            <a:ext cx="676656" cy="384048"/>
           </a:xfrm>
           <a:prstGeom prst="rect">
             <a:avLst>
@@ -15401,14 +16079,14 @@
       </p:sp>
       <p:sp>
         <p:nvSpPr>
-          <p:cNvPr id="47" name="Text 45"/>
-          <p:cNvSpPr/>
-          <p:nvPr/>
-        </p:nvSpPr>
-        <p:spPr>
-          <a:xfrm>
-            <a:off x="5759577" y="4169664"/>
-            <a:ext cx="685800" cy="384048"/>
+          <p:cNvPr id="57" name="Text 55"/>
+          <p:cNvSpPr/>
+          <p:nvPr/>
+        </p:nvSpPr>
+        <p:spPr>
+          <a:xfrm>
+            <a:off x="6307531" y="4169664"/>
+            <a:ext cx="676656" cy="384048"/>
           </a:xfrm>
           <a:prstGeom prst="rect">
             <a:avLst/>
@@ -15440,14 +16118,14 @@
       </p:sp>
       <p:sp>
         <p:nvSpPr>
-          <p:cNvPr id="48" name="Text 46"/>
-          <p:cNvSpPr/>
-          <p:nvPr/>
-        </p:nvSpPr>
-        <p:spPr>
-          <a:xfrm>
-            <a:off x="5759577" y="4572000"/>
-            <a:ext cx="685800" cy="219456"/>
+          <p:cNvPr id="58" name="Text 56"/>
+          <p:cNvSpPr/>
+          <p:nvPr/>
+        </p:nvSpPr>
+        <p:spPr>
+          <a:xfrm>
+            <a:off x="6307531" y="4572000"/>
+            <a:ext cx="676656" cy="219456"/>
           </a:xfrm>
           <a:prstGeom prst="rect">
             <a:avLst/>
@@ -15479,14 +16157,14 @@
       </p:sp>
       <p:sp>
         <p:nvSpPr>
-          <p:cNvPr id="49" name="Shape 47"/>
-          <p:cNvSpPr/>
-          <p:nvPr/>
-        </p:nvSpPr>
-        <p:spPr>
-          <a:xfrm>
-            <a:off x="6668262" y="4169664"/>
-            <a:ext cx="685800" cy="384048"/>
+          <p:cNvPr id="59" name="Shape 57"/>
+          <p:cNvSpPr/>
+          <p:nvPr/>
+        </p:nvSpPr>
+        <p:spPr>
+          <a:xfrm>
+            <a:off x="7033565" y="4169664"/>
+            <a:ext cx="676656" cy="384048"/>
           </a:xfrm>
           <a:prstGeom prst="rect">
             <a:avLst>
@@ -15506,14 +16184,14 @@
       </p:sp>
       <p:sp>
         <p:nvSpPr>
-          <p:cNvPr id="50" name="Text 48"/>
-          <p:cNvSpPr/>
-          <p:nvPr/>
-        </p:nvSpPr>
-        <p:spPr>
-          <a:xfrm>
-            <a:off x="6668262" y="4169664"/>
-            <a:ext cx="685800" cy="384048"/>
+          <p:cNvPr id="60" name="Text 58"/>
+          <p:cNvSpPr/>
+          <p:nvPr/>
+        </p:nvSpPr>
+        <p:spPr>
+          <a:xfrm>
+            <a:off x="7033565" y="4169664"/>
+            <a:ext cx="676656" cy="384048"/>
           </a:xfrm>
           <a:prstGeom prst="rect">
             <a:avLst/>
@@ -15545,14 +16223,14 @@
       </p:sp>
       <p:sp>
         <p:nvSpPr>
-          <p:cNvPr id="51" name="Shape 49"/>
-          <p:cNvSpPr/>
-          <p:nvPr/>
-        </p:nvSpPr>
-        <p:spPr>
-          <a:xfrm>
-            <a:off x="7576947" y="4169664"/>
-            <a:ext cx="685800" cy="384048"/>
+          <p:cNvPr id="61" name="Shape 59"/>
+          <p:cNvSpPr/>
+          <p:nvPr/>
+        </p:nvSpPr>
+        <p:spPr>
+          <a:xfrm>
+            <a:off x="7759598" y="4169664"/>
+            <a:ext cx="676656" cy="384048"/>
           </a:xfrm>
           <a:prstGeom prst="rect">
             <a:avLst>
@@ -15572,14 +16250,14 @@
       </p:sp>
       <p:sp>
         <p:nvSpPr>
-          <p:cNvPr id="52" name="Text 50"/>
-          <p:cNvSpPr/>
-          <p:nvPr/>
-        </p:nvSpPr>
-        <p:spPr>
-          <a:xfrm>
-            <a:off x="7576947" y="4169664"/>
-            <a:ext cx="685800" cy="384048"/>
+          <p:cNvPr id="62" name="Text 60"/>
+          <p:cNvSpPr/>
+          <p:nvPr/>
+        </p:nvSpPr>
+        <p:spPr>
+          <a:xfrm>
+            <a:off x="7759598" y="4169664"/>
+            <a:ext cx="676656" cy="384048"/>
           </a:xfrm>
           <a:prstGeom prst="rect">
             <a:avLst/>
@@ -16177,7 +16855,7 @@
                 <a:ea typeface="Calibri" pitchFamily="34" charset="-122"/>
                 <a:cs typeface="Calibri" pitchFamily="34" charset="-120"/>
               </a:rPr>
-              <a:t>Word Labs  •  wordlabs.app  •  Root: 'locate' = to find or place something</a:t>
+              <a:t>Word Labs  •  wordlabs.app  •  Root: 'locate' = to find or place</a:t>
             </a:r>
             <a:endParaRPr lang="en-US" sz="800" dirty="0"/>
           </a:p>
@@ -16511,7 +17189,7 @@
                 <a:ea typeface="Trebuchet MS" pitchFamily="34" charset="-122"/>
                 <a:cs typeface="Trebuchet MS" pitchFamily="34" charset="-120"/>
               </a:rPr>
-              <a:t>2</a:t>
+              <a:t>1</a:t>
             </a:r>
             <a:pPr algn="ctr" indent="0" marL="0">
               <a:buNone/>
@@ -16525,7 +17203,7 @@
                 <a:ea typeface="Trebuchet MS" pitchFamily="34" charset="-122"/>
                 <a:cs typeface="Trebuchet MS" pitchFamily="34" charset="-120"/>
               </a:rPr>
-              <a:t>  punctuation marks</a:t>
+              <a:t>  punctuation mark</a:t>
             </a:r>
             <a:endParaRPr lang="en-US" sz="2800" dirty="0"/>
           </a:p>
@@ -16817,7 +17495,7 @@
                 <a:ea typeface="Calibri" pitchFamily="34" charset="-122"/>
                 <a:cs typeface="Calibri" pitchFamily="34" charset="-120"/>
               </a:rPr>
-              <a:t>Word Labs  •  wordlabs.app  •  Root: 'locate' = to find or place something</a:t>
+              <a:t>Word Labs  •  wordlabs.app  •  Root: 'locate' = to find or place</a:t>
             </a:r>
             <a:endParaRPr lang="en-US" sz="800" dirty="0"/>
           </a:p>
@@ -16929,7 +17607,7 @@
                 <a:ea typeface="Calibri" pitchFamily="34" charset="-122"/>
                 <a:cs typeface="Calibri" pitchFamily="34" charset="-120"/>
               </a:rPr>
-              <a:t>After they decided to </a:t>
+              <a:t>After the earthquake </a:t>
             </a:r>
             <a:pPr algn="l" indent="0" marL="0">
               <a:buNone/>
@@ -16946,7 +17624,7 @@
                 <a:ea typeface="Calibri" pitchFamily="34" charset="-122"/>
                 <a:cs typeface="Calibri" pitchFamily="34" charset="-120"/>
               </a:rPr>
-              <a:t>relocate</a:t>
+              <a:t>dislocated</a:t>
             </a:r>
             <a:pPr algn="l" indent="0" marL="0">
               <a:buNone/>
@@ -16960,7 +17638,7 @@
                 <a:ea typeface="Calibri" pitchFamily="34" charset="-122"/>
                 <a:cs typeface="Calibri" pitchFamily="34" charset="-120"/>
               </a:rPr>
-              <a:t> the zoo, the rangers had to </a:t>
+              <a:t> many families, workers had to </a:t>
             </a:r>
             <a:pPr algn="l" indent="0" marL="0">
               <a:buNone/>
@@ -16977,7 +17655,7 @@
                 <a:ea typeface="Calibri" pitchFamily="34" charset="-122"/>
                 <a:cs typeface="Calibri" pitchFamily="34" charset="-120"/>
               </a:rPr>
-              <a:t>dislocate</a:t>
+              <a:t>allocate</a:t>
             </a:r>
             <a:pPr algn="l" indent="0" marL="0">
               <a:buNone/>
@@ -16991,7 +17669,7 @@
                 <a:ea typeface="Calibri" pitchFamily="34" charset="-122"/>
                 <a:cs typeface="Calibri" pitchFamily="34" charset="-120"/>
               </a:rPr>
-              <a:t> the animals from their enclosures, carefully noting each </a:t>
+              <a:t> resources and find each person's </a:t>
             </a:r>
             <a:pPr algn="l" indent="0" marL="0">
               <a:buNone/>
@@ -17008,7 +17686,7 @@
                 <a:ea typeface="Calibri" pitchFamily="34" charset="-122"/>
                 <a:cs typeface="Calibri" pitchFamily="34" charset="-120"/>
               </a:rPr>
-              <a:t>location</a:t>
+              <a:t>allocated</a:t>
             </a:r>
             <a:pPr algn="l" indent="0" marL="0">
               <a:buNone/>
@@ -17022,7 +17700,7 @@
                 <a:ea typeface="Calibri" pitchFamily="34" charset="-122"/>
                 <a:cs typeface="Calibri" pitchFamily="34" charset="-120"/>
               </a:rPr>
-              <a:t>.</a:t>
+              <a:t> shelter.</a:t>
             </a:r>
             <a:endParaRPr lang="en-US" sz="1800" dirty="0"/>
           </a:p>
@@ -17177,7 +17855,7 @@
                 <a:ea typeface="Trebuchet MS" pitchFamily="34" charset="-122"/>
                 <a:cs typeface="Trebuchet MS" pitchFamily="34" charset="-120"/>
               </a:rPr>
-              <a:t>relocate</a:t>
+              <a:t>dislocated</a:t>
             </a:r>
             <a:endParaRPr lang="en-US" sz="1400" dirty="0"/>
           </a:p>
@@ -17305,7 +17983,7 @@
                 <a:ea typeface="Trebuchet MS" pitchFamily="34" charset="-122"/>
                 <a:cs typeface="Trebuchet MS" pitchFamily="34" charset="-120"/>
               </a:rPr>
-              <a:t>dislocate</a:t>
+              <a:t>allocate</a:t>
             </a:r>
             <a:endParaRPr lang="en-US" sz="1400" dirty="0"/>
           </a:p>
@@ -17433,7 +18111,7 @@
                 <a:ea typeface="Trebuchet MS" pitchFamily="34" charset="-122"/>
                 <a:cs typeface="Trebuchet MS" pitchFamily="34" charset="-120"/>
               </a:rPr>
-              <a:t>location</a:t>
+              <a:t>allocated</a:t>
             </a:r>
             <a:endParaRPr lang="en-US" sz="1400" dirty="0"/>
           </a:p>
@@ -17764,7 +18442,7 @@
                 <a:ea typeface="Calibri" pitchFamily="34" charset="-122"/>
                 <a:cs typeface="Calibri" pitchFamily="34" charset="-120"/>
               </a:rPr>
-              <a:t>Word Labs  •  wordlabs.app  •  Root: 'locate' = to find or place something</a:t>
+              <a:t>Word Labs  •  wordlabs.app  •  Root: 'locate' = to find or place</a:t>
             </a:r>
             <a:endParaRPr lang="en-US" sz="800" dirty="0"/>
           </a:p>
@@ -17903,7 +18581,7 @@
                 <a:ea typeface="Trebuchet MS" pitchFamily="34" charset="-122"/>
                 <a:cs typeface="Trebuchet MS" pitchFamily="34" charset="-120"/>
               </a:rPr>
-              <a:t>relocate</a:t>
+              <a:t>dislocated</a:t>
             </a:r>
             <a:endParaRPr lang="en-US" sz="2800" dirty="0"/>
           </a:p>
@@ -18591,7 +19269,7 @@
                 <a:ea typeface="Calibri" pitchFamily="34" charset="-122"/>
                 <a:cs typeface="Calibri" pitchFamily="34" charset="-120"/>
               </a:rPr>
-              <a:t>Word Labs  •  wordlabs.app  •  Root: 'locate' = to find or place something</a:t>
+              <a:t>Word Labs  •  wordlabs.app  •  Root: 'locate' = to find or place</a:t>
             </a:r>
             <a:endParaRPr lang="en-US" sz="800" dirty="0"/>
           </a:p>
@@ -18730,7 +19408,7 @@
                 <a:ea typeface="Trebuchet MS" pitchFamily="34" charset="-122"/>
                 <a:cs typeface="Trebuchet MS" pitchFamily="34" charset="-120"/>
               </a:rPr>
-              <a:t>relocate</a:t>
+              <a:t>dislocated</a:t>
             </a:r>
             <a:endParaRPr lang="en-US" sz="2800" dirty="0"/>
           </a:p>
@@ -18810,7 +19488,7 @@
         </p:nvSpPr>
         <p:spPr>
           <a:xfrm>
-            <a:off x="2938272" y="2258568"/>
+            <a:off x="2221992" y="2258568"/>
             <a:ext cx="1828800" cy="292608"/>
           </a:xfrm>
           <a:prstGeom prst="rect">
@@ -18844,7 +19522,7 @@
         </p:nvSpPr>
         <p:spPr>
           <a:xfrm>
-            <a:off x="2938272" y="2258568"/>
+            <a:off x="2221992" y="2258568"/>
             <a:ext cx="1828800" cy="292608"/>
           </a:xfrm>
           <a:prstGeom prst="rect">
@@ -18869,7 +19547,7 @@
                 <a:ea typeface="Trebuchet MS" pitchFamily="34" charset="-122"/>
                 <a:cs typeface="Trebuchet MS" pitchFamily="34" charset="-120"/>
               </a:rPr>
-              <a:t>re</a:t>
+              <a:t>dis</a:t>
             </a:r>
             <a:endParaRPr lang="en-US" sz="1300" dirty="0"/>
           </a:p>
@@ -18883,7 +19561,7 @@
         </p:nvSpPr>
         <p:spPr>
           <a:xfrm>
-            <a:off x="2938272" y="2569464"/>
+            <a:off x="2221992" y="2569464"/>
             <a:ext cx="1828800" cy="201168"/>
           </a:xfrm>
           <a:prstGeom prst="rect">
@@ -18908,7 +19586,7 @@
                 <a:ea typeface="Calibri" pitchFamily="34" charset="-122"/>
                 <a:cs typeface="Calibri" pitchFamily="34" charset="-120"/>
               </a:rPr>
-              <a:t>again</a:t>
+              <a:t>apart or away</a:t>
             </a:r>
             <a:endParaRPr lang="en-US" sz="850" dirty="0"/>
           </a:p>
@@ -18922,7 +19600,7 @@
         </p:nvSpPr>
         <p:spPr>
           <a:xfrm>
-            <a:off x="5803392" y="2258568"/>
+            <a:off x="4370832" y="2258568"/>
             <a:ext cx="1828800" cy="292608"/>
           </a:xfrm>
           <a:prstGeom prst="rect">
@@ -18956,7 +19634,7 @@
         </p:nvSpPr>
         <p:spPr>
           <a:xfrm>
-            <a:off x="5803392" y="2258568"/>
+            <a:off x="4370832" y="2258568"/>
             <a:ext cx="1828800" cy="292608"/>
           </a:xfrm>
           <a:prstGeom prst="rect">
@@ -18995,7 +19673,7 @@
         </p:nvSpPr>
         <p:spPr>
           <a:xfrm>
-            <a:off x="5803392" y="2569464"/>
+            <a:off x="4370832" y="2569464"/>
             <a:ext cx="1828800" cy="201168"/>
           </a:xfrm>
           <a:prstGeom prst="rect">
@@ -19028,7 +19706,158 @@
       </p:sp>
       <p:sp>
         <p:nvSpPr>
-          <p:cNvPr id="22" name="Shape 20"/>
+          <p:cNvPr id="22" name="Text 20"/>
+          <p:cNvSpPr/>
+          <p:nvPr/>
+        </p:nvSpPr>
+        <p:spPr>
+          <a:xfrm>
+            <a:off x="4370832" y="2752344"/>
+            <a:ext cx="1828800" cy="182880"/>
+          </a:xfrm>
+          <a:prstGeom prst="rect">
+            <a:avLst/>
+          </a:prstGeom>
+          <a:noFill/>
+          <a:ln/>
+        </p:spPr>
+        <p:txBody>
+          <a:bodyPr wrap="square" lIns="0" tIns="0" rIns="0" bIns="0" rtlCol="0" anchor="t"/>
+          <a:lstStyle/>
+          <a:p>
+            <a:pPr algn="ctr" indent="0" marL="0">
+              <a:buNone/>
+            </a:pPr>
+            <a:r>
+              <a:rPr lang="en-US" sz="700" i="1" dirty="0">
+                <a:solidFill>
+                  <a:srgbClr val="94A3B8"/>
+                </a:solidFill>
+                <a:latin typeface="Calibri" pitchFamily="34" charset="0"/>
+                <a:ea typeface="Calibri" pitchFamily="34" charset="-122"/>
+                <a:cs typeface="Calibri" pitchFamily="34" charset="-120"/>
+              </a:rPr>
+              <a:t>'e' dropped before vowel suffix</a:t>
+            </a:r>
+            <a:endParaRPr lang="en-US" sz="700" dirty="0"/>
+          </a:p>
+        </p:txBody>
+      </p:sp>
+      <p:sp>
+        <p:nvSpPr>
+          <p:cNvPr id="23" name="Shape 21"/>
+          <p:cNvSpPr/>
+          <p:nvPr/>
+        </p:nvSpPr>
+        <p:spPr>
+          <a:xfrm>
+            <a:off x="6519672" y="2258568"/>
+            <a:ext cx="1828800" cy="292608"/>
+          </a:xfrm>
+          <a:prstGeom prst="rect">
+            <a:avLst>
+              <a:gd name="adj" fmla="val 25000"/>
+            </a:avLst>
+          </a:prstGeom>
+          <a:solidFill>
+            <a:srgbClr val="FCE7F3"/>
+          </a:solidFill>
+          <a:ln w="19050">
+            <a:solidFill>
+              <a:srgbClr val="DB2777"/>
+            </a:solidFill>
+            <a:prstDash val="solid"/>
+          </a:ln>
+          <a:effectLst>
+            <a:outerShdw sx="100000" sy="100000" kx="0" ky="0" algn="bl" rotWithShape="0" blurRad="101600" dist="38100" dir="8100000">
+              <a:srgbClr val="000000">
+                <a:alpha val="12000"/>
+              </a:srgbClr>
+            </a:outerShdw>
+          </a:effectLst>
+        </p:spPr>
+      </p:sp>
+      <p:sp>
+        <p:nvSpPr>
+          <p:cNvPr id="24" name="Text 22"/>
+          <p:cNvSpPr/>
+          <p:nvPr/>
+        </p:nvSpPr>
+        <p:spPr>
+          <a:xfrm>
+            <a:off x="6519672" y="2258568"/>
+            <a:ext cx="1828800" cy="292608"/>
+          </a:xfrm>
+          <a:prstGeom prst="rect">
+            <a:avLst/>
+          </a:prstGeom>
+          <a:noFill/>
+          <a:ln/>
+        </p:spPr>
+        <p:txBody>
+          <a:bodyPr wrap="square" lIns="0" tIns="0" rIns="0" bIns="0" rtlCol="0" anchor="ctr"/>
+          <a:lstStyle/>
+          <a:p>
+            <a:pPr algn="ctr" indent="0" marL="0">
+              <a:buNone/>
+            </a:pPr>
+            <a:r>
+              <a:rPr lang="en-US" sz="1300" b="1" dirty="0">
+                <a:solidFill>
+                  <a:srgbClr val="9D174D"/>
+                </a:solidFill>
+                <a:latin typeface="Trebuchet MS" pitchFamily="34" charset="0"/>
+                <a:ea typeface="Trebuchet MS" pitchFamily="34" charset="-122"/>
+                <a:cs typeface="Trebuchet MS" pitchFamily="34" charset="-120"/>
+              </a:rPr>
+              <a:t>ed</a:t>
+            </a:r>
+            <a:endParaRPr lang="en-US" sz="1300" dirty="0"/>
+          </a:p>
+        </p:txBody>
+      </p:sp>
+      <p:sp>
+        <p:nvSpPr>
+          <p:cNvPr id="25" name="Text 23"/>
+          <p:cNvSpPr/>
+          <p:nvPr/>
+        </p:nvSpPr>
+        <p:spPr>
+          <a:xfrm>
+            <a:off x="6519672" y="2569464"/>
+            <a:ext cx="1828800" cy="201168"/>
+          </a:xfrm>
+          <a:prstGeom prst="rect">
+            <a:avLst/>
+          </a:prstGeom>
+          <a:noFill/>
+          <a:ln/>
+        </p:spPr>
+        <p:txBody>
+          <a:bodyPr wrap="square" lIns="0" tIns="0" rIns="0" bIns="0" rtlCol="0" anchor="t"/>
+          <a:lstStyle/>
+          <a:p>
+            <a:pPr algn="ctr" indent="0" marL="0">
+              <a:buNone/>
+            </a:pPr>
+            <a:r>
+              <a:rPr lang="en-US" sz="850" dirty="0">
+                <a:solidFill>
+                  <a:srgbClr val="475569"/>
+                </a:solidFill>
+                <a:latin typeface="Calibri" pitchFamily="34" charset="0"/>
+                <a:ea typeface="Calibri" pitchFamily="34" charset="-122"/>
+                <a:cs typeface="Calibri" pitchFamily="34" charset="-120"/>
+              </a:rPr>
+              <a:t>past tense</a:t>
+            </a:r>
+            <a:endParaRPr lang="en-US" sz="850" dirty="0"/>
+          </a:p>
+        </p:txBody>
+      </p:sp>
+      <p:sp>
+        <p:nvSpPr>
+          <p:cNvPr id="26" name="Shape 24"/>
           <p:cNvSpPr/>
           <p:nvPr/>
         </p:nvSpPr>
@@ -19055,7 +19884,7 @@
       </p:sp>
       <p:sp>
         <p:nvSpPr>
-          <p:cNvPr id="23" name="Text 21"/>
+          <p:cNvPr id="27" name="Text 25"/>
           <p:cNvSpPr/>
           <p:nvPr/>
         </p:nvSpPr>
@@ -19094,7 +19923,7 @@
       </p:sp>
       <p:sp>
         <p:nvSpPr>
-          <p:cNvPr id="24" name="Shape 22"/>
+          <p:cNvPr id="28" name="Shape 26"/>
           <p:cNvSpPr/>
           <p:nvPr/>
         </p:nvSpPr>
@@ -19121,7 +19950,7 @@
       </p:sp>
       <p:sp>
         <p:nvSpPr>
-          <p:cNvPr id="25" name="Text 23"/>
+          <p:cNvPr id="29" name="Text 27"/>
           <p:cNvSpPr/>
           <p:nvPr/>
         </p:nvSpPr>
@@ -19160,7 +19989,7 @@
       </p:sp>
       <p:sp>
         <p:nvSpPr>
-          <p:cNvPr id="26" name="Shape 24"/>
+          <p:cNvPr id="30" name="Shape 28"/>
           <p:cNvSpPr/>
           <p:nvPr/>
         </p:nvSpPr>
@@ -19187,7 +20016,7 @@
       </p:sp>
       <p:sp>
         <p:nvSpPr>
-          <p:cNvPr id="27" name="Text 25"/>
+          <p:cNvPr id="31" name="Text 29"/>
           <p:cNvSpPr/>
           <p:nvPr/>
         </p:nvSpPr>
@@ -19226,7 +20055,7 @@
       </p:sp>
       <p:sp>
         <p:nvSpPr>
-          <p:cNvPr id="28" name="Shape 26"/>
+          <p:cNvPr id="32" name="Shape 30"/>
           <p:cNvSpPr/>
           <p:nvPr/>
         </p:nvSpPr>
@@ -19253,7 +20082,7 @@
       </p:sp>
       <p:sp>
         <p:nvSpPr>
-          <p:cNvPr id="29" name="Text 27"/>
+          <p:cNvPr id="33" name="Text 31"/>
           <p:cNvSpPr/>
           <p:nvPr/>
         </p:nvSpPr>
@@ -19576,7 +20405,7 @@
                 <a:ea typeface="Calibri" pitchFamily="34" charset="-122"/>
                 <a:cs typeface="Calibri" pitchFamily="34" charset="-120"/>
               </a:rPr>
-              <a:t>Word Labs  •  wordlabs.app  •  Root: 'locate' = to find or place something</a:t>
+              <a:t>Word Labs  •  wordlabs.app  •  Root: 'locate' = to find or place</a:t>
             </a:r>
             <a:endParaRPr lang="en-US" sz="800" dirty="0"/>
           </a:p>
@@ -19715,7 +20544,7 @@
                 <a:ea typeface="Trebuchet MS" pitchFamily="34" charset="-122"/>
                 <a:cs typeface="Trebuchet MS" pitchFamily="34" charset="-120"/>
               </a:rPr>
-              <a:t>relocate</a:t>
+              <a:t>dislocated</a:t>
             </a:r>
             <a:endParaRPr lang="en-US" sz="2800" dirty="0"/>
           </a:p>
@@ -19795,7 +20624,7 @@
         </p:nvSpPr>
         <p:spPr>
           <a:xfrm>
-            <a:off x="2938272" y="2258568"/>
+            <a:off x="2221992" y="2258568"/>
             <a:ext cx="1828800" cy="292608"/>
           </a:xfrm>
           <a:prstGeom prst="rect">
@@ -19829,7 +20658,7 @@
         </p:nvSpPr>
         <p:spPr>
           <a:xfrm>
-            <a:off x="2938272" y="2258568"/>
+            <a:off x="2221992" y="2258568"/>
             <a:ext cx="1828800" cy="292608"/>
           </a:xfrm>
           <a:prstGeom prst="rect">
@@ -19854,7 +20683,7 @@
                 <a:ea typeface="Trebuchet MS" pitchFamily="34" charset="-122"/>
                 <a:cs typeface="Trebuchet MS" pitchFamily="34" charset="-120"/>
               </a:rPr>
-              <a:t>re</a:t>
+              <a:t>dis</a:t>
             </a:r>
             <a:endParaRPr lang="en-US" sz="1300" dirty="0"/>
           </a:p>
@@ -19868,7 +20697,7 @@
         </p:nvSpPr>
         <p:spPr>
           <a:xfrm>
-            <a:off x="2938272" y="2569464"/>
+            <a:off x="2221992" y="2569464"/>
             <a:ext cx="1828800" cy="201168"/>
           </a:xfrm>
           <a:prstGeom prst="rect">
@@ -19893,7 +20722,7 @@
                 <a:ea typeface="Calibri" pitchFamily="34" charset="-122"/>
                 <a:cs typeface="Calibri" pitchFamily="34" charset="-120"/>
               </a:rPr>
-              <a:t>again</a:t>
+              <a:t>apart or away</a:t>
             </a:r>
             <a:endParaRPr lang="en-US" sz="850" dirty="0"/>
           </a:p>
@@ -19907,7 +20736,7 @@
         </p:nvSpPr>
         <p:spPr>
           <a:xfrm>
-            <a:off x="5803392" y="2258568"/>
+            <a:off x="4370832" y="2258568"/>
             <a:ext cx="1828800" cy="292608"/>
           </a:xfrm>
           <a:prstGeom prst="rect">
@@ -19941,7 +20770,7 @@
         </p:nvSpPr>
         <p:spPr>
           <a:xfrm>
-            <a:off x="5803392" y="2258568"/>
+            <a:off x="4370832" y="2258568"/>
             <a:ext cx="1828800" cy="292608"/>
           </a:xfrm>
           <a:prstGeom prst="rect">
@@ -19980,7 +20809,7 @@
         </p:nvSpPr>
         <p:spPr>
           <a:xfrm>
-            <a:off x="5803392" y="2569464"/>
+            <a:off x="4370832" y="2569464"/>
             <a:ext cx="1828800" cy="201168"/>
           </a:xfrm>
           <a:prstGeom prst="rect">
@@ -20013,7 +20842,158 @@
       </p:sp>
       <p:sp>
         <p:nvSpPr>
-          <p:cNvPr id="22" name="Shape 20"/>
+          <p:cNvPr id="22" name="Text 20"/>
+          <p:cNvSpPr/>
+          <p:nvPr/>
+        </p:nvSpPr>
+        <p:spPr>
+          <a:xfrm>
+            <a:off x="4370832" y="2752344"/>
+            <a:ext cx="1828800" cy="182880"/>
+          </a:xfrm>
+          <a:prstGeom prst="rect">
+            <a:avLst/>
+          </a:prstGeom>
+          <a:noFill/>
+          <a:ln/>
+        </p:spPr>
+        <p:txBody>
+          <a:bodyPr wrap="square" lIns="0" tIns="0" rIns="0" bIns="0" rtlCol="0" anchor="t"/>
+          <a:lstStyle/>
+          <a:p>
+            <a:pPr algn="ctr" indent="0" marL="0">
+              <a:buNone/>
+            </a:pPr>
+            <a:r>
+              <a:rPr lang="en-US" sz="700" i="1" dirty="0">
+                <a:solidFill>
+                  <a:srgbClr val="94A3B8"/>
+                </a:solidFill>
+                <a:latin typeface="Calibri" pitchFamily="34" charset="0"/>
+                <a:ea typeface="Calibri" pitchFamily="34" charset="-122"/>
+                <a:cs typeface="Calibri" pitchFamily="34" charset="-120"/>
+              </a:rPr>
+              <a:t>'e' dropped before vowel suffix</a:t>
+            </a:r>
+            <a:endParaRPr lang="en-US" sz="700" dirty="0"/>
+          </a:p>
+        </p:txBody>
+      </p:sp>
+      <p:sp>
+        <p:nvSpPr>
+          <p:cNvPr id="23" name="Shape 21"/>
+          <p:cNvSpPr/>
+          <p:nvPr/>
+        </p:nvSpPr>
+        <p:spPr>
+          <a:xfrm>
+            <a:off x="6519672" y="2258568"/>
+            <a:ext cx="1828800" cy="292608"/>
+          </a:xfrm>
+          <a:prstGeom prst="rect">
+            <a:avLst>
+              <a:gd name="adj" fmla="val 25000"/>
+            </a:avLst>
+          </a:prstGeom>
+          <a:solidFill>
+            <a:srgbClr val="FCE7F3"/>
+          </a:solidFill>
+          <a:ln w="19050">
+            <a:solidFill>
+              <a:srgbClr val="DB2777"/>
+            </a:solidFill>
+            <a:prstDash val="solid"/>
+          </a:ln>
+          <a:effectLst>
+            <a:outerShdw sx="100000" sy="100000" kx="0" ky="0" algn="bl" rotWithShape="0" blurRad="101600" dist="38100" dir="8100000">
+              <a:srgbClr val="000000">
+                <a:alpha val="12000"/>
+              </a:srgbClr>
+            </a:outerShdw>
+          </a:effectLst>
+        </p:spPr>
+      </p:sp>
+      <p:sp>
+        <p:nvSpPr>
+          <p:cNvPr id="24" name="Text 22"/>
+          <p:cNvSpPr/>
+          <p:nvPr/>
+        </p:nvSpPr>
+        <p:spPr>
+          <a:xfrm>
+            <a:off x="6519672" y="2258568"/>
+            <a:ext cx="1828800" cy="292608"/>
+          </a:xfrm>
+          <a:prstGeom prst="rect">
+            <a:avLst/>
+          </a:prstGeom>
+          <a:noFill/>
+          <a:ln/>
+        </p:spPr>
+        <p:txBody>
+          <a:bodyPr wrap="square" lIns="0" tIns="0" rIns="0" bIns="0" rtlCol="0" anchor="ctr"/>
+          <a:lstStyle/>
+          <a:p>
+            <a:pPr algn="ctr" indent="0" marL="0">
+              <a:buNone/>
+            </a:pPr>
+            <a:r>
+              <a:rPr lang="en-US" sz="1300" b="1" dirty="0">
+                <a:solidFill>
+                  <a:srgbClr val="9D174D"/>
+                </a:solidFill>
+                <a:latin typeface="Trebuchet MS" pitchFamily="34" charset="0"/>
+                <a:ea typeface="Trebuchet MS" pitchFamily="34" charset="-122"/>
+                <a:cs typeface="Trebuchet MS" pitchFamily="34" charset="-120"/>
+              </a:rPr>
+              <a:t>ed</a:t>
+            </a:r>
+            <a:endParaRPr lang="en-US" sz="1300" dirty="0"/>
+          </a:p>
+        </p:txBody>
+      </p:sp>
+      <p:sp>
+        <p:nvSpPr>
+          <p:cNvPr id="25" name="Text 23"/>
+          <p:cNvSpPr/>
+          <p:nvPr/>
+        </p:nvSpPr>
+        <p:spPr>
+          <a:xfrm>
+            <a:off x="6519672" y="2569464"/>
+            <a:ext cx="1828800" cy="201168"/>
+          </a:xfrm>
+          <a:prstGeom prst="rect">
+            <a:avLst/>
+          </a:prstGeom>
+          <a:noFill/>
+          <a:ln/>
+        </p:spPr>
+        <p:txBody>
+          <a:bodyPr wrap="square" lIns="0" tIns="0" rIns="0" bIns="0" rtlCol="0" anchor="t"/>
+          <a:lstStyle/>
+          <a:p>
+            <a:pPr algn="ctr" indent="0" marL="0">
+              <a:buNone/>
+            </a:pPr>
+            <a:r>
+              <a:rPr lang="en-US" sz="850" dirty="0">
+                <a:solidFill>
+                  <a:srgbClr val="475569"/>
+                </a:solidFill>
+                <a:latin typeface="Calibri" pitchFamily="34" charset="0"/>
+                <a:ea typeface="Calibri" pitchFamily="34" charset="-122"/>
+                <a:cs typeface="Calibri" pitchFamily="34" charset="-120"/>
+              </a:rPr>
+              <a:t>past tense</a:t>
+            </a:r>
+            <a:endParaRPr lang="en-US" sz="850" dirty="0"/>
+          </a:p>
+        </p:txBody>
+      </p:sp>
+      <p:sp>
+        <p:nvSpPr>
+          <p:cNvPr id="26" name="Shape 24"/>
           <p:cNvSpPr/>
           <p:nvPr/>
         </p:nvSpPr>
@@ -20040,7 +21020,7 @@
       </p:sp>
       <p:sp>
         <p:nvSpPr>
-          <p:cNvPr id="23" name="Text 21"/>
+          <p:cNvPr id="27" name="Text 25"/>
           <p:cNvSpPr/>
           <p:nvPr/>
         </p:nvSpPr>
@@ -20079,7 +21059,7 @@
       </p:sp>
       <p:sp>
         <p:nvSpPr>
-          <p:cNvPr id="24" name="Shape 22"/>
+          <p:cNvPr id="28" name="Shape 26"/>
           <p:cNvSpPr/>
           <p:nvPr/>
         </p:nvSpPr>
@@ -20106,14 +21086,14 @@
       </p:sp>
       <p:sp>
         <p:nvSpPr>
-          <p:cNvPr id="25" name="Shape 23"/>
-          <p:cNvSpPr/>
-          <p:nvPr/>
-        </p:nvSpPr>
-        <p:spPr>
-          <a:xfrm>
-            <a:off x="2313432" y="3364992"/>
-            <a:ext cx="1645920" cy="475488"/>
+          <p:cNvPr id="29" name="Shape 27"/>
+          <p:cNvSpPr/>
+          <p:nvPr/>
+        </p:nvSpPr>
+        <p:spPr>
+          <a:xfrm>
+            <a:off x="1975104" y="3364992"/>
+            <a:ext cx="1554480" cy="475488"/>
           </a:xfrm>
           <a:prstGeom prst="rect">
             <a:avLst>
@@ -20133,14 +21113,14 @@
       </p:sp>
       <p:sp>
         <p:nvSpPr>
-          <p:cNvPr id="26" name="Text 24"/>
-          <p:cNvSpPr/>
-          <p:nvPr/>
-        </p:nvSpPr>
-        <p:spPr>
-          <a:xfrm>
-            <a:off x="2313432" y="3364992"/>
-            <a:ext cx="1645920" cy="475488"/>
+          <p:cNvPr id="30" name="Text 28"/>
+          <p:cNvSpPr/>
+          <p:nvPr/>
+        </p:nvSpPr>
+        <p:spPr>
+          <a:xfrm>
+            <a:off x="1975104" y="3364992"/>
+            <a:ext cx="1554480" cy="475488"/>
           </a:xfrm>
           <a:prstGeom prst="rect">
             <a:avLst/>
@@ -20164,7 +21144,7 @@
                 <a:ea typeface="Trebuchet MS" pitchFamily="34" charset="-122"/>
                 <a:cs typeface="Trebuchet MS" pitchFamily="34" charset="-120"/>
               </a:rPr>
-              <a:t>re</a:t>
+              <a:t>dis</a:t>
             </a:r>
             <a:endParaRPr lang="en-US" sz="1400" dirty="0"/>
           </a:p>
@@ -20172,14 +21152,14 @@
       </p:sp>
       <p:sp>
         <p:nvSpPr>
-          <p:cNvPr id="27" name="Text 25"/>
-          <p:cNvSpPr/>
-          <p:nvPr/>
-        </p:nvSpPr>
-        <p:spPr>
-          <a:xfrm>
-            <a:off x="3959352" y="3364992"/>
-            <a:ext cx="411480" cy="475488"/>
+          <p:cNvPr id="31" name="Text 29"/>
+          <p:cNvSpPr/>
+          <p:nvPr/>
+        </p:nvSpPr>
+        <p:spPr>
+          <a:xfrm>
+            <a:off x="3529584" y="3364992"/>
+            <a:ext cx="73152" cy="475488"/>
           </a:xfrm>
           <a:prstGeom prst="rect">
             <a:avLst/>
@@ -20211,14 +21191,14 @@
       </p:sp>
       <p:sp>
         <p:nvSpPr>
-          <p:cNvPr id="28" name="Shape 26"/>
-          <p:cNvSpPr/>
-          <p:nvPr/>
-        </p:nvSpPr>
-        <p:spPr>
-          <a:xfrm>
-            <a:off x="4370832" y="3364992"/>
-            <a:ext cx="1645920" cy="475488"/>
+          <p:cNvPr id="32" name="Shape 30"/>
+          <p:cNvSpPr/>
+          <p:nvPr/>
+        </p:nvSpPr>
+        <p:spPr>
+          <a:xfrm>
+            <a:off x="3602736" y="3364992"/>
+            <a:ext cx="1554480" cy="475488"/>
           </a:xfrm>
           <a:prstGeom prst="rect">
             <a:avLst>
@@ -20238,14 +21218,14 @@
       </p:sp>
       <p:sp>
         <p:nvSpPr>
-          <p:cNvPr id="29" name="Text 27"/>
-          <p:cNvSpPr/>
-          <p:nvPr/>
-        </p:nvSpPr>
-        <p:spPr>
-          <a:xfrm>
-            <a:off x="4370832" y="3364992"/>
-            <a:ext cx="1645920" cy="475488"/>
+          <p:cNvPr id="33" name="Text 31"/>
+          <p:cNvSpPr/>
+          <p:nvPr/>
+        </p:nvSpPr>
+        <p:spPr>
+          <a:xfrm>
+            <a:off x="3602736" y="3364992"/>
+            <a:ext cx="1554480" cy="475488"/>
           </a:xfrm>
           <a:prstGeom prst="rect">
             <a:avLst/>
@@ -20277,14 +21257,14 @@
       </p:sp>
       <p:sp>
         <p:nvSpPr>
-          <p:cNvPr id="30" name="Text 28"/>
-          <p:cNvSpPr/>
-          <p:nvPr/>
-        </p:nvSpPr>
-        <p:spPr>
-          <a:xfrm>
-            <a:off x="6016752" y="3364992"/>
-            <a:ext cx="411480" cy="475488"/>
+          <p:cNvPr id="34" name="Text 32"/>
+          <p:cNvSpPr/>
+          <p:nvPr/>
+        </p:nvSpPr>
+        <p:spPr>
+          <a:xfrm>
+            <a:off x="5157216" y="3364992"/>
+            <a:ext cx="73152" cy="475488"/>
           </a:xfrm>
           <a:prstGeom prst="rect">
             <a:avLst/>
@@ -20316,14 +21296,14 @@
       </p:sp>
       <p:sp>
         <p:nvSpPr>
-          <p:cNvPr id="31" name="Shape 29"/>
-          <p:cNvSpPr/>
-          <p:nvPr/>
-        </p:nvSpPr>
-        <p:spPr>
-          <a:xfrm>
-            <a:off x="6428232" y="3364992"/>
-            <a:ext cx="1645920" cy="475488"/>
+          <p:cNvPr id="35" name="Shape 33"/>
+          <p:cNvSpPr/>
+          <p:nvPr/>
+        </p:nvSpPr>
+        <p:spPr>
+          <a:xfrm>
+            <a:off x="5230368" y="3364992"/>
+            <a:ext cx="1554480" cy="475488"/>
           </a:xfrm>
           <a:prstGeom prst="rect">
             <a:avLst>
@@ -20343,14 +21323,14 @@
       </p:sp>
       <p:sp>
         <p:nvSpPr>
-          <p:cNvPr id="32" name="Text 30"/>
-          <p:cNvSpPr/>
-          <p:nvPr/>
-        </p:nvSpPr>
-        <p:spPr>
-          <a:xfrm>
-            <a:off x="6428232" y="3364992"/>
-            <a:ext cx="1645920" cy="475488"/>
+          <p:cNvPr id="36" name="Text 34"/>
+          <p:cNvSpPr/>
+          <p:nvPr/>
+        </p:nvSpPr>
+        <p:spPr>
+          <a:xfrm>
+            <a:off x="5230368" y="3364992"/>
+            <a:ext cx="1554480" cy="475488"/>
           </a:xfrm>
           <a:prstGeom prst="rect">
             <a:avLst/>
@@ -20374,7 +21354,7 @@
                 <a:ea typeface="Trebuchet MS" pitchFamily="34" charset="-122"/>
                 <a:cs typeface="Trebuchet MS" pitchFamily="34" charset="-120"/>
               </a:rPr>
-              <a:t>cate</a:t>
+              <a:t>ca</a:t>
             </a:r>
             <a:endParaRPr lang="en-US" sz="1400" dirty="0"/>
           </a:p>
@@ -20382,7 +21362,112 @@
       </p:sp>
       <p:sp>
         <p:nvSpPr>
-          <p:cNvPr id="33" name="Shape 31"/>
+          <p:cNvPr id="37" name="Text 35"/>
+          <p:cNvSpPr/>
+          <p:nvPr/>
+        </p:nvSpPr>
+        <p:spPr>
+          <a:xfrm>
+            <a:off x="6784848" y="3364992"/>
+            <a:ext cx="73152" cy="475488"/>
+          </a:xfrm>
+          <a:prstGeom prst="rect">
+            <a:avLst/>
+          </a:prstGeom>
+          <a:noFill/>
+          <a:ln/>
+        </p:spPr>
+        <p:txBody>
+          <a:bodyPr wrap="square" lIns="0" tIns="0" rIns="0" bIns="0" rtlCol="0" anchor="ctr"/>
+          <a:lstStyle/>
+          <a:p>
+            <a:pPr algn="ctr" indent="0" marL="0">
+              <a:buNone/>
+            </a:pPr>
+            <a:r>
+              <a:rPr lang="en-US" sz="1600" b="1" dirty="0">
+                <a:solidFill>
+                  <a:srgbClr val="0D9488"/>
+                </a:solidFill>
+                <a:latin typeface="Trebuchet MS" pitchFamily="34" charset="0"/>
+                <a:ea typeface="Trebuchet MS" pitchFamily="34" charset="-122"/>
+                <a:cs typeface="Trebuchet MS" pitchFamily="34" charset="-120"/>
+              </a:rPr>
+              <a:t>·</a:t>
+            </a:r>
+            <a:endParaRPr lang="en-US" sz="1600" dirty="0"/>
+          </a:p>
+        </p:txBody>
+      </p:sp>
+      <p:sp>
+        <p:nvSpPr>
+          <p:cNvPr id="38" name="Shape 36"/>
+          <p:cNvSpPr/>
+          <p:nvPr/>
+        </p:nvSpPr>
+        <p:spPr>
+          <a:xfrm>
+            <a:off x="6858000" y="3364992"/>
+            <a:ext cx="1554480" cy="475488"/>
+          </a:xfrm>
+          <a:prstGeom prst="rect">
+            <a:avLst>
+              <a:gd name="adj" fmla="val 9615"/>
+            </a:avLst>
+          </a:prstGeom>
+          <a:solidFill>
+            <a:srgbClr val="FFFFFF"/>
+          </a:solidFill>
+          <a:ln w="12700">
+            <a:solidFill>
+              <a:srgbClr val="0D9488"/>
+            </a:solidFill>
+            <a:prstDash val="solid"/>
+          </a:ln>
+        </p:spPr>
+      </p:sp>
+      <p:sp>
+        <p:nvSpPr>
+          <p:cNvPr id="39" name="Text 37"/>
+          <p:cNvSpPr/>
+          <p:nvPr/>
+        </p:nvSpPr>
+        <p:spPr>
+          <a:xfrm>
+            <a:off x="6858000" y="3364992"/>
+            <a:ext cx="1554480" cy="475488"/>
+          </a:xfrm>
+          <a:prstGeom prst="rect">
+            <a:avLst/>
+          </a:prstGeom>
+          <a:noFill/>
+          <a:ln/>
+        </p:spPr>
+        <p:txBody>
+          <a:bodyPr wrap="square" lIns="0" tIns="0" rIns="0" bIns="0" rtlCol="0" anchor="ctr"/>
+          <a:lstStyle/>
+          <a:p>
+            <a:pPr algn="ctr" indent="0" marL="0">
+              <a:buNone/>
+            </a:pPr>
+            <a:r>
+              <a:rPr lang="en-US" sz="1400" b="1" dirty="0">
+                <a:solidFill>
+                  <a:srgbClr val="0D9488"/>
+                </a:solidFill>
+                <a:latin typeface="Trebuchet MS" pitchFamily="34" charset="0"/>
+                <a:ea typeface="Trebuchet MS" pitchFamily="34" charset="-122"/>
+                <a:cs typeface="Trebuchet MS" pitchFamily="34" charset="-120"/>
+              </a:rPr>
+              <a:t>ted</a:t>
+            </a:r>
+            <a:endParaRPr lang="en-US" sz="1400" dirty="0"/>
+          </a:p>
+        </p:txBody>
+      </p:sp>
+      <p:sp>
+        <p:nvSpPr>
+          <p:cNvPr id="40" name="Shape 38"/>
           <p:cNvSpPr/>
           <p:nvPr/>
         </p:nvSpPr>
@@ -20409,7 +21494,7 @@
       </p:sp>
       <p:sp>
         <p:nvSpPr>
-          <p:cNvPr id="34" name="Text 32"/>
+          <p:cNvPr id="41" name="Text 39"/>
           <p:cNvSpPr/>
           <p:nvPr/>
         </p:nvSpPr>
@@ -20448,7 +21533,7 @@
       </p:sp>
       <p:sp>
         <p:nvSpPr>
-          <p:cNvPr id="35" name="Shape 33"/>
+          <p:cNvPr id="42" name="Shape 40"/>
           <p:cNvSpPr/>
           <p:nvPr/>
         </p:nvSpPr>
@@ -20475,7 +21560,7 @@
       </p:sp>
       <p:sp>
         <p:nvSpPr>
-          <p:cNvPr id="36" name="Text 34"/>
+          <p:cNvPr id="43" name="Text 41"/>
           <p:cNvSpPr/>
           <p:nvPr/>
         </p:nvSpPr>
@@ -20798,7 +21883,7 @@
                 <a:ea typeface="Calibri" pitchFamily="34" charset="-122"/>
                 <a:cs typeface="Calibri" pitchFamily="34" charset="-120"/>
               </a:rPr>
-              <a:t>Word Labs  •  wordlabs.app  •  Root: 'locate' = to find or place something</a:t>
+              <a:t>Word Labs  •  wordlabs.app  •  Root: 'locate' = to find or place</a:t>
             </a:r>
             <a:endParaRPr lang="en-US" sz="800" dirty="0"/>
           </a:p>
@@ -20937,7 +22022,7 @@
                 <a:ea typeface="Trebuchet MS" pitchFamily="34" charset="-122"/>
                 <a:cs typeface="Trebuchet MS" pitchFamily="34" charset="-120"/>
               </a:rPr>
-              <a:t>relocate</a:t>
+              <a:t>dislocated</a:t>
             </a:r>
             <a:endParaRPr lang="en-US" sz="2800" dirty="0"/>
           </a:p>
@@ -21017,7 +22102,7 @@
         </p:nvSpPr>
         <p:spPr>
           <a:xfrm>
-            <a:off x="2938272" y="2258568"/>
+            <a:off x="2221992" y="2258568"/>
             <a:ext cx="1828800" cy="292608"/>
           </a:xfrm>
           <a:prstGeom prst="rect">
@@ -21051,7 +22136,7 @@
         </p:nvSpPr>
         <p:spPr>
           <a:xfrm>
-            <a:off x="2938272" y="2258568"/>
+            <a:off x="2221992" y="2258568"/>
             <a:ext cx="1828800" cy="292608"/>
           </a:xfrm>
           <a:prstGeom prst="rect">
@@ -21076,7 +22161,7 @@
                 <a:ea typeface="Trebuchet MS" pitchFamily="34" charset="-122"/>
                 <a:cs typeface="Trebuchet MS" pitchFamily="34" charset="-120"/>
               </a:rPr>
-              <a:t>re</a:t>
+              <a:t>dis</a:t>
             </a:r>
             <a:endParaRPr lang="en-US" sz="1300" dirty="0"/>
           </a:p>
@@ -21090,7 +22175,7 @@
         </p:nvSpPr>
         <p:spPr>
           <a:xfrm>
-            <a:off x="2938272" y="2569464"/>
+            <a:off x="2221992" y="2569464"/>
             <a:ext cx="1828800" cy="201168"/>
           </a:xfrm>
           <a:prstGeom prst="rect">
@@ -21115,7 +22200,7 @@
                 <a:ea typeface="Calibri" pitchFamily="34" charset="-122"/>
                 <a:cs typeface="Calibri" pitchFamily="34" charset="-120"/>
               </a:rPr>
-              <a:t>again</a:t>
+              <a:t>apart or away</a:t>
             </a:r>
             <a:endParaRPr lang="en-US" sz="850" dirty="0"/>
           </a:p>
@@ -21129,7 +22214,7 @@
         </p:nvSpPr>
         <p:spPr>
           <a:xfrm>
-            <a:off x="5803392" y="2258568"/>
+            <a:off x="4370832" y="2258568"/>
             <a:ext cx="1828800" cy="292608"/>
           </a:xfrm>
           <a:prstGeom prst="rect">
@@ -21163,7 +22248,7 @@
         </p:nvSpPr>
         <p:spPr>
           <a:xfrm>
-            <a:off x="5803392" y="2258568"/>
+            <a:off x="4370832" y="2258568"/>
             <a:ext cx="1828800" cy="292608"/>
           </a:xfrm>
           <a:prstGeom prst="rect">
@@ -21202,7 +22287,7 @@
         </p:nvSpPr>
         <p:spPr>
           <a:xfrm>
-            <a:off x="5803392" y="2569464"/>
+            <a:off x="4370832" y="2569464"/>
             <a:ext cx="1828800" cy="201168"/>
           </a:xfrm>
           <a:prstGeom prst="rect">
@@ -21235,7 +22320,158 @@
       </p:sp>
       <p:sp>
         <p:nvSpPr>
-          <p:cNvPr id="22" name="Shape 20"/>
+          <p:cNvPr id="22" name="Text 20"/>
+          <p:cNvSpPr/>
+          <p:nvPr/>
+        </p:nvSpPr>
+        <p:spPr>
+          <a:xfrm>
+            <a:off x="4370832" y="2752344"/>
+            <a:ext cx="1828800" cy="182880"/>
+          </a:xfrm>
+          <a:prstGeom prst="rect">
+            <a:avLst/>
+          </a:prstGeom>
+          <a:noFill/>
+          <a:ln/>
+        </p:spPr>
+        <p:txBody>
+          <a:bodyPr wrap="square" lIns="0" tIns="0" rIns="0" bIns="0" rtlCol="0" anchor="t"/>
+          <a:lstStyle/>
+          <a:p>
+            <a:pPr algn="ctr" indent="0" marL="0">
+              <a:buNone/>
+            </a:pPr>
+            <a:r>
+              <a:rPr lang="en-US" sz="700" i="1" dirty="0">
+                <a:solidFill>
+                  <a:srgbClr val="94A3B8"/>
+                </a:solidFill>
+                <a:latin typeface="Calibri" pitchFamily="34" charset="0"/>
+                <a:ea typeface="Calibri" pitchFamily="34" charset="-122"/>
+                <a:cs typeface="Calibri" pitchFamily="34" charset="-120"/>
+              </a:rPr>
+              <a:t>'e' dropped before vowel suffix</a:t>
+            </a:r>
+            <a:endParaRPr lang="en-US" sz="700" dirty="0"/>
+          </a:p>
+        </p:txBody>
+      </p:sp>
+      <p:sp>
+        <p:nvSpPr>
+          <p:cNvPr id="23" name="Shape 21"/>
+          <p:cNvSpPr/>
+          <p:nvPr/>
+        </p:nvSpPr>
+        <p:spPr>
+          <a:xfrm>
+            <a:off x="6519672" y="2258568"/>
+            <a:ext cx="1828800" cy="292608"/>
+          </a:xfrm>
+          <a:prstGeom prst="rect">
+            <a:avLst>
+              <a:gd name="adj" fmla="val 25000"/>
+            </a:avLst>
+          </a:prstGeom>
+          <a:solidFill>
+            <a:srgbClr val="FCE7F3"/>
+          </a:solidFill>
+          <a:ln w="19050">
+            <a:solidFill>
+              <a:srgbClr val="DB2777"/>
+            </a:solidFill>
+            <a:prstDash val="solid"/>
+          </a:ln>
+          <a:effectLst>
+            <a:outerShdw sx="100000" sy="100000" kx="0" ky="0" algn="bl" rotWithShape="0" blurRad="101600" dist="38100" dir="8100000">
+              <a:srgbClr val="000000">
+                <a:alpha val="12000"/>
+              </a:srgbClr>
+            </a:outerShdw>
+          </a:effectLst>
+        </p:spPr>
+      </p:sp>
+      <p:sp>
+        <p:nvSpPr>
+          <p:cNvPr id="24" name="Text 22"/>
+          <p:cNvSpPr/>
+          <p:nvPr/>
+        </p:nvSpPr>
+        <p:spPr>
+          <a:xfrm>
+            <a:off x="6519672" y="2258568"/>
+            <a:ext cx="1828800" cy="292608"/>
+          </a:xfrm>
+          <a:prstGeom prst="rect">
+            <a:avLst/>
+          </a:prstGeom>
+          <a:noFill/>
+          <a:ln/>
+        </p:spPr>
+        <p:txBody>
+          <a:bodyPr wrap="square" lIns="0" tIns="0" rIns="0" bIns="0" rtlCol="0" anchor="ctr"/>
+          <a:lstStyle/>
+          <a:p>
+            <a:pPr algn="ctr" indent="0" marL="0">
+              <a:buNone/>
+            </a:pPr>
+            <a:r>
+              <a:rPr lang="en-US" sz="1300" b="1" dirty="0">
+                <a:solidFill>
+                  <a:srgbClr val="9D174D"/>
+                </a:solidFill>
+                <a:latin typeface="Trebuchet MS" pitchFamily="34" charset="0"/>
+                <a:ea typeface="Trebuchet MS" pitchFamily="34" charset="-122"/>
+                <a:cs typeface="Trebuchet MS" pitchFamily="34" charset="-120"/>
+              </a:rPr>
+              <a:t>ed</a:t>
+            </a:r>
+            <a:endParaRPr lang="en-US" sz="1300" dirty="0"/>
+          </a:p>
+        </p:txBody>
+      </p:sp>
+      <p:sp>
+        <p:nvSpPr>
+          <p:cNvPr id="25" name="Text 23"/>
+          <p:cNvSpPr/>
+          <p:nvPr/>
+        </p:nvSpPr>
+        <p:spPr>
+          <a:xfrm>
+            <a:off x="6519672" y="2569464"/>
+            <a:ext cx="1828800" cy="201168"/>
+          </a:xfrm>
+          <a:prstGeom prst="rect">
+            <a:avLst/>
+          </a:prstGeom>
+          <a:noFill/>
+          <a:ln/>
+        </p:spPr>
+        <p:txBody>
+          <a:bodyPr wrap="square" lIns="0" tIns="0" rIns="0" bIns="0" rtlCol="0" anchor="t"/>
+          <a:lstStyle/>
+          <a:p>
+            <a:pPr algn="ctr" indent="0" marL="0">
+              <a:buNone/>
+            </a:pPr>
+            <a:r>
+              <a:rPr lang="en-US" sz="850" dirty="0">
+                <a:solidFill>
+                  <a:srgbClr val="475569"/>
+                </a:solidFill>
+                <a:latin typeface="Calibri" pitchFamily="34" charset="0"/>
+                <a:ea typeface="Calibri" pitchFamily="34" charset="-122"/>
+                <a:cs typeface="Calibri" pitchFamily="34" charset="-120"/>
+              </a:rPr>
+              <a:t>past tense</a:t>
+            </a:r>
+            <a:endParaRPr lang="en-US" sz="850" dirty="0"/>
+          </a:p>
+        </p:txBody>
+      </p:sp>
+      <p:sp>
+        <p:nvSpPr>
+          <p:cNvPr id="26" name="Shape 24"/>
           <p:cNvSpPr/>
           <p:nvPr/>
         </p:nvSpPr>
@@ -21262,7 +22498,7 @@
       </p:sp>
       <p:sp>
         <p:nvSpPr>
-          <p:cNvPr id="23" name="Text 21"/>
+          <p:cNvPr id="27" name="Text 25"/>
           <p:cNvSpPr/>
           <p:nvPr/>
         </p:nvSpPr>
@@ -21301,7 +22537,7 @@
       </p:sp>
       <p:sp>
         <p:nvSpPr>
-          <p:cNvPr id="24" name="Shape 22"/>
+          <p:cNvPr id="28" name="Shape 26"/>
           <p:cNvSpPr/>
           <p:nvPr/>
         </p:nvSpPr>
@@ -21328,14 +22564,14 @@
       </p:sp>
       <p:sp>
         <p:nvSpPr>
-          <p:cNvPr id="25" name="Shape 23"/>
-          <p:cNvSpPr/>
-          <p:nvPr/>
-        </p:nvSpPr>
-        <p:spPr>
-          <a:xfrm>
-            <a:off x="2313432" y="3364992"/>
-            <a:ext cx="1645920" cy="475488"/>
+          <p:cNvPr id="29" name="Shape 27"/>
+          <p:cNvSpPr/>
+          <p:nvPr/>
+        </p:nvSpPr>
+        <p:spPr>
+          <a:xfrm>
+            <a:off x="1975104" y="3364992"/>
+            <a:ext cx="1554480" cy="475488"/>
           </a:xfrm>
           <a:prstGeom prst="rect">
             <a:avLst>
@@ -21355,14 +22591,14 @@
       </p:sp>
       <p:sp>
         <p:nvSpPr>
-          <p:cNvPr id="26" name="Text 24"/>
-          <p:cNvSpPr/>
-          <p:nvPr/>
-        </p:nvSpPr>
-        <p:spPr>
-          <a:xfrm>
-            <a:off x="2313432" y="3364992"/>
-            <a:ext cx="1645920" cy="475488"/>
+          <p:cNvPr id="30" name="Text 28"/>
+          <p:cNvSpPr/>
+          <p:nvPr/>
+        </p:nvSpPr>
+        <p:spPr>
+          <a:xfrm>
+            <a:off x="1975104" y="3364992"/>
+            <a:ext cx="1554480" cy="475488"/>
           </a:xfrm>
           <a:prstGeom prst="rect">
             <a:avLst/>
@@ -21386,7 +22622,7 @@
                 <a:ea typeface="Trebuchet MS" pitchFamily="34" charset="-122"/>
                 <a:cs typeface="Trebuchet MS" pitchFamily="34" charset="-120"/>
               </a:rPr>
-              <a:t>re</a:t>
+              <a:t>dis</a:t>
             </a:r>
             <a:endParaRPr lang="en-US" sz="1400" dirty="0"/>
           </a:p>
@@ -21394,14 +22630,14 @@
       </p:sp>
       <p:sp>
         <p:nvSpPr>
-          <p:cNvPr id="27" name="Text 25"/>
-          <p:cNvSpPr/>
-          <p:nvPr/>
-        </p:nvSpPr>
-        <p:spPr>
-          <a:xfrm>
-            <a:off x="3959352" y="3364992"/>
-            <a:ext cx="411480" cy="475488"/>
+          <p:cNvPr id="31" name="Text 29"/>
+          <p:cNvSpPr/>
+          <p:nvPr/>
+        </p:nvSpPr>
+        <p:spPr>
+          <a:xfrm>
+            <a:off x="3529584" y="3364992"/>
+            <a:ext cx="73152" cy="475488"/>
           </a:xfrm>
           <a:prstGeom prst="rect">
             <a:avLst/>
@@ -21433,14 +22669,14 @@
       </p:sp>
       <p:sp>
         <p:nvSpPr>
-          <p:cNvPr id="28" name="Shape 26"/>
-          <p:cNvSpPr/>
-          <p:nvPr/>
-        </p:nvSpPr>
-        <p:spPr>
-          <a:xfrm>
-            <a:off x="4370832" y="3364992"/>
-            <a:ext cx="1645920" cy="475488"/>
+          <p:cNvPr id="32" name="Shape 30"/>
+          <p:cNvSpPr/>
+          <p:nvPr/>
+        </p:nvSpPr>
+        <p:spPr>
+          <a:xfrm>
+            <a:off x="3602736" y="3364992"/>
+            <a:ext cx="1554480" cy="475488"/>
           </a:xfrm>
           <a:prstGeom prst="rect">
             <a:avLst>
@@ -21460,14 +22696,14 @@
       </p:sp>
       <p:sp>
         <p:nvSpPr>
-          <p:cNvPr id="29" name="Text 27"/>
-          <p:cNvSpPr/>
-          <p:nvPr/>
-        </p:nvSpPr>
-        <p:spPr>
-          <a:xfrm>
-            <a:off x="4370832" y="3364992"/>
-            <a:ext cx="1645920" cy="475488"/>
+          <p:cNvPr id="33" name="Text 31"/>
+          <p:cNvSpPr/>
+          <p:nvPr/>
+        </p:nvSpPr>
+        <p:spPr>
+          <a:xfrm>
+            <a:off x="3602736" y="3364992"/>
+            <a:ext cx="1554480" cy="475488"/>
           </a:xfrm>
           <a:prstGeom prst="rect">
             <a:avLst/>
@@ -21499,14 +22735,14 @@
       </p:sp>
       <p:sp>
         <p:nvSpPr>
-          <p:cNvPr id="30" name="Text 28"/>
-          <p:cNvSpPr/>
-          <p:nvPr/>
-        </p:nvSpPr>
-        <p:spPr>
-          <a:xfrm>
-            <a:off x="6016752" y="3364992"/>
-            <a:ext cx="411480" cy="475488"/>
+          <p:cNvPr id="34" name="Text 32"/>
+          <p:cNvSpPr/>
+          <p:nvPr/>
+        </p:nvSpPr>
+        <p:spPr>
+          <a:xfrm>
+            <a:off x="5157216" y="3364992"/>
+            <a:ext cx="73152" cy="475488"/>
           </a:xfrm>
           <a:prstGeom prst="rect">
             <a:avLst/>
@@ -21538,14 +22774,14 @@
       </p:sp>
       <p:sp>
         <p:nvSpPr>
-          <p:cNvPr id="31" name="Shape 29"/>
-          <p:cNvSpPr/>
-          <p:nvPr/>
-        </p:nvSpPr>
-        <p:spPr>
-          <a:xfrm>
-            <a:off x="6428232" y="3364992"/>
-            <a:ext cx="1645920" cy="475488"/>
+          <p:cNvPr id="35" name="Shape 33"/>
+          <p:cNvSpPr/>
+          <p:nvPr/>
+        </p:nvSpPr>
+        <p:spPr>
+          <a:xfrm>
+            <a:off x="5230368" y="3364992"/>
+            <a:ext cx="1554480" cy="475488"/>
           </a:xfrm>
           <a:prstGeom prst="rect">
             <a:avLst>
@@ -21565,14 +22801,14 @@
       </p:sp>
       <p:sp>
         <p:nvSpPr>
-          <p:cNvPr id="32" name="Text 30"/>
-          <p:cNvSpPr/>
-          <p:nvPr/>
-        </p:nvSpPr>
-        <p:spPr>
-          <a:xfrm>
-            <a:off x="6428232" y="3364992"/>
-            <a:ext cx="1645920" cy="475488"/>
+          <p:cNvPr id="36" name="Text 34"/>
+          <p:cNvSpPr/>
+          <p:nvPr/>
+        </p:nvSpPr>
+        <p:spPr>
+          <a:xfrm>
+            <a:off x="5230368" y="3364992"/>
+            <a:ext cx="1554480" cy="475488"/>
           </a:xfrm>
           <a:prstGeom prst="rect">
             <a:avLst/>
@@ -21596,7 +22832,7 @@
                 <a:ea typeface="Trebuchet MS" pitchFamily="34" charset="-122"/>
                 <a:cs typeface="Trebuchet MS" pitchFamily="34" charset="-120"/>
               </a:rPr>
-              <a:t>cate</a:t>
+              <a:t>ca</a:t>
             </a:r>
             <a:endParaRPr lang="en-US" sz="1400" dirty="0"/>
           </a:p>
@@ -21604,7 +22840,112 @@
       </p:sp>
       <p:sp>
         <p:nvSpPr>
-          <p:cNvPr id="33" name="Shape 31"/>
+          <p:cNvPr id="37" name="Text 35"/>
+          <p:cNvSpPr/>
+          <p:nvPr/>
+        </p:nvSpPr>
+        <p:spPr>
+          <a:xfrm>
+            <a:off x="6784848" y="3364992"/>
+            <a:ext cx="73152" cy="475488"/>
+          </a:xfrm>
+          <a:prstGeom prst="rect">
+            <a:avLst/>
+          </a:prstGeom>
+          <a:noFill/>
+          <a:ln/>
+        </p:spPr>
+        <p:txBody>
+          <a:bodyPr wrap="square" lIns="0" tIns="0" rIns="0" bIns="0" rtlCol="0" anchor="ctr"/>
+          <a:lstStyle/>
+          <a:p>
+            <a:pPr algn="ctr" indent="0" marL="0">
+              <a:buNone/>
+            </a:pPr>
+            <a:r>
+              <a:rPr lang="en-US" sz="1600" b="1" dirty="0">
+                <a:solidFill>
+                  <a:srgbClr val="0D9488"/>
+                </a:solidFill>
+                <a:latin typeface="Trebuchet MS" pitchFamily="34" charset="0"/>
+                <a:ea typeface="Trebuchet MS" pitchFamily="34" charset="-122"/>
+                <a:cs typeface="Trebuchet MS" pitchFamily="34" charset="-120"/>
+              </a:rPr>
+              <a:t>·</a:t>
+            </a:r>
+            <a:endParaRPr lang="en-US" sz="1600" dirty="0"/>
+          </a:p>
+        </p:txBody>
+      </p:sp>
+      <p:sp>
+        <p:nvSpPr>
+          <p:cNvPr id="38" name="Shape 36"/>
+          <p:cNvSpPr/>
+          <p:nvPr/>
+        </p:nvSpPr>
+        <p:spPr>
+          <a:xfrm>
+            <a:off x="6858000" y="3364992"/>
+            <a:ext cx="1554480" cy="475488"/>
+          </a:xfrm>
+          <a:prstGeom prst="rect">
+            <a:avLst>
+              <a:gd name="adj" fmla="val 9615"/>
+            </a:avLst>
+          </a:prstGeom>
+          <a:solidFill>
+            <a:srgbClr val="FFFFFF"/>
+          </a:solidFill>
+          <a:ln w="12700">
+            <a:solidFill>
+              <a:srgbClr val="0D9488"/>
+            </a:solidFill>
+            <a:prstDash val="solid"/>
+          </a:ln>
+        </p:spPr>
+      </p:sp>
+      <p:sp>
+        <p:nvSpPr>
+          <p:cNvPr id="39" name="Text 37"/>
+          <p:cNvSpPr/>
+          <p:nvPr/>
+        </p:nvSpPr>
+        <p:spPr>
+          <a:xfrm>
+            <a:off x="6858000" y="3364992"/>
+            <a:ext cx="1554480" cy="475488"/>
+          </a:xfrm>
+          <a:prstGeom prst="rect">
+            <a:avLst/>
+          </a:prstGeom>
+          <a:noFill/>
+          <a:ln/>
+        </p:spPr>
+        <p:txBody>
+          <a:bodyPr wrap="square" lIns="0" tIns="0" rIns="0" bIns="0" rtlCol="0" anchor="ctr"/>
+          <a:lstStyle/>
+          <a:p>
+            <a:pPr algn="ctr" indent="0" marL="0">
+              <a:buNone/>
+            </a:pPr>
+            <a:r>
+              <a:rPr lang="en-US" sz="1400" b="1" dirty="0">
+                <a:solidFill>
+                  <a:srgbClr val="0D9488"/>
+                </a:solidFill>
+                <a:latin typeface="Trebuchet MS" pitchFamily="34" charset="0"/>
+                <a:ea typeface="Trebuchet MS" pitchFamily="34" charset="-122"/>
+                <a:cs typeface="Trebuchet MS" pitchFamily="34" charset="-120"/>
+              </a:rPr>
+              <a:t>ted</a:t>
+            </a:r>
+            <a:endParaRPr lang="en-US" sz="1400" dirty="0"/>
+          </a:p>
+        </p:txBody>
+      </p:sp>
+      <p:sp>
+        <p:nvSpPr>
+          <p:cNvPr id="40" name="Shape 38"/>
           <p:cNvSpPr/>
           <p:nvPr/>
         </p:nvSpPr>
@@ -21631,7 +22972,7 @@
       </p:sp>
       <p:sp>
         <p:nvSpPr>
-          <p:cNvPr id="34" name="Text 32"/>
+          <p:cNvPr id="41" name="Text 39"/>
           <p:cNvSpPr/>
           <p:nvPr/>
         </p:nvSpPr>
@@ -21670,7 +23011,7 @@
       </p:sp>
       <p:sp>
         <p:nvSpPr>
-          <p:cNvPr id="35" name="Shape 33"/>
+          <p:cNvPr id="42" name="Shape 40"/>
           <p:cNvSpPr/>
           <p:nvPr/>
         </p:nvSpPr>
@@ -21697,14 +23038,14 @@
       </p:sp>
       <p:sp>
         <p:nvSpPr>
-          <p:cNvPr id="36" name="Shape 34"/>
-          <p:cNvSpPr/>
-          <p:nvPr/>
-        </p:nvSpPr>
-        <p:spPr>
-          <a:xfrm>
-            <a:off x="2124837" y="4169664"/>
-            <a:ext cx="685800" cy="384048"/>
+          <p:cNvPr id="43" name="Shape 41"/>
+          <p:cNvSpPr/>
+          <p:nvPr/>
+        </p:nvSpPr>
+        <p:spPr>
+          <a:xfrm>
+            <a:off x="1951330" y="4169664"/>
+            <a:ext cx="676656" cy="384048"/>
           </a:xfrm>
           <a:prstGeom prst="rect">
             <a:avLst>
@@ -21724,14 +23065,14 @@
       </p:sp>
       <p:sp>
         <p:nvSpPr>
-          <p:cNvPr id="37" name="Text 35"/>
-          <p:cNvSpPr/>
-          <p:nvPr/>
-        </p:nvSpPr>
-        <p:spPr>
-          <a:xfrm>
-            <a:off x="2124837" y="4169664"/>
-            <a:ext cx="685800" cy="384048"/>
+          <p:cNvPr id="44" name="Text 42"/>
+          <p:cNvSpPr/>
+          <p:nvPr/>
+        </p:nvSpPr>
+        <p:spPr>
+          <a:xfrm>
+            <a:off x="1951330" y="4169664"/>
+            <a:ext cx="676656" cy="384048"/>
           </a:xfrm>
           <a:prstGeom prst="rect">
             <a:avLst/>
@@ -21755,7 +23096,7 @@
                 <a:ea typeface="Trebuchet MS" pitchFamily="34" charset="-122"/>
                 <a:cs typeface="Trebuchet MS" pitchFamily="34" charset="-120"/>
               </a:rPr>
-              <a:t>r</a:t>
+              <a:t>d</a:t>
             </a:r>
             <a:endParaRPr lang="en-US" sz="900" dirty="0"/>
           </a:p>
@@ -21763,14 +23104,14 @@
       </p:sp>
       <p:sp>
         <p:nvSpPr>
-          <p:cNvPr id="38" name="Shape 36"/>
-          <p:cNvSpPr/>
-          <p:nvPr/>
-        </p:nvSpPr>
-        <p:spPr>
-          <a:xfrm>
-            <a:off x="3033522" y="4169664"/>
-            <a:ext cx="685800" cy="384048"/>
+          <p:cNvPr id="45" name="Shape 43"/>
+          <p:cNvSpPr/>
+          <p:nvPr/>
+        </p:nvSpPr>
+        <p:spPr>
+          <a:xfrm>
+            <a:off x="2677363" y="4169664"/>
+            <a:ext cx="676656" cy="384048"/>
           </a:xfrm>
           <a:prstGeom prst="rect">
             <a:avLst>
@@ -21790,14 +23131,14 @@
       </p:sp>
       <p:sp>
         <p:nvSpPr>
-          <p:cNvPr id="39" name="Text 37"/>
-          <p:cNvSpPr/>
-          <p:nvPr/>
-        </p:nvSpPr>
-        <p:spPr>
-          <a:xfrm>
-            <a:off x="3033522" y="4169664"/>
-            <a:ext cx="685800" cy="384048"/>
+          <p:cNvPr id="46" name="Text 44"/>
+          <p:cNvSpPr/>
+          <p:nvPr/>
+        </p:nvSpPr>
+        <p:spPr>
+          <a:xfrm>
+            <a:off x="2677363" y="4169664"/>
+            <a:ext cx="676656" cy="384048"/>
           </a:xfrm>
           <a:prstGeom prst="rect">
             <a:avLst/>
@@ -21821,7 +23162,7 @@
                 <a:ea typeface="Trebuchet MS" pitchFamily="34" charset="-122"/>
                 <a:cs typeface="Trebuchet MS" pitchFamily="34" charset="-120"/>
               </a:rPr>
-              <a:t>e</a:t>
+              <a:t>i</a:t>
             </a:r>
             <a:endParaRPr lang="en-US" sz="900" dirty="0"/>
           </a:p>
@@ -21829,14 +23170,14 @@
       </p:sp>
       <p:sp>
         <p:nvSpPr>
-          <p:cNvPr id="40" name="Shape 38"/>
-          <p:cNvSpPr/>
-          <p:nvPr/>
-        </p:nvSpPr>
-        <p:spPr>
-          <a:xfrm>
-            <a:off x="3942207" y="4169664"/>
-            <a:ext cx="685800" cy="384048"/>
+          <p:cNvPr id="47" name="Shape 45"/>
+          <p:cNvSpPr/>
+          <p:nvPr/>
+        </p:nvSpPr>
+        <p:spPr>
+          <a:xfrm>
+            <a:off x="3403397" y="4169664"/>
+            <a:ext cx="676656" cy="384048"/>
           </a:xfrm>
           <a:prstGeom prst="rect">
             <a:avLst>
@@ -21856,14 +23197,14 @@
       </p:sp>
       <p:sp>
         <p:nvSpPr>
-          <p:cNvPr id="41" name="Text 39"/>
-          <p:cNvSpPr/>
-          <p:nvPr/>
-        </p:nvSpPr>
-        <p:spPr>
-          <a:xfrm>
-            <a:off x="3942207" y="4169664"/>
-            <a:ext cx="685800" cy="384048"/>
+          <p:cNvPr id="48" name="Text 46"/>
+          <p:cNvSpPr/>
+          <p:nvPr/>
+        </p:nvSpPr>
+        <p:spPr>
+          <a:xfrm>
+            <a:off x="3403397" y="4169664"/>
+            <a:ext cx="676656" cy="384048"/>
           </a:xfrm>
           <a:prstGeom prst="rect">
             <a:avLst/>
@@ -21887,7 +23228,7 @@
                 <a:ea typeface="Trebuchet MS" pitchFamily="34" charset="-122"/>
                 <a:cs typeface="Trebuchet MS" pitchFamily="34" charset="-120"/>
               </a:rPr>
-              <a:t>l</a:t>
+              <a:t>s</a:t>
             </a:r>
             <a:endParaRPr lang="en-US" sz="900" dirty="0"/>
           </a:p>
@@ -21895,14 +23236,14 @@
       </p:sp>
       <p:sp>
         <p:nvSpPr>
-          <p:cNvPr id="42" name="Shape 40"/>
-          <p:cNvSpPr/>
-          <p:nvPr/>
-        </p:nvSpPr>
-        <p:spPr>
-          <a:xfrm>
-            <a:off x="4850892" y="4169664"/>
-            <a:ext cx="685800" cy="384048"/>
+          <p:cNvPr id="49" name="Shape 47"/>
+          <p:cNvSpPr/>
+          <p:nvPr/>
+        </p:nvSpPr>
+        <p:spPr>
+          <a:xfrm>
+            <a:off x="4129430" y="4169664"/>
+            <a:ext cx="676656" cy="384048"/>
           </a:xfrm>
           <a:prstGeom prst="rect">
             <a:avLst>
@@ -21922,14 +23263,14 @@
       </p:sp>
       <p:sp>
         <p:nvSpPr>
-          <p:cNvPr id="43" name="Text 41"/>
-          <p:cNvSpPr/>
-          <p:nvPr/>
-        </p:nvSpPr>
-        <p:spPr>
-          <a:xfrm>
-            <a:off x="4850892" y="4169664"/>
-            <a:ext cx="685800" cy="384048"/>
+          <p:cNvPr id="50" name="Text 48"/>
+          <p:cNvSpPr/>
+          <p:nvPr/>
+        </p:nvSpPr>
+        <p:spPr>
+          <a:xfrm>
+            <a:off x="4129430" y="4169664"/>
+            <a:ext cx="676656" cy="384048"/>
           </a:xfrm>
           <a:prstGeom prst="rect">
             <a:avLst/>
@@ -21953,7 +23294,7 @@
                 <a:ea typeface="Trebuchet MS" pitchFamily="34" charset="-122"/>
                 <a:cs typeface="Trebuchet MS" pitchFamily="34" charset="-120"/>
               </a:rPr>
-              <a:t>o</a:t>
+              <a:t>l</a:t>
             </a:r>
             <a:endParaRPr lang="en-US" sz="900" dirty="0"/>
           </a:p>
@@ -21961,14 +23302,14 @@
       </p:sp>
       <p:sp>
         <p:nvSpPr>
-          <p:cNvPr id="44" name="Shape 42"/>
-          <p:cNvSpPr/>
-          <p:nvPr/>
-        </p:nvSpPr>
-        <p:spPr>
-          <a:xfrm>
-            <a:off x="5759577" y="4169664"/>
-            <a:ext cx="685800" cy="384048"/>
+          <p:cNvPr id="51" name="Shape 49"/>
+          <p:cNvSpPr/>
+          <p:nvPr/>
+        </p:nvSpPr>
+        <p:spPr>
+          <a:xfrm>
+            <a:off x="4855464" y="4169664"/>
+            <a:ext cx="676656" cy="384048"/>
           </a:xfrm>
           <a:prstGeom prst="rect">
             <a:avLst>
@@ -21988,14 +23329,14 @@
       </p:sp>
       <p:sp>
         <p:nvSpPr>
-          <p:cNvPr id="45" name="Text 43"/>
-          <p:cNvSpPr/>
-          <p:nvPr/>
-        </p:nvSpPr>
-        <p:spPr>
-          <a:xfrm>
-            <a:off x="5759577" y="4169664"/>
-            <a:ext cx="685800" cy="384048"/>
+          <p:cNvPr id="52" name="Text 50"/>
+          <p:cNvSpPr/>
+          <p:nvPr/>
+        </p:nvSpPr>
+        <p:spPr>
+          <a:xfrm>
+            <a:off x="4855464" y="4169664"/>
+            <a:ext cx="676656" cy="384048"/>
           </a:xfrm>
           <a:prstGeom prst="rect">
             <a:avLst/>
@@ -22019,6 +23360,72 @@
                 <a:ea typeface="Trebuchet MS" pitchFamily="34" charset="-122"/>
                 <a:cs typeface="Trebuchet MS" pitchFamily="34" charset="-120"/>
               </a:rPr>
+              <a:t>o</a:t>
+            </a:r>
+            <a:endParaRPr lang="en-US" sz="900" dirty="0"/>
+          </a:p>
+        </p:txBody>
+      </p:sp>
+      <p:sp>
+        <p:nvSpPr>
+          <p:cNvPr id="53" name="Shape 51"/>
+          <p:cNvSpPr/>
+          <p:nvPr/>
+        </p:nvSpPr>
+        <p:spPr>
+          <a:xfrm>
+            <a:off x="5581498" y="4169664"/>
+            <a:ext cx="676656" cy="384048"/>
+          </a:xfrm>
+          <a:prstGeom prst="rect">
+            <a:avLst>
+              <a:gd name="adj" fmla="val 9524"/>
+            </a:avLst>
+          </a:prstGeom>
+          <a:solidFill>
+            <a:srgbClr val="FFFFFF"/>
+          </a:solidFill>
+          <a:ln w="12700">
+            <a:solidFill>
+              <a:srgbClr val="DB2777"/>
+            </a:solidFill>
+            <a:prstDash val="solid"/>
+          </a:ln>
+        </p:spPr>
+      </p:sp>
+      <p:sp>
+        <p:nvSpPr>
+          <p:cNvPr id="54" name="Text 52"/>
+          <p:cNvSpPr/>
+          <p:nvPr/>
+        </p:nvSpPr>
+        <p:spPr>
+          <a:xfrm>
+            <a:off x="5581498" y="4169664"/>
+            <a:ext cx="676656" cy="384048"/>
+          </a:xfrm>
+          <a:prstGeom prst="rect">
+            <a:avLst/>
+          </a:prstGeom>
+          <a:noFill/>
+          <a:ln/>
+        </p:spPr>
+        <p:txBody>
+          <a:bodyPr wrap="square" lIns="0" tIns="0" rIns="0" bIns="0" rtlCol="0" anchor="ctr"/>
+          <a:lstStyle/>
+          <a:p>
+            <a:pPr algn="ctr" indent="0" marL="0">
+              <a:buNone/>
+            </a:pPr>
+            <a:r>
+              <a:rPr lang="en-US" sz="900" b="1" dirty="0">
+                <a:solidFill>
+                  <a:srgbClr val="9D174D"/>
+                </a:solidFill>
+                <a:latin typeface="Trebuchet MS" pitchFamily="34" charset="0"/>
+                <a:ea typeface="Trebuchet MS" pitchFamily="34" charset="-122"/>
+                <a:cs typeface="Trebuchet MS" pitchFamily="34" charset="-120"/>
+              </a:rPr>
               <a:t>c</a:t>
             </a:r>
             <a:endParaRPr lang="en-US" sz="900" dirty="0"/>
@@ -22027,14 +23434,14 @@
       </p:sp>
       <p:sp>
         <p:nvSpPr>
-          <p:cNvPr id="46" name="Text 44"/>
-          <p:cNvSpPr/>
-          <p:nvPr/>
-        </p:nvSpPr>
-        <p:spPr>
-          <a:xfrm>
-            <a:off x="5759577" y="4572000"/>
-            <a:ext cx="685800" cy="219456"/>
+          <p:cNvPr id="55" name="Text 53"/>
+          <p:cNvSpPr/>
+          <p:nvPr/>
+        </p:nvSpPr>
+        <p:spPr>
+          <a:xfrm>
+            <a:off x="5581498" y="4572000"/>
+            <a:ext cx="676656" cy="219456"/>
           </a:xfrm>
           <a:prstGeom prst="rect">
             <a:avLst/>
@@ -22066,14 +23473,14 @@
       </p:sp>
       <p:sp>
         <p:nvSpPr>
-          <p:cNvPr id="47" name="Shape 45"/>
-          <p:cNvSpPr/>
-          <p:nvPr/>
-        </p:nvSpPr>
-        <p:spPr>
-          <a:xfrm>
-            <a:off x="6668262" y="4169664"/>
-            <a:ext cx="685800" cy="384048"/>
+          <p:cNvPr id="56" name="Shape 54"/>
+          <p:cNvSpPr/>
+          <p:nvPr/>
+        </p:nvSpPr>
+        <p:spPr>
+          <a:xfrm>
+            <a:off x="6307531" y="4169664"/>
+            <a:ext cx="676656" cy="384048"/>
           </a:xfrm>
           <a:prstGeom prst="rect">
             <a:avLst>
@@ -22093,14 +23500,14 @@
       </p:sp>
       <p:sp>
         <p:nvSpPr>
-          <p:cNvPr id="48" name="Text 46"/>
-          <p:cNvSpPr/>
-          <p:nvPr/>
-        </p:nvSpPr>
-        <p:spPr>
-          <a:xfrm>
-            <a:off x="6668262" y="4169664"/>
-            <a:ext cx="685800" cy="384048"/>
+          <p:cNvPr id="57" name="Text 55"/>
+          <p:cNvSpPr/>
+          <p:nvPr/>
+        </p:nvSpPr>
+        <p:spPr>
+          <a:xfrm>
+            <a:off x="6307531" y="4169664"/>
+            <a:ext cx="676656" cy="384048"/>
           </a:xfrm>
           <a:prstGeom prst="rect">
             <a:avLst/>
@@ -22132,14 +23539,14 @@
       </p:sp>
       <p:sp>
         <p:nvSpPr>
-          <p:cNvPr id="49" name="Shape 47"/>
-          <p:cNvSpPr/>
-          <p:nvPr/>
-        </p:nvSpPr>
-        <p:spPr>
-          <a:xfrm>
-            <a:off x="7576947" y="4169664"/>
-            <a:ext cx="685800" cy="384048"/>
+          <p:cNvPr id="58" name="Shape 56"/>
+          <p:cNvSpPr/>
+          <p:nvPr/>
+        </p:nvSpPr>
+        <p:spPr>
+          <a:xfrm>
+            <a:off x="7033565" y="4169664"/>
+            <a:ext cx="676656" cy="384048"/>
           </a:xfrm>
           <a:prstGeom prst="rect">
             <a:avLst>
@@ -22159,14 +23566,14 @@
       </p:sp>
       <p:sp>
         <p:nvSpPr>
-          <p:cNvPr id="50" name="Text 48"/>
-          <p:cNvSpPr/>
-          <p:nvPr/>
-        </p:nvSpPr>
-        <p:spPr>
-          <a:xfrm>
-            <a:off x="7576947" y="4169664"/>
-            <a:ext cx="685800" cy="384048"/>
+          <p:cNvPr id="59" name="Text 57"/>
+          <p:cNvSpPr/>
+          <p:nvPr/>
+        </p:nvSpPr>
+        <p:spPr>
+          <a:xfrm>
+            <a:off x="7033565" y="4169664"/>
+            <a:ext cx="676656" cy="384048"/>
           </a:xfrm>
           <a:prstGeom prst="rect">
             <a:avLst/>
@@ -22190,7 +23597,73 @@
                 <a:ea typeface="Trebuchet MS" pitchFamily="34" charset="-122"/>
                 <a:cs typeface="Trebuchet MS" pitchFamily="34" charset="-120"/>
               </a:rPr>
-              <a:t>te</a:t>
+              <a:t>t</a:t>
+            </a:r>
+            <a:endParaRPr lang="en-US" sz="900" dirty="0"/>
+          </a:p>
+        </p:txBody>
+      </p:sp>
+      <p:sp>
+        <p:nvSpPr>
+          <p:cNvPr id="60" name="Shape 58"/>
+          <p:cNvSpPr/>
+          <p:nvPr/>
+        </p:nvSpPr>
+        <p:spPr>
+          <a:xfrm>
+            <a:off x="7759598" y="4169664"/>
+            <a:ext cx="676656" cy="384048"/>
+          </a:xfrm>
+          <a:prstGeom prst="rect">
+            <a:avLst>
+              <a:gd name="adj" fmla="val 9524"/>
+            </a:avLst>
+          </a:prstGeom>
+          <a:solidFill>
+            <a:srgbClr val="FFFFFF"/>
+          </a:solidFill>
+          <a:ln w="12700">
+            <a:solidFill>
+              <a:srgbClr val="DB2777"/>
+            </a:solidFill>
+            <a:prstDash val="solid"/>
+          </a:ln>
+        </p:spPr>
+      </p:sp>
+      <p:sp>
+        <p:nvSpPr>
+          <p:cNvPr id="61" name="Text 59"/>
+          <p:cNvSpPr/>
+          <p:nvPr/>
+        </p:nvSpPr>
+        <p:spPr>
+          <a:xfrm>
+            <a:off x="7759598" y="4169664"/>
+            <a:ext cx="676656" cy="384048"/>
+          </a:xfrm>
+          <a:prstGeom prst="rect">
+            <a:avLst/>
+          </a:prstGeom>
+          <a:noFill/>
+          <a:ln/>
+        </p:spPr>
+        <p:txBody>
+          <a:bodyPr wrap="square" lIns="0" tIns="0" rIns="0" bIns="0" rtlCol="0" anchor="ctr"/>
+          <a:lstStyle/>
+          <a:p>
+            <a:pPr algn="ctr" indent="0" marL="0">
+              <a:buNone/>
+            </a:pPr>
+            <a:r>
+              <a:rPr lang="en-US" sz="900" b="1" dirty="0">
+                <a:solidFill>
+                  <a:srgbClr val="9D174D"/>
+                </a:solidFill>
+                <a:latin typeface="Trebuchet MS" pitchFamily="34" charset="0"/>
+                <a:ea typeface="Trebuchet MS" pitchFamily="34" charset="-122"/>
+                <a:cs typeface="Trebuchet MS" pitchFamily="34" charset="-120"/>
+              </a:rPr>
+              <a:t>ed</a:t>
             </a:r>
             <a:endParaRPr lang="en-US" sz="900" dirty="0"/>
           </a:p>
@@ -22482,7 +23955,7 @@
                 <a:ea typeface="Calibri" pitchFamily="34" charset="-122"/>
                 <a:cs typeface="Calibri" pitchFamily="34" charset="-120"/>
               </a:rPr>
-              <a:t>Word Labs  •  wordlabs.app  •  Root: 'locate' = to find or place something</a:t>
+              <a:t>Word Labs  •  wordlabs.app  •  Root: 'locate' = to find or place</a:t>
             </a:r>
             <a:endParaRPr lang="en-US" sz="800" dirty="0"/>
           </a:p>
@@ -22621,7 +24094,7 @@
                 <a:ea typeface="Trebuchet MS" pitchFamily="34" charset="-122"/>
                 <a:cs typeface="Trebuchet MS" pitchFamily="34" charset="-120"/>
               </a:rPr>
-              <a:t>dislocate</a:t>
+              <a:t>allocate</a:t>
             </a:r>
             <a:endParaRPr lang="en-US" sz="2800" dirty="0"/>
           </a:p>
@@ -23309,7 +24782,7 @@
                 <a:ea typeface="Calibri" pitchFamily="34" charset="-122"/>
                 <a:cs typeface="Calibri" pitchFamily="34" charset="-120"/>
               </a:rPr>
-              <a:t>Word Labs  •  wordlabs.app  •  Root: 'locate' = to find or place something</a:t>
+              <a:t>Word Labs  •  wordlabs.app  •  Root: 'locate' = to find or place</a:t>
             </a:r>
             <a:endParaRPr lang="en-US" sz="800" dirty="0"/>
           </a:p>
@@ -23448,7 +24921,7 @@
                 <a:ea typeface="Trebuchet MS" pitchFamily="34" charset="-122"/>
                 <a:cs typeface="Trebuchet MS" pitchFamily="34" charset="-120"/>
               </a:rPr>
-              <a:t>dislocate</a:t>
+              <a:t>allocate</a:t>
             </a:r>
             <a:endParaRPr lang="en-US" sz="2800" dirty="0"/>
           </a:p>
@@ -23587,7 +25060,7 @@
                 <a:ea typeface="Trebuchet MS" pitchFamily="34" charset="-122"/>
                 <a:cs typeface="Trebuchet MS" pitchFamily="34" charset="-120"/>
               </a:rPr>
-              <a:t>dis</a:t>
+              <a:t>al</a:t>
             </a:r>
             <a:endParaRPr lang="en-US" sz="1300" dirty="0"/>
           </a:p>
@@ -23626,7 +25099,7 @@
                 <a:ea typeface="Calibri" pitchFamily="34" charset="-122"/>
                 <a:cs typeface="Calibri" pitchFamily="34" charset="-120"/>
               </a:rPr>
-              <a:t>apart or away</a:t>
+              <a:t>to or towards</a:t>
             </a:r>
             <a:endParaRPr lang="en-US" sz="850" dirty="0"/>
           </a:p>
@@ -23634,7 +25107,46 @@
       </p:sp>
       <p:sp>
         <p:nvSpPr>
-          <p:cNvPr id="19" name="Shape 17"/>
+          <p:cNvPr id="19" name="Text 17"/>
+          <p:cNvSpPr/>
+          <p:nvPr/>
+        </p:nvSpPr>
+        <p:spPr>
+          <a:xfrm>
+            <a:off x="2938272" y="2752344"/>
+            <a:ext cx="1828800" cy="182880"/>
+          </a:xfrm>
+          <a:prstGeom prst="rect">
+            <a:avLst/>
+          </a:prstGeom>
+          <a:noFill/>
+          <a:ln/>
+        </p:spPr>
+        <p:txBody>
+          <a:bodyPr wrap="square" lIns="0" tIns="0" rIns="0" bIns="0" rtlCol="0" anchor="t"/>
+          <a:lstStyle/>
+          <a:p>
+            <a:pPr algn="ctr" indent="0" marL="0">
+              <a:buNone/>
+            </a:pPr>
+            <a:r>
+              <a:rPr lang="en-US" sz="700" i="1" dirty="0">
+                <a:solidFill>
+                  <a:srgbClr val="94A3B8"/>
+                </a:solidFill>
+                <a:latin typeface="Calibri" pitchFamily="34" charset="0"/>
+                <a:ea typeface="Calibri" pitchFamily="34" charset="-122"/>
+                <a:cs typeface="Calibri" pitchFamily="34" charset="-120"/>
+              </a:rPr>
+              <a:t>ad → al before 'l'</a:t>
+            </a:r>
+            <a:endParaRPr lang="en-US" sz="700" dirty="0"/>
+          </a:p>
+        </p:txBody>
+      </p:sp>
+      <p:sp>
+        <p:nvSpPr>
+          <p:cNvPr id="20" name="Shape 18"/>
           <p:cNvSpPr/>
           <p:nvPr/>
         </p:nvSpPr>
@@ -23668,7 +25180,7 @@
       </p:sp>
       <p:sp>
         <p:nvSpPr>
-          <p:cNvPr id="20" name="Text 18"/>
+          <p:cNvPr id="21" name="Text 19"/>
           <p:cNvSpPr/>
           <p:nvPr/>
         </p:nvSpPr>
@@ -23707,7 +25219,7 @@
       </p:sp>
       <p:sp>
         <p:nvSpPr>
-          <p:cNvPr id="21" name="Text 19"/>
+          <p:cNvPr id="22" name="Text 20"/>
           <p:cNvSpPr/>
           <p:nvPr/>
         </p:nvSpPr>
@@ -23746,7 +25258,7 @@
       </p:sp>
       <p:sp>
         <p:nvSpPr>
-          <p:cNvPr id="22" name="Shape 20"/>
+          <p:cNvPr id="23" name="Shape 21"/>
           <p:cNvSpPr/>
           <p:nvPr/>
         </p:nvSpPr>
@@ -23773,7 +25285,7 @@
       </p:sp>
       <p:sp>
         <p:nvSpPr>
-          <p:cNvPr id="23" name="Text 21"/>
+          <p:cNvPr id="24" name="Text 22"/>
           <p:cNvSpPr/>
           <p:nvPr/>
         </p:nvSpPr>
@@ -23812,7 +25324,7 @@
       </p:sp>
       <p:sp>
         <p:nvSpPr>
-          <p:cNvPr id="24" name="Shape 22"/>
+          <p:cNvPr id="25" name="Shape 23"/>
           <p:cNvSpPr/>
           <p:nvPr/>
         </p:nvSpPr>
@@ -23839,7 +25351,7 @@
       </p:sp>
       <p:sp>
         <p:nvSpPr>
-          <p:cNvPr id="25" name="Text 23"/>
+          <p:cNvPr id="26" name="Text 24"/>
           <p:cNvSpPr/>
           <p:nvPr/>
         </p:nvSpPr>
@@ -23878,7 +25390,7 @@
       </p:sp>
       <p:sp>
         <p:nvSpPr>
-          <p:cNvPr id="26" name="Shape 24"/>
+          <p:cNvPr id="27" name="Shape 25"/>
           <p:cNvSpPr/>
           <p:nvPr/>
         </p:nvSpPr>
@@ -23905,7 +25417,7 @@
       </p:sp>
       <p:sp>
         <p:nvSpPr>
-          <p:cNvPr id="27" name="Text 25"/>
+          <p:cNvPr id="28" name="Text 26"/>
           <p:cNvSpPr/>
           <p:nvPr/>
         </p:nvSpPr>
@@ -23944,7 +25456,7 @@
       </p:sp>
       <p:sp>
         <p:nvSpPr>
-          <p:cNvPr id="28" name="Shape 26"/>
+          <p:cNvPr id="29" name="Shape 27"/>
           <p:cNvSpPr/>
           <p:nvPr/>
         </p:nvSpPr>
@@ -23971,7 +25483,7 @@
       </p:sp>
       <p:sp>
         <p:nvSpPr>
-          <p:cNvPr id="29" name="Text 27"/>
+          <p:cNvPr id="30" name="Text 28"/>
           <p:cNvSpPr/>
           <p:nvPr/>
         </p:nvSpPr>
@@ -24294,7 +25806,7 @@
                 <a:ea typeface="Calibri" pitchFamily="34" charset="-122"/>
                 <a:cs typeface="Calibri" pitchFamily="34" charset="-120"/>
               </a:rPr>
-              <a:t>Word Labs  •  wordlabs.app  •  Root: 'locate' = to find or place something</a:t>
+              <a:t>Word Labs  •  wordlabs.app  •  Root: 'locate' = to find or place</a:t>
             </a:r>
             <a:endParaRPr lang="en-US" sz="800" dirty="0"/>
           </a:p>
@@ -24367,7 +25879,7 @@
                 <a:ea typeface="Trebuchet MS" pitchFamily="34" charset="-122"/>
                 <a:cs typeface="Trebuchet MS" pitchFamily="34" charset="-120"/>
               </a:rPr>
-              <a:t>We are learning that the root 'locate' means 'to find or place something'.</a:t>
+              <a:t>We are learning that the root 'locate' means 'to find or place'.</a:t>
             </a:r>
             <a:endParaRPr lang="en-US" sz="2000" dirty="0"/>
           </a:p>
@@ -25013,7 +26525,7 @@
                 <a:ea typeface="Calibri" pitchFamily="34" charset="-122"/>
                 <a:cs typeface="Calibri" pitchFamily="34" charset="-120"/>
               </a:rPr>
-              <a:t>Word Labs  •  wordlabs.app  •  Root: 'locate' = to find or place something</a:t>
+              <a:t>Word Labs  •  wordlabs.app  •  Root: 'locate' = to find or place</a:t>
             </a:r>
             <a:endParaRPr lang="en-US" sz="800" dirty="0"/>
           </a:p>
@@ -25152,7 +26664,7 @@
                 <a:ea typeface="Trebuchet MS" pitchFamily="34" charset="-122"/>
                 <a:cs typeface="Trebuchet MS" pitchFamily="34" charset="-120"/>
               </a:rPr>
-              <a:t>dislocate</a:t>
+              <a:t>allocate</a:t>
             </a:r>
             <a:endParaRPr lang="en-US" sz="2800" dirty="0"/>
           </a:p>
@@ -25291,7 +26803,7 @@
                 <a:ea typeface="Trebuchet MS" pitchFamily="34" charset="-122"/>
                 <a:cs typeface="Trebuchet MS" pitchFamily="34" charset="-120"/>
               </a:rPr>
-              <a:t>dis</a:t>
+              <a:t>al</a:t>
             </a:r>
             <a:endParaRPr lang="en-US" sz="1300" dirty="0"/>
           </a:p>
@@ -25330,7 +26842,7 @@
                 <a:ea typeface="Calibri" pitchFamily="34" charset="-122"/>
                 <a:cs typeface="Calibri" pitchFamily="34" charset="-120"/>
               </a:rPr>
-              <a:t>apart or away</a:t>
+              <a:t>to or towards</a:t>
             </a:r>
             <a:endParaRPr lang="en-US" sz="850" dirty="0"/>
           </a:p>
@@ -25338,7 +26850,46 @@
       </p:sp>
       <p:sp>
         <p:nvSpPr>
-          <p:cNvPr id="19" name="Shape 17"/>
+          <p:cNvPr id="19" name="Text 17"/>
+          <p:cNvSpPr/>
+          <p:nvPr/>
+        </p:nvSpPr>
+        <p:spPr>
+          <a:xfrm>
+            <a:off x="2938272" y="2752344"/>
+            <a:ext cx="1828800" cy="182880"/>
+          </a:xfrm>
+          <a:prstGeom prst="rect">
+            <a:avLst/>
+          </a:prstGeom>
+          <a:noFill/>
+          <a:ln/>
+        </p:spPr>
+        <p:txBody>
+          <a:bodyPr wrap="square" lIns="0" tIns="0" rIns="0" bIns="0" rtlCol="0" anchor="t"/>
+          <a:lstStyle/>
+          <a:p>
+            <a:pPr algn="ctr" indent="0" marL="0">
+              <a:buNone/>
+            </a:pPr>
+            <a:r>
+              <a:rPr lang="en-US" sz="700" i="1" dirty="0">
+                <a:solidFill>
+                  <a:srgbClr val="94A3B8"/>
+                </a:solidFill>
+                <a:latin typeface="Calibri" pitchFamily="34" charset="0"/>
+                <a:ea typeface="Calibri" pitchFamily="34" charset="-122"/>
+                <a:cs typeface="Calibri" pitchFamily="34" charset="-120"/>
+              </a:rPr>
+              <a:t>ad → al before 'l'</a:t>
+            </a:r>
+            <a:endParaRPr lang="en-US" sz="700" dirty="0"/>
+          </a:p>
+        </p:txBody>
+      </p:sp>
+      <p:sp>
+        <p:nvSpPr>
+          <p:cNvPr id="20" name="Shape 18"/>
           <p:cNvSpPr/>
           <p:nvPr/>
         </p:nvSpPr>
@@ -25372,7 +26923,7 @@
       </p:sp>
       <p:sp>
         <p:nvSpPr>
-          <p:cNvPr id="20" name="Text 18"/>
+          <p:cNvPr id="21" name="Text 19"/>
           <p:cNvSpPr/>
           <p:nvPr/>
         </p:nvSpPr>
@@ -25411,7 +26962,7 @@
       </p:sp>
       <p:sp>
         <p:nvSpPr>
-          <p:cNvPr id="21" name="Text 19"/>
+          <p:cNvPr id="22" name="Text 20"/>
           <p:cNvSpPr/>
           <p:nvPr/>
         </p:nvSpPr>
@@ -25450,7 +27001,7 @@
       </p:sp>
       <p:sp>
         <p:nvSpPr>
-          <p:cNvPr id="22" name="Shape 20"/>
+          <p:cNvPr id="23" name="Shape 21"/>
           <p:cNvSpPr/>
           <p:nvPr/>
         </p:nvSpPr>
@@ -25477,7 +27028,7 @@
       </p:sp>
       <p:sp>
         <p:nvSpPr>
-          <p:cNvPr id="23" name="Text 21"/>
+          <p:cNvPr id="24" name="Text 22"/>
           <p:cNvSpPr/>
           <p:nvPr/>
         </p:nvSpPr>
@@ -25516,7 +27067,7 @@
       </p:sp>
       <p:sp>
         <p:nvSpPr>
-          <p:cNvPr id="24" name="Shape 22"/>
+          <p:cNvPr id="25" name="Shape 23"/>
           <p:cNvSpPr/>
           <p:nvPr/>
         </p:nvSpPr>
@@ -25543,7 +27094,7 @@
       </p:sp>
       <p:sp>
         <p:nvSpPr>
-          <p:cNvPr id="25" name="Shape 23"/>
+          <p:cNvPr id="26" name="Shape 24"/>
           <p:cNvSpPr/>
           <p:nvPr/>
         </p:nvSpPr>
@@ -25570,7 +27121,7 @@
       </p:sp>
       <p:sp>
         <p:nvSpPr>
-          <p:cNvPr id="26" name="Text 24"/>
+          <p:cNvPr id="27" name="Text 25"/>
           <p:cNvSpPr/>
           <p:nvPr/>
         </p:nvSpPr>
@@ -25601,7 +27152,7 @@
                 <a:ea typeface="Trebuchet MS" pitchFamily="34" charset="-122"/>
                 <a:cs typeface="Trebuchet MS" pitchFamily="34" charset="-120"/>
               </a:rPr>
-              <a:t>dis</a:t>
+              <a:t>al</a:t>
             </a:r>
             <a:endParaRPr lang="en-US" sz="1400" dirty="0"/>
           </a:p>
@@ -25609,7 +27160,7 @@
       </p:sp>
       <p:sp>
         <p:nvSpPr>
-          <p:cNvPr id="27" name="Text 25"/>
+          <p:cNvPr id="28" name="Text 26"/>
           <p:cNvSpPr/>
           <p:nvPr/>
         </p:nvSpPr>
@@ -25648,7 +27199,7 @@
       </p:sp>
       <p:sp>
         <p:nvSpPr>
-          <p:cNvPr id="28" name="Shape 26"/>
+          <p:cNvPr id="29" name="Shape 27"/>
           <p:cNvSpPr/>
           <p:nvPr/>
         </p:nvSpPr>
@@ -25675,7 +27226,7 @@
       </p:sp>
       <p:sp>
         <p:nvSpPr>
-          <p:cNvPr id="29" name="Text 27"/>
+          <p:cNvPr id="30" name="Text 28"/>
           <p:cNvSpPr/>
           <p:nvPr/>
         </p:nvSpPr>
@@ -25714,7 +27265,7 @@
       </p:sp>
       <p:sp>
         <p:nvSpPr>
-          <p:cNvPr id="30" name="Text 28"/>
+          <p:cNvPr id="31" name="Text 29"/>
           <p:cNvSpPr/>
           <p:nvPr/>
         </p:nvSpPr>
@@ -25753,7 +27304,7 @@
       </p:sp>
       <p:sp>
         <p:nvSpPr>
-          <p:cNvPr id="31" name="Shape 29"/>
+          <p:cNvPr id="32" name="Shape 30"/>
           <p:cNvSpPr/>
           <p:nvPr/>
         </p:nvSpPr>
@@ -25780,7 +27331,7 @@
       </p:sp>
       <p:sp>
         <p:nvSpPr>
-          <p:cNvPr id="32" name="Text 30"/>
+          <p:cNvPr id="33" name="Text 31"/>
           <p:cNvSpPr/>
           <p:nvPr/>
         </p:nvSpPr>
@@ -25819,7 +27370,7 @@
       </p:sp>
       <p:sp>
         <p:nvSpPr>
-          <p:cNvPr id="33" name="Shape 31"/>
+          <p:cNvPr id="34" name="Shape 32"/>
           <p:cNvSpPr/>
           <p:nvPr/>
         </p:nvSpPr>
@@ -25846,7 +27397,7 @@
       </p:sp>
       <p:sp>
         <p:nvSpPr>
-          <p:cNvPr id="34" name="Text 32"/>
+          <p:cNvPr id="35" name="Text 33"/>
           <p:cNvSpPr/>
           <p:nvPr/>
         </p:nvSpPr>
@@ -25885,7 +27436,7 @@
       </p:sp>
       <p:sp>
         <p:nvSpPr>
-          <p:cNvPr id="35" name="Shape 33"/>
+          <p:cNvPr id="36" name="Shape 34"/>
           <p:cNvSpPr/>
           <p:nvPr/>
         </p:nvSpPr>
@@ -25912,7 +27463,7 @@
       </p:sp>
       <p:sp>
         <p:nvSpPr>
-          <p:cNvPr id="36" name="Text 34"/>
+          <p:cNvPr id="37" name="Text 35"/>
           <p:cNvSpPr/>
           <p:nvPr/>
         </p:nvSpPr>
@@ -26235,7 +27786,7 @@
                 <a:ea typeface="Calibri" pitchFamily="34" charset="-122"/>
                 <a:cs typeface="Calibri" pitchFamily="34" charset="-120"/>
               </a:rPr>
-              <a:t>Word Labs  •  wordlabs.app  •  Root: 'locate' = to find or place something</a:t>
+              <a:t>Word Labs  •  wordlabs.app  •  Root: 'locate' = to find or place</a:t>
             </a:r>
             <a:endParaRPr lang="en-US" sz="800" dirty="0"/>
           </a:p>
@@ -26374,7 +27925,7 @@
                 <a:ea typeface="Trebuchet MS" pitchFamily="34" charset="-122"/>
                 <a:cs typeface="Trebuchet MS" pitchFamily="34" charset="-120"/>
               </a:rPr>
-              <a:t>dislocate</a:t>
+              <a:t>allocate</a:t>
             </a:r>
             <a:endParaRPr lang="en-US" sz="2800" dirty="0"/>
           </a:p>
@@ -26513,7 +28064,7 @@
                 <a:ea typeface="Trebuchet MS" pitchFamily="34" charset="-122"/>
                 <a:cs typeface="Trebuchet MS" pitchFamily="34" charset="-120"/>
               </a:rPr>
-              <a:t>dis</a:t>
+              <a:t>al</a:t>
             </a:r>
             <a:endParaRPr lang="en-US" sz="1300" dirty="0"/>
           </a:p>
@@ -26552,7 +28103,7 @@
                 <a:ea typeface="Calibri" pitchFamily="34" charset="-122"/>
                 <a:cs typeface="Calibri" pitchFamily="34" charset="-120"/>
               </a:rPr>
-              <a:t>apart or away</a:t>
+              <a:t>to or towards</a:t>
             </a:r>
             <a:endParaRPr lang="en-US" sz="850" dirty="0"/>
           </a:p>
@@ -26560,7 +28111,46 @@
       </p:sp>
       <p:sp>
         <p:nvSpPr>
-          <p:cNvPr id="19" name="Shape 17"/>
+          <p:cNvPr id="19" name="Text 17"/>
+          <p:cNvSpPr/>
+          <p:nvPr/>
+        </p:nvSpPr>
+        <p:spPr>
+          <a:xfrm>
+            <a:off x="2938272" y="2752344"/>
+            <a:ext cx="1828800" cy="182880"/>
+          </a:xfrm>
+          <a:prstGeom prst="rect">
+            <a:avLst/>
+          </a:prstGeom>
+          <a:noFill/>
+          <a:ln/>
+        </p:spPr>
+        <p:txBody>
+          <a:bodyPr wrap="square" lIns="0" tIns="0" rIns="0" bIns="0" rtlCol="0" anchor="t"/>
+          <a:lstStyle/>
+          <a:p>
+            <a:pPr algn="ctr" indent="0" marL="0">
+              <a:buNone/>
+            </a:pPr>
+            <a:r>
+              <a:rPr lang="en-US" sz="700" i="1" dirty="0">
+                <a:solidFill>
+                  <a:srgbClr val="94A3B8"/>
+                </a:solidFill>
+                <a:latin typeface="Calibri" pitchFamily="34" charset="0"/>
+                <a:ea typeface="Calibri" pitchFamily="34" charset="-122"/>
+                <a:cs typeface="Calibri" pitchFamily="34" charset="-120"/>
+              </a:rPr>
+              <a:t>ad → al before 'l'</a:t>
+            </a:r>
+            <a:endParaRPr lang="en-US" sz="700" dirty="0"/>
+          </a:p>
+        </p:txBody>
+      </p:sp>
+      <p:sp>
+        <p:nvSpPr>
+          <p:cNvPr id="20" name="Shape 18"/>
           <p:cNvSpPr/>
           <p:nvPr/>
         </p:nvSpPr>
@@ -26594,7 +28184,7 @@
       </p:sp>
       <p:sp>
         <p:nvSpPr>
-          <p:cNvPr id="20" name="Text 18"/>
+          <p:cNvPr id="21" name="Text 19"/>
           <p:cNvSpPr/>
           <p:nvPr/>
         </p:nvSpPr>
@@ -26633,7 +28223,7 @@
       </p:sp>
       <p:sp>
         <p:nvSpPr>
-          <p:cNvPr id="21" name="Text 19"/>
+          <p:cNvPr id="22" name="Text 20"/>
           <p:cNvSpPr/>
           <p:nvPr/>
         </p:nvSpPr>
@@ -26672,7 +28262,7 @@
       </p:sp>
       <p:sp>
         <p:nvSpPr>
-          <p:cNvPr id="22" name="Shape 20"/>
+          <p:cNvPr id="23" name="Shape 21"/>
           <p:cNvSpPr/>
           <p:nvPr/>
         </p:nvSpPr>
@@ -26699,7 +28289,7 @@
       </p:sp>
       <p:sp>
         <p:nvSpPr>
-          <p:cNvPr id="23" name="Text 21"/>
+          <p:cNvPr id="24" name="Text 22"/>
           <p:cNvSpPr/>
           <p:nvPr/>
         </p:nvSpPr>
@@ -26738,7 +28328,7 @@
       </p:sp>
       <p:sp>
         <p:nvSpPr>
-          <p:cNvPr id="24" name="Shape 22"/>
+          <p:cNvPr id="25" name="Shape 23"/>
           <p:cNvSpPr/>
           <p:nvPr/>
         </p:nvSpPr>
@@ -26765,7 +28355,7 @@
       </p:sp>
       <p:sp>
         <p:nvSpPr>
-          <p:cNvPr id="25" name="Shape 23"/>
+          <p:cNvPr id="26" name="Shape 24"/>
           <p:cNvSpPr/>
           <p:nvPr/>
         </p:nvSpPr>
@@ -26792,7 +28382,7 @@
       </p:sp>
       <p:sp>
         <p:nvSpPr>
-          <p:cNvPr id="26" name="Text 24"/>
+          <p:cNvPr id="27" name="Text 25"/>
           <p:cNvSpPr/>
           <p:nvPr/>
         </p:nvSpPr>
@@ -26823,7 +28413,7 @@
                 <a:ea typeface="Trebuchet MS" pitchFamily="34" charset="-122"/>
                 <a:cs typeface="Trebuchet MS" pitchFamily="34" charset="-120"/>
               </a:rPr>
-              <a:t>dis</a:t>
+              <a:t>al</a:t>
             </a:r>
             <a:endParaRPr lang="en-US" sz="1400" dirty="0"/>
           </a:p>
@@ -26831,7 +28421,7 @@
       </p:sp>
       <p:sp>
         <p:nvSpPr>
-          <p:cNvPr id="27" name="Text 25"/>
+          <p:cNvPr id="28" name="Text 26"/>
           <p:cNvSpPr/>
           <p:nvPr/>
         </p:nvSpPr>
@@ -26870,7 +28460,7 @@
       </p:sp>
       <p:sp>
         <p:nvSpPr>
-          <p:cNvPr id="28" name="Shape 26"/>
+          <p:cNvPr id="29" name="Shape 27"/>
           <p:cNvSpPr/>
           <p:nvPr/>
         </p:nvSpPr>
@@ -26897,7 +28487,7 @@
       </p:sp>
       <p:sp>
         <p:nvSpPr>
-          <p:cNvPr id="29" name="Text 27"/>
+          <p:cNvPr id="30" name="Text 28"/>
           <p:cNvSpPr/>
           <p:nvPr/>
         </p:nvSpPr>
@@ -26936,7 +28526,7 @@
       </p:sp>
       <p:sp>
         <p:nvSpPr>
-          <p:cNvPr id="30" name="Text 28"/>
+          <p:cNvPr id="31" name="Text 29"/>
           <p:cNvSpPr/>
           <p:nvPr/>
         </p:nvSpPr>
@@ -26975,7 +28565,7 @@
       </p:sp>
       <p:sp>
         <p:nvSpPr>
-          <p:cNvPr id="31" name="Shape 29"/>
+          <p:cNvPr id="32" name="Shape 30"/>
           <p:cNvSpPr/>
           <p:nvPr/>
         </p:nvSpPr>
@@ -27002,7 +28592,7 @@
       </p:sp>
       <p:sp>
         <p:nvSpPr>
-          <p:cNvPr id="32" name="Text 30"/>
+          <p:cNvPr id="33" name="Text 31"/>
           <p:cNvSpPr/>
           <p:nvPr/>
         </p:nvSpPr>
@@ -27041,7 +28631,7 @@
       </p:sp>
       <p:sp>
         <p:nvSpPr>
-          <p:cNvPr id="33" name="Shape 31"/>
+          <p:cNvPr id="34" name="Shape 32"/>
           <p:cNvSpPr/>
           <p:nvPr/>
         </p:nvSpPr>
@@ -27068,7 +28658,7 @@
       </p:sp>
       <p:sp>
         <p:nvSpPr>
-          <p:cNvPr id="34" name="Text 32"/>
+          <p:cNvPr id="35" name="Text 33"/>
           <p:cNvSpPr/>
           <p:nvPr/>
         </p:nvSpPr>
@@ -27107,7 +28697,7 @@
       </p:sp>
       <p:sp>
         <p:nvSpPr>
-          <p:cNvPr id="35" name="Shape 33"/>
+          <p:cNvPr id="36" name="Shape 34"/>
           <p:cNvSpPr/>
           <p:nvPr/>
         </p:nvSpPr>
@@ -27134,13 +28724,13 @@
       </p:sp>
       <p:sp>
         <p:nvSpPr>
-          <p:cNvPr id="36" name="Shape 34"/>
-          <p:cNvSpPr/>
-          <p:nvPr/>
-        </p:nvSpPr>
-        <p:spPr>
-          <a:xfrm>
-            <a:off x="2023872" y="4169664"/>
+          <p:cNvPr id="37" name="Shape 35"/>
+          <p:cNvSpPr/>
+          <p:nvPr/>
+        </p:nvSpPr>
+        <p:spPr>
+          <a:xfrm>
+            <a:off x="2254649" y="4169664"/>
             <a:ext cx="685800" cy="384048"/>
           </a:xfrm>
           <a:prstGeom prst="rect">
@@ -27161,13 +28751,13 @@
       </p:sp>
       <p:sp>
         <p:nvSpPr>
-          <p:cNvPr id="37" name="Text 35"/>
-          <p:cNvSpPr/>
-          <p:nvPr/>
-        </p:nvSpPr>
-        <p:spPr>
-          <a:xfrm>
-            <a:off x="2023872" y="4169664"/>
+          <p:cNvPr id="38" name="Text 36"/>
+          <p:cNvSpPr/>
+          <p:nvPr/>
+        </p:nvSpPr>
+        <p:spPr>
+          <a:xfrm>
+            <a:off x="2254649" y="4169664"/>
             <a:ext cx="685800" cy="384048"/>
           </a:xfrm>
           <a:prstGeom prst="rect">
@@ -27192,7 +28782,7 @@
                 <a:ea typeface="Trebuchet MS" pitchFamily="34" charset="-122"/>
                 <a:cs typeface="Trebuchet MS" pitchFamily="34" charset="-120"/>
               </a:rPr>
-              <a:t>d</a:t>
+              <a:t>a</a:t>
             </a:r>
             <a:endParaRPr lang="en-US" sz="900" dirty="0"/>
           </a:p>
@@ -27200,13 +28790,13 @@
       </p:sp>
       <p:sp>
         <p:nvSpPr>
-          <p:cNvPr id="38" name="Shape 36"/>
-          <p:cNvSpPr/>
-          <p:nvPr/>
-        </p:nvSpPr>
-        <p:spPr>
-          <a:xfrm>
-            <a:off x="2831592" y="4169664"/>
+          <p:cNvPr id="39" name="Shape 37"/>
+          <p:cNvSpPr/>
+          <p:nvPr/>
+        </p:nvSpPr>
+        <p:spPr>
+          <a:xfrm>
+            <a:off x="3293146" y="4169664"/>
             <a:ext cx="685800" cy="384048"/>
           </a:xfrm>
           <a:prstGeom prst="rect">
@@ -27227,13 +28817,13 @@
       </p:sp>
       <p:sp>
         <p:nvSpPr>
-          <p:cNvPr id="39" name="Text 37"/>
-          <p:cNvSpPr/>
-          <p:nvPr/>
-        </p:nvSpPr>
-        <p:spPr>
-          <a:xfrm>
-            <a:off x="2831592" y="4169664"/>
+          <p:cNvPr id="40" name="Text 38"/>
+          <p:cNvSpPr/>
+          <p:nvPr/>
+        </p:nvSpPr>
+        <p:spPr>
+          <a:xfrm>
+            <a:off x="3293146" y="4169664"/>
             <a:ext cx="685800" cy="384048"/>
           </a:xfrm>
           <a:prstGeom prst="rect">
@@ -27258,7 +28848,7 @@
                 <a:ea typeface="Trebuchet MS" pitchFamily="34" charset="-122"/>
                 <a:cs typeface="Trebuchet MS" pitchFamily="34" charset="-120"/>
               </a:rPr>
-              <a:t>i</a:t>
+              <a:t>ll</a:t>
             </a:r>
             <a:endParaRPr lang="en-US" sz="900" dirty="0"/>
           </a:p>
@@ -27266,13 +28856,13 @@
       </p:sp>
       <p:sp>
         <p:nvSpPr>
-          <p:cNvPr id="40" name="Shape 38"/>
-          <p:cNvSpPr/>
-          <p:nvPr/>
-        </p:nvSpPr>
-        <p:spPr>
-          <a:xfrm>
-            <a:off x="3639312" y="4169664"/>
+          <p:cNvPr id="41" name="Shape 39"/>
+          <p:cNvSpPr/>
+          <p:nvPr/>
+        </p:nvSpPr>
+        <p:spPr>
+          <a:xfrm>
+            <a:off x="4331643" y="4169664"/>
             <a:ext cx="685800" cy="384048"/>
           </a:xfrm>
           <a:prstGeom prst="rect">
@@ -27293,13 +28883,13 @@
       </p:sp>
       <p:sp>
         <p:nvSpPr>
-          <p:cNvPr id="41" name="Text 39"/>
-          <p:cNvSpPr/>
-          <p:nvPr/>
-        </p:nvSpPr>
-        <p:spPr>
-          <a:xfrm>
-            <a:off x="3639312" y="4169664"/>
+          <p:cNvPr id="42" name="Text 40"/>
+          <p:cNvSpPr/>
+          <p:nvPr/>
+        </p:nvSpPr>
+        <p:spPr>
+          <a:xfrm>
+            <a:off x="4331643" y="4169664"/>
             <a:ext cx="685800" cy="384048"/>
           </a:xfrm>
           <a:prstGeom prst="rect">
@@ -27324,7 +28914,7 @@
                 <a:ea typeface="Trebuchet MS" pitchFamily="34" charset="-122"/>
                 <a:cs typeface="Trebuchet MS" pitchFamily="34" charset="-120"/>
               </a:rPr>
-              <a:t>s</a:t>
+              <a:t>o</a:t>
             </a:r>
             <a:endParaRPr lang="en-US" sz="900" dirty="0"/>
           </a:p>
@@ -27332,13 +28922,13 @@
       </p:sp>
       <p:sp>
         <p:nvSpPr>
-          <p:cNvPr id="42" name="Shape 40"/>
-          <p:cNvSpPr/>
-          <p:nvPr/>
-        </p:nvSpPr>
-        <p:spPr>
-          <a:xfrm>
-            <a:off x="4447032" y="4169664"/>
+          <p:cNvPr id="43" name="Shape 41"/>
+          <p:cNvSpPr/>
+          <p:nvPr/>
+        </p:nvSpPr>
+        <p:spPr>
+          <a:xfrm>
+            <a:off x="5370141" y="4169664"/>
             <a:ext cx="685800" cy="384048"/>
           </a:xfrm>
           <a:prstGeom prst="rect">
@@ -27359,13 +28949,13 @@
       </p:sp>
       <p:sp>
         <p:nvSpPr>
-          <p:cNvPr id="43" name="Text 41"/>
-          <p:cNvSpPr/>
-          <p:nvPr/>
-        </p:nvSpPr>
-        <p:spPr>
-          <a:xfrm>
-            <a:off x="4447032" y="4169664"/>
+          <p:cNvPr id="44" name="Text 42"/>
+          <p:cNvSpPr/>
+          <p:nvPr/>
+        </p:nvSpPr>
+        <p:spPr>
+          <a:xfrm>
+            <a:off x="5370141" y="4169664"/>
             <a:ext cx="685800" cy="384048"/>
           </a:xfrm>
           <a:prstGeom prst="rect">
@@ -27390,7 +28980,7 @@
                 <a:ea typeface="Trebuchet MS" pitchFamily="34" charset="-122"/>
                 <a:cs typeface="Trebuchet MS" pitchFamily="34" charset="-120"/>
               </a:rPr>
-              <a:t>l</a:t>
+              <a:t>c</a:t>
             </a:r>
             <a:endParaRPr lang="en-US" sz="900" dirty="0"/>
           </a:p>
@@ -27398,13 +28988,52 @@
       </p:sp>
       <p:sp>
         <p:nvSpPr>
-          <p:cNvPr id="44" name="Shape 42"/>
-          <p:cNvSpPr/>
-          <p:nvPr/>
-        </p:nvSpPr>
-        <p:spPr>
-          <a:xfrm>
-            <a:off x="5254752" y="4169664"/>
+          <p:cNvPr id="45" name="Text 43"/>
+          <p:cNvSpPr/>
+          <p:nvPr/>
+        </p:nvSpPr>
+        <p:spPr>
+          <a:xfrm>
+            <a:off x="5370141" y="4572000"/>
+            <a:ext cx="685800" cy="219456"/>
+          </a:xfrm>
+          <a:prstGeom prst="rect">
+            <a:avLst/>
+          </a:prstGeom>
+          <a:noFill/>
+          <a:ln/>
+        </p:spPr>
+        <p:txBody>
+          <a:bodyPr wrap="square" lIns="0" tIns="0" rIns="0" bIns="0" rtlCol="0" anchor="t"/>
+          <a:lstStyle/>
+          <a:p>
+            <a:pPr algn="ctr" indent="0" marL="0">
+              <a:buNone/>
+            </a:pPr>
+            <a:r>
+              <a:rPr lang="en-US" sz="750" i="1" dirty="0">
+                <a:solidFill>
+                  <a:srgbClr val="94A3B8"/>
+                </a:solidFill>
+                <a:latin typeface="Calibri" pitchFamily="34" charset="0"/>
+                <a:ea typeface="Calibri" pitchFamily="34" charset="-122"/>
+                <a:cs typeface="Calibri" pitchFamily="34" charset="-120"/>
+              </a:rPr>
+              <a:t>/k/</a:t>
+            </a:r>
+            <a:endParaRPr lang="en-US" sz="750" dirty="0"/>
+          </a:p>
+        </p:txBody>
+      </p:sp>
+      <p:sp>
+        <p:nvSpPr>
+          <p:cNvPr id="46" name="Shape 44"/>
+          <p:cNvSpPr/>
+          <p:nvPr/>
+        </p:nvSpPr>
+        <p:spPr>
+          <a:xfrm>
+            <a:off x="6408638" y="4169664"/>
             <a:ext cx="685800" cy="384048"/>
           </a:xfrm>
           <a:prstGeom prst="rect">
@@ -27425,13 +29054,13 @@
       </p:sp>
       <p:sp>
         <p:nvSpPr>
-          <p:cNvPr id="45" name="Text 43"/>
-          <p:cNvSpPr/>
-          <p:nvPr/>
-        </p:nvSpPr>
-        <p:spPr>
-          <a:xfrm>
-            <a:off x="5254752" y="4169664"/>
+          <p:cNvPr id="47" name="Text 45"/>
+          <p:cNvSpPr/>
+          <p:nvPr/>
+        </p:nvSpPr>
+        <p:spPr>
+          <a:xfrm>
+            <a:off x="6408638" y="4169664"/>
             <a:ext cx="685800" cy="384048"/>
           </a:xfrm>
           <a:prstGeom prst="rect">
@@ -27456,7 +29085,7 @@
                 <a:ea typeface="Trebuchet MS" pitchFamily="34" charset="-122"/>
                 <a:cs typeface="Trebuchet MS" pitchFamily="34" charset="-120"/>
               </a:rPr>
-              <a:t>o</a:t>
+              <a:t>a</a:t>
             </a:r>
             <a:endParaRPr lang="en-US" sz="900" dirty="0"/>
           </a:p>
@@ -27464,13 +29093,13 @@
       </p:sp>
       <p:sp>
         <p:nvSpPr>
-          <p:cNvPr id="46" name="Shape 44"/>
-          <p:cNvSpPr/>
-          <p:nvPr/>
-        </p:nvSpPr>
-        <p:spPr>
-          <a:xfrm>
-            <a:off x="6062472" y="4169664"/>
+          <p:cNvPr id="48" name="Shape 46"/>
+          <p:cNvSpPr/>
+          <p:nvPr/>
+        </p:nvSpPr>
+        <p:spPr>
+          <a:xfrm>
+            <a:off x="7447135" y="4169664"/>
             <a:ext cx="685800" cy="384048"/>
           </a:xfrm>
           <a:prstGeom prst="rect">
@@ -27491,184 +29120,13 @@
       </p:sp>
       <p:sp>
         <p:nvSpPr>
-          <p:cNvPr id="47" name="Text 45"/>
-          <p:cNvSpPr/>
-          <p:nvPr/>
-        </p:nvSpPr>
-        <p:spPr>
-          <a:xfrm>
-            <a:off x="6062472" y="4169664"/>
-            <a:ext cx="685800" cy="384048"/>
-          </a:xfrm>
-          <a:prstGeom prst="rect">
-            <a:avLst/>
-          </a:prstGeom>
-          <a:noFill/>
-          <a:ln/>
-        </p:spPr>
-        <p:txBody>
-          <a:bodyPr wrap="square" lIns="0" tIns="0" rIns="0" bIns="0" rtlCol="0" anchor="ctr"/>
-          <a:lstStyle/>
-          <a:p>
-            <a:pPr algn="ctr" indent="0" marL="0">
-              <a:buNone/>
-            </a:pPr>
-            <a:r>
-              <a:rPr lang="en-US" sz="900" b="1" dirty="0">
-                <a:solidFill>
-                  <a:srgbClr val="9D174D"/>
-                </a:solidFill>
-                <a:latin typeface="Trebuchet MS" pitchFamily="34" charset="0"/>
-                <a:ea typeface="Trebuchet MS" pitchFamily="34" charset="-122"/>
-                <a:cs typeface="Trebuchet MS" pitchFamily="34" charset="-120"/>
-              </a:rPr>
-              <a:t>c</a:t>
-            </a:r>
-            <a:endParaRPr lang="en-US" sz="900" dirty="0"/>
-          </a:p>
-        </p:txBody>
-      </p:sp>
-      <p:sp>
-        <p:nvSpPr>
-          <p:cNvPr id="48" name="Text 46"/>
-          <p:cNvSpPr/>
-          <p:nvPr/>
-        </p:nvSpPr>
-        <p:spPr>
-          <a:xfrm>
-            <a:off x="6062472" y="4572000"/>
-            <a:ext cx="685800" cy="219456"/>
-          </a:xfrm>
-          <a:prstGeom prst="rect">
-            <a:avLst/>
-          </a:prstGeom>
-          <a:noFill/>
-          <a:ln/>
-        </p:spPr>
-        <p:txBody>
-          <a:bodyPr wrap="square" lIns="0" tIns="0" rIns="0" bIns="0" rtlCol="0" anchor="t"/>
-          <a:lstStyle/>
-          <a:p>
-            <a:pPr algn="ctr" indent="0" marL="0">
-              <a:buNone/>
-            </a:pPr>
-            <a:r>
-              <a:rPr lang="en-US" sz="750" i="1" dirty="0">
-                <a:solidFill>
-                  <a:srgbClr val="94A3B8"/>
-                </a:solidFill>
-                <a:latin typeface="Calibri" pitchFamily="34" charset="0"/>
-                <a:ea typeface="Calibri" pitchFamily="34" charset="-122"/>
-                <a:cs typeface="Calibri" pitchFamily="34" charset="-120"/>
-              </a:rPr>
-              <a:t>/k/</a:t>
-            </a:r>
-            <a:endParaRPr lang="en-US" sz="750" dirty="0"/>
-          </a:p>
-        </p:txBody>
-      </p:sp>
-      <p:sp>
-        <p:nvSpPr>
-          <p:cNvPr id="49" name="Shape 47"/>
-          <p:cNvSpPr/>
-          <p:nvPr/>
-        </p:nvSpPr>
-        <p:spPr>
-          <a:xfrm>
-            <a:off x="6870192" y="4169664"/>
-            <a:ext cx="685800" cy="384048"/>
-          </a:xfrm>
-          <a:prstGeom prst="rect">
-            <a:avLst>
-              <a:gd name="adj" fmla="val 9524"/>
-            </a:avLst>
-          </a:prstGeom>
-          <a:solidFill>
-            <a:srgbClr val="FFFFFF"/>
-          </a:solidFill>
-          <a:ln w="12700">
-            <a:solidFill>
-              <a:srgbClr val="DB2777"/>
-            </a:solidFill>
-            <a:prstDash val="solid"/>
-          </a:ln>
-        </p:spPr>
-      </p:sp>
-      <p:sp>
-        <p:nvSpPr>
-          <p:cNvPr id="50" name="Text 48"/>
-          <p:cNvSpPr/>
-          <p:nvPr/>
-        </p:nvSpPr>
-        <p:spPr>
-          <a:xfrm>
-            <a:off x="6870192" y="4169664"/>
-            <a:ext cx="685800" cy="384048"/>
-          </a:xfrm>
-          <a:prstGeom prst="rect">
-            <a:avLst/>
-          </a:prstGeom>
-          <a:noFill/>
-          <a:ln/>
-        </p:spPr>
-        <p:txBody>
-          <a:bodyPr wrap="square" lIns="0" tIns="0" rIns="0" bIns="0" rtlCol="0" anchor="ctr"/>
-          <a:lstStyle/>
-          <a:p>
-            <a:pPr algn="ctr" indent="0" marL="0">
-              <a:buNone/>
-            </a:pPr>
-            <a:r>
-              <a:rPr lang="en-US" sz="900" b="1" dirty="0">
-                <a:solidFill>
-                  <a:srgbClr val="9D174D"/>
-                </a:solidFill>
-                <a:latin typeface="Trebuchet MS" pitchFamily="34" charset="0"/>
-                <a:ea typeface="Trebuchet MS" pitchFamily="34" charset="-122"/>
-                <a:cs typeface="Trebuchet MS" pitchFamily="34" charset="-120"/>
-              </a:rPr>
-              <a:t>a</a:t>
-            </a:r>
-            <a:endParaRPr lang="en-US" sz="900" dirty="0"/>
-          </a:p>
-        </p:txBody>
-      </p:sp>
-      <p:sp>
-        <p:nvSpPr>
-          <p:cNvPr id="51" name="Shape 49"/>
-          <p:cNvSpPr/>
-          <p:nvPr/>
-        </p:nvSpPr>
-        <p:spPr>
-          <a:xfrm>
-            <a:off x="7677912" y="4169664"/>
-            <a:ext cx="685800" cy="384048"/>
-          </a:xfrm>
-          <a:prstGeom prst="rect">
-            <a:avLst>
-              <a:gd name="adj" fmla="val 9524"/>
-            </a:avLst>
-          </a:prstGeom>
-          <a:solidFill>
-            <a:srgbClr val="FFFFFF"/>
-          </a:solidFill>
-          <a:ln w="12700">
-            <a:solidFill>
-              <a:srgbClr val="DB2777"/>
-            </a:solidFill>
-            <a:prstDash val="solid"/>
-          </a:ln>
-        </p:spPr>
-      </p:sp>
-      <p:sp>
-        <p:nvSpPr>
-          <p:cNvPr id="52" name="Text 50"/>
-          <p:cNvSpPr/>
-          <p:nvPr/>
-        </p:nvSpPr>
-        <p:spPr>
-          <a:xfrm>
-            <a:off x="7677912" y="4169664"/>
+          <p:cNvPr id="49" name="Text 47"/>
+          <p:cNvSpPr/>
+          <p:nvPr/>
+        </p:nvSpPr>
+        <p:spPr>
+          <a:xfrm>
+            <a:off x="7447135" y="4169664"/>
             <a:ext cx="685800" cy="384048"/>
           </a:xfrm>
           <a:prstGeom prst="rect">
@@ -27985,7 +29443,7 @@
                 <a:ea typeface="Calibri" pitchFamily="34" charset="-122"/>
                 <a:cs typeface="Calibri" pitchFamily="34" charset="-120"/>
               </a:rPr>
-              <a:t>Word Labs  •  wordlabs.app  •  Root: 'locate' = to find or place something</a:t>
+              <a:t>Word Labs  •  wordlabs.app  •  Root: 'locate' = to find or place</a:t>
             </a:r>
             <a:endParaRPr lang="en-US" sz="800" dirty="0"/>
           </a:p>
@@ -28124,7 +29582,7 @@
                 <a:ea typeface="Trebuchet MS" pitchFamily="34" charset="-122"/>
                 <a:cs typeface="Trebuchet MS" pitchFamily="34" charset="-120"/>
               </a:rPr>
-              <a:t>location</a:t>
+              <a:t>allocated</a:t>
             </a:r>
             <a:endParaRPr lang="en-US" sz="2800" dirty="0"/>
           </a:p>
@@ -28812,7 +30270,7 @@
                 <a:ea typeface="Calibri" pitchFamily="34" charset="-122"/>
                 <a:cs typeface="Calibri" pitchFamily="34" charset="-120"/>
               </a:rPr>
-              <a:t>Word Labs  •  wordlabs.app  •  Root: 'locate' = to find or place something</a:t>
+              <a:t>Word Labs  •  wordlabs.app  •  Root: 'locate' = to find or place</a:t>
             </a:r>
             <a:endParaRPr lang="en-US" sz="800" dirty="0"/>
           </a:p>
@@ -28951,7 +30409,7 @@
                 <a:ea typeface="Trebuchet MS" pitchFamily="34" charset="-122"/>
                 <a:cs typeface="Trebuchet MS" pitchFamily="34" charset="-120"/>
               </a:rPr>
-              <a:t>location</a:t>
+              <a:t>allocated</a:t>
             </a:r>
             <a:endParaRPr lang="en-US" sz="2800" dirty="0"/>
           </a:p>
@@ -29031,7 +30489,7 @@
         </p:nvSpPr>
         <p:spPr>
           <a:xfrm>
-            <a:off x="2938272" y="2258568"/>
+            <a:off x="2221992" y="2258568"/>
             <a:ext cx="1828800" cy="292608"/>
           </a:xfrm>
           <a:prstGeom prst="rect">
@@ -29040,11 +30498,11 @@
             </a:avLst>
           </a:prstGeom>
           <a:solidFill>
-            <a:srgbClr val="CCFBF1"/>
+            <a:srgbClr val="DDD6FE"/>
           </a:solidFill>
           <a:ln w="19050">
             <a:solidFill>
-              <a:srgbClr val="0D9488"/>
+              <a:srgbClr val="7C3AED"/>
             </a:solidFill>
             <a:prstDash val="solid"/>
           </a:ln>
@@ -29065,7 +30523,7 @@
         </p:nvSpPr>
         <p:spPr>
           <a:xfrm>
-            <a:off x="2938272" y="2258568"/>
+            <a:off x="2221992" y="2258568"/>
             <a:ext cx="1828800" cy="292608"/>
           </a:xfrm>
           <a:prstGeom prst="rect">
@@ -29084,13 +30542,13 @@
             <a:r>
               <a:rPr lang="en-US" sz="1300" b="1" dirty="0">
                 <a:solidFill>
-                  <a:srgbClr val="0F766E"/>
+                  <a:srgbClr val="4C1D95"/>
                 </a:solidFill>
                 <a:latin typeface="Trebuchet MS" pitchFamily="34" charset="0"/>
                 <a:ea typeface="Trebuchet MS" pitchFamily="34" charset="-122"/>
                 <a:cs typeface="Trebuchet MS" pitchFamily="34" charset="-120"/>
               </a:rPr>
-              <a:t>locate</a:t>
+              <a:t>al</a:t>
             </a:r>
             <a:endParaRPr lang="en-US" sz="1300" dirty="0"/>
           </a:p>
@@ -29104,7 +30562,7 @@
         </p:nvSpPr>
         <p:spPr>
           <a:xfrm>
-            <a:off x="2938272" y="2569464"/>
+            <a:off x="2221992" y="2569464"/>
             <a:ext cx="1828800" cy="201168"/>
           </a:xfrm>
           <a:prstGeom prst="rect">
@@ -29129,7 +30587,7 @@
                 <a:ea typeface="Calibri" pitchFamily="34" charset="-122"/>
                 <a:cs typeface="Calibri" pitchFamily="34" charset="-120"/>
               </a:rPr>
-              <a:t>to find or place</a:t>
+              <a:t>to or towards</a:t>
             </a:r>
             <a:endParaRPr lang="en-US" sz="850" dirty="0"/>
           </a:p>
@@ -29143,7 +30601,7 @@
         </p:nvSpPr>
         <p:spPr>
           <a:xfrm>
-            <a:off x="2938272" y="2752344"/>
+            <a:off x="2221992" y="2752344"/>
             <a:ext cx="1828800" cy="182880"/>
           </a:xfrm>
           <a:prstGeom prst="rect">
@@ -29168,7 +30626,7 @@
                 <a:ea typeface="Calibri" pitchFamily="34" charset="-122"/>
                 <a:cs typeface="Calibri" pitchFamily="34" charset="-120"/>
               </a:rPr>
-              <a:t>'e' dropped before vowel suffix</a:t>
+              <a:t>ad → al before 'l'</a:t>
             </a:r>
             <a:endParaRPr lang="en-US" sz="700" dirty="0"/>
           </a:p>
@@ -29182,7 +30640,7 @@
         </p:nvSpPr>
         <p:spPr>
           <a:xfrm>
-            <a:off x="5803392" y="2258568"/>
+            <a:off x="4370832" y="2258568"/>
             <a:ext cx="1828800" cy="292608"/>
           </a:xfrm>
           <a:prstGeom prst="rect">
@@ -29191,11 +30649,11 @@
             </a:avLst>
           </a:prstGeom>
           <a:solidFill>
-            <a:srgbClr val="FCE7F3"/>
+            <a:srgbClr val="CCFBF1"/>
           </a:solidFill>
           <a:ln w="19050">
             <a:solidFill>
-              <a:srgbClr val="DB2777"/>
+              <a:srgbClr val="0D9488"/>
             </a:solidFill>
             <a:prstDash val="solid"/>
           </a:ln>
@@ -29216,7 +30674,7 @@
         </p:nvSpPr>
         <p:spPr>
           <a:xfrm>
-            <a:off x="5803392" y="2258568"/>
+            <a:off x="4370832" y="2258568"/>
             <a:ext cx="1828800" cy="292608"/>
           </a:xfrm>
           <a:prstGeom prst="rect">
@@ -29235,13 +30693,13 @@
             <a:r>
               <a:rPr lang="en-US" sz="1300" b="1" dirty="0">
                 <a:solidFill>
-                  <a:srgbClr val="9D174D"/>
+                  <a:srgbClr val="0F766E"/>
                 </a:solidFill>
                 <a:latin typeface="Trebuchet MS" pitchFamily="34" charset="0"/>
                 <a:ea typeface="Trebuchet MS" pitchFamily="34" charset="-122"/>
                 <a:cs typeface="Trebuchet MS" pitchFamily="34" charset="-120"/>
               </a:rPr>
-              <a:t>ion</a:t>
+              <a:t>locate</a:t>
             </a:r>
             <a:endParaRPr lang="en-US" sz="1300" dirty="0"/>
           </a:p>
@@ -29255,7 +30713,7 @@
         </p:nvSpPr>
         <p:spPr>
           <a:xfrm>
-            <a:off x="5803392" y="2569464"/>
+            <a:off x="4370832" y="2569464"/>
             <a:ext cx="1828800" cy="201168"/>
           </a:xfrm>
           <a:prstGeom prst="rect">
@@ -29280,7 +30738,7 @@
                 <a:ea typeface="Calibri" pitchFamily="34" charset="-122"/>
                 <a:cs typeface="Calibri" pitchFamily="34" charset="-120"/>
               </a:rPr>
-              <a:t>act or result of</a:t>
+              <a:t>to find or place</a:t>
             </a:r>
             <a:endParaRPr lang="en-US" sz="850" dirty="0"/>
           </a:p>
@@ -29288,7 +30746,158 @@
       </p:sp>
       <p:sp>
         <p:nvSpPr>
-          <p:cNvPr id="23" name="Shape 21"/>
+          <p:cNvPr id="23" name="Text 21"/>
+          <p:cNvSpPr/>
+          <p:nvPr/>
+        </p:nvSpPr>
+        <p:spPr>
+          <a:xfrm>
+            <a:off x="4370832" y="2752344"/>
+            <a:ext cx="1828800" cy="182880"/>
+          </a:xfrm>
+          <a:prstGeom prst="rect">
+            <a:avLst/>
+          </a:prstGeom>
+          <a:noFill/>
+          <a:ln/>
+        </p:spPr>
+        <p:txBody>
+          <a:bodyPr wrap="square" lIns="0" tIns="0" rIns="0" bIns="0" rtlCol="0" anchor="t"/>
+          <a:lstStyle/>
+          <a:p>
+            <a:pPr algn="ctr" indent="0" marL="0">
+              <a:buNone/>
+            </a:pPr>
+            <a:r>
+              <a:rPr lang="en-US" sz="700" i="1" dirty="0">
+                <a:solidFill>
+                  <a:srgbClr val="94A3B8"/>
+                </a:solidFill>
+                <a:latin typeface="Calibri" pitchFamily="34" charset="0"/>
+                <a:ea typeface="Calibri" pitchFamily="34" charset="-122"/>
+                <a:cs typeface="Calibri" pitchFamily="34" charset="-120"/>
+              </a:rPr>
+              <a:t>'e' dropped before vowel suffix</a:t>
+            </a:r>
+            <a:endParaRPr lang="en-US" sz="700" dirty="0"/>
+          </a:p>
+        </p:txBody>
+      </p:sp>
+      <p:sp>
+        <p:nvSpPr>
+          <p:cNvPr id="24" name="Shape 22"/>
+          <p:cNvSpPr/>
+          <p:nvPr/>
+        </p:nvSpPr>
+        <p:spPr>
+          <a:xfrm>
+            <a:off x="6519672" y="2258568"/>
+            <a:ext cx="1828800" cy="292608"/>
+          </a:xfrm>
+          <a:prstGeom prst="rect">
+            <a:avLst>
+              <a:gd name="adj" fmla="val 25000"/>
+            </a:avLst>
+          </a:prstGeom>
+          <a:solidFill>
+            <a:srgbClr val="FCE7F3"/>
+          </a:solidFill>
+          <a:ln w="19050">
+            <a:solidFill>
+              <a:srgbClr val="DB2777"/>
+            </a:solidFill>
+            <a:prstDash val="solid"/>
+          </a:ln>
+          <a:effectLst>
+            <a:outerShdw sx="100000" sy="100000" kx="0" ky="0" algn="bl" rotWithShape="0" blurRad="101600" dist="38100" dir="8100000">
+              <a:srgbClr val="000000">
+                <a:alpha val="12000"/>
+              </a:srgbClr>
+            </a:outerShdw>
+          </a:effectLst>
+        </p:spPr>
+      </p:sp>
+      <p:sp>
+        <p:nvSpPr>
+          <p:cNvPr id="25" name="Text 23"/>
+          <p:cNvSpPr/>
+          <p:nvPr/>
+        </p:nvSpPr>
+        <p:spPr>
+          <a:xfrm>
+            <a:off x="6519672" y="2258568"/>
+            <a:ext cx="1828800" cy="292608"/>
+          </a:xfrm>
+          <a:prstGeom prst="rect">
+            <a:avLst/>
+          </a:prstGeom>
+          <a:noFill/>
+          <a:ln/>
+        </p:spPr>
+        <p:txBody>
+          <a:bodyPr wrap="square" lIns="0" tIns="0" rIns="0" bIns="0" rtlCol="0" anchor="ctr"/>
+          <a:lstStyle/>
+          <a:p>
+            <a:pPr algn="ctr" indent="0" marL="0">
+              <a:buNone/>
+            </a:pPr>
+            <a:r>
+              <a:rPr lang="en-US" sz="1300" b="1" dirty="0">
+                <a:solidFill>
+                  <a:srgbClr val="9D174D"/>
+                </a:solidFill>
+                <a:latin typeface="Trebuchet MS" pitchFamily="34" charset="0"/>
+                <a:ea typeface="Trebuchet MS" pitchFamily="34" charset="-122"/>
+                <a:cs typeface="Trebuchet MS" pitchFamily="34" charset="-120"/>
+              </a:rPr>
+              <a:t>ed</a:t>
+            </a:r>
+            <a:endParaRPr lang="en-US" sz="1300" dirty="0"/>
+          </a:p>
+        </p:txBody>
+      </p:sp>
+      <p:sp>
+        <p:nvSpPr>
+          <p:cNvPr id="26" name="Text 24"/>
+          <p:cNvSpPr/>
+          <p:nvPr/>
+        </p:nvSpPr>
+        <p:spPr>
+          <a:xfrm>
+            <a:off x="6519672" y="2569464"/>
+            <a:ext cx="1828800" cy="201168"/>
+          </a:xfrm>
+          <a:prstGeom prst="rect">
+            <a:avLst/>
+          </a:prstGeom>
+          <a:noFill/>
+          <a:ln/>
+        </p:spPr>
+        <p:txBody>
+          <a:bodyPr wrap="square" lIns="0" tIns="0" rIns="0" bIns="0" rtlCol="0" anchor="t"/>
+          <a:lstStyle/>
+          <a:p>
+            <a:pPr algn="ctr" indent="0" marL="0">
+              <a:buNone/>
+            </a:pPr>
+            <a:r>
+              <a:rPr lang="en-US" sz="850" dirty="0">
+                <a:solidFill>
+                  <a:srgbClr val="475569"/>
+                </a:solidFill>
+                <a:latin typeface="Calibri" pitchFamily="34" charset="0"/>
+                <a:ea typeface="Calibri" pitchFamily="34" charset="-122"/>
+                <a:cs typeface="Calibri" pitchFamily="34" charset="-120"/>
+              </a:rPr>
+              <a:t>past tense</a:t>
+            </a:r>
+            <a:endParaRPr lang="en-US" sz="850" dirty="0"/>
+          </a:p>
+        </p:txBody>
+      </p:sp>
+      <p:sp>
+        <p:nvSpPr>
+          <p:cNvPr id="27" name="Shape 25"/>
           <p:cNvSpPr/>
           <p:nvPr/>
         </p:nvSpPr>
@@ -29315,7 +30924,7 @@
       </p:sp>
       <p:sp>
         <p:nvSpPr>
-          <p:cNvPr id="24" name="Text 22"/>
+          <p:cNvPr id="28" name="Text 26"/>
           <p:cNvSpPr/>
           <p:nvPr/>
         </p:nvSpPr>
@@ -29354,7 +30963,7 @@
       </p:sp>
       <p:sp>
         <p:nvSpPr>
-          <p:cNvPr id="25" name="Shape 23"/>
+          <p:cNvPr id="29" name="Shape 27"/>
           <p:cNvSpPr/>
           <p:nvPr/>
         </p:nvSpPr>
@@ -29381,7 +30990,7 @@
       </p:sp>
       <p:sp>
         <p:nvSpPr>
-          <p:cNvPr id="26" name="Text 24"/>
+          <p:cNvPr id="30" name="Text 28"/>
           <p:cNvSpPr/>
           <p:nvPr/>
         </p:nvSpPr>
@@ -29420,7 +31029,7 @@
       </p:sp>
       <p:sp>
         <p:nvSpPr>
-          <p:cNvPr id="27" name="Shape 25"/>
+          <p:cNvPr id="31" name="Shape 29"/>
           <p:cNvSpPr/>
           <p:nvPr/>
         </p:nvSpPr>
@@ -29447,7 +31056,7 @@
       </p:sp>
       <p:sp>
         <p:nvSpPr>
-          <p:cNvPr id="28" name="Text 26"/>
+          <p:cNvPr id="32" name="Text 30"/>
           <p:cNvSpPr/>
           <p:nvPr/>
         </p:nvSpPr>
@@ -29486,7 +31095,7 @@
       </p:sp>
       <p:sp>
         <p:nvSpPr>
-          <p:cNvPr id="29" name="Shape 27"/>
+          <p:cNvPr id="33" name="Shape 31"/>
           <p:cNvSpPr/>
           <p:nvPr/>
         </p:nvSpPr>
@@ -29513,7 +31122,7 @@
       </p:sp>
       <p:sp>
         <p:nvSpPr>
-          <p:cNvPr id="30" name="Text 28"/>
+          <p:cNvPr id="34" name="Text 32"/>
           <p:cNvSpPr/>
           <p:nvPr/>
         </p:nvSpPr>
@@ -29836,7 +31445,7 @@
                 <a:ea typeface="Calibri" pitchFamily="34" charset="-122"/>
                 <a:cs typeface="Calibri" pitchFamily="34" charset="-120"/>
               </a:rPr>
-              <a:t>Word Labs  •  wordlabs.app  •  Root: 'locate' = to find or place something</a:t>
+              <a:t>Word Labs  •  wordlabs.app  •  Root: 'locate' = to find or place</a:t>
             </a:r>
             <a:endParaRPr lang="en-US" sz="800" dirty="0"/>
           </a:p>
@@ -29975,7 +31584,7 @@
                 <a:ea typeface="Trebuchet MS" pitchFamily="34" charset="-122"/>
                 <a:cs typeface="Trebuchet MS" pitchFamily="34" charset="-120"/>
               </a:rPr>
-              <a:t>location</a:t>
+              <a:t>allocated</a:t>
             </a:r>
             <a:endParaRPr lang="en-US" sz="2800" dirty="0"/>
           </a:p>
@@ -30055,7 +31664,7 @@
         </p:nvSpPr>
         <p:spPr>
           <a:xfrm>
-            <a:off x="2938272" y="2258568"/>
+            <a:off x="2221992" y="2258568"/>
             <a:ext cx="1828800" cy="292608"/>
           </a:xfrm>
           <a:prstGeom prst="rect">
@@ -30064,11 +31673,11 @@
             </a:avLst>
           </a:prstGeom>
           <a:solidFill>
-            <a:srgbClr val="CCFBF1"/>
+            <a:srgbClr val="DDD6FE"/>
           </a:solidFill>
           <a:ln w="19050">
             <a:solidFill>
-              <a:srgbClr val="0D9488"/>
+              <a:srgbClr val="7C3AED"/>
             </a:solidFill>
             <a:prstDash val="solid"/>
           </a:ln>
@@ -30089,7 +31698,7 @@
         </p:nvSpPr>
         <p:spPr>
           <a:xfrm>
-            <a:off x="2938272" y="2258568"/>
+            <a:off x="2221992" y="2258568"/>
             <a:ext cx="1828800" cy="292608"/>
           </a:xfrm>
           <a:prstGeom prst="rect">
@@ -30108,13 +31717,13 @@
             <a:r>
               <a:rPr lang="en-US" sz="1300" b="1" dirty="0">
                 <a:solidFill>
-                  <a:srgbClr val="0F766E"/>
+                  <a:srgbClr val="4C1D95"/>
                 </a:solidFill>
                 <a:latin typeface="Trebuchet MS" pitchFamily="34" charset="0"/>
                 <a:ea typeface="Trebuchet MS" pitchFamily="34" charset="-122"/>
                 <a:cs typeface="Trebuchet MS" pitchFamily="34" charset="-120"/>
               </a:rPr>
-              <a:t>locate</a:t>
+              <a:t>al</a:t>
             </a:r>
             <a:endParaRPr lang="en-US" sz="1300" dirty="0"/>
           </a:p>
@@ -30128,7 +31737,7 @@
         </p:nvSpPr>
         <p:spPr>
           <a:xfrm>
-            <a:off x="2938272" y="2569464"/>
+            <a:off x="2221992" y="2569464"/>
             <a:ext cx="1828800" cy="201168"/>
           </a:xfrm>
           <a:prstGeom prst="rect">
@@ -30153,7 +31762,7 @@
                 <a:ea typeface="Calibri" pitchFamily="34" charset="-122"/>
                 <a:cs typeface="Calibri" pitchFamily="34" charset="-120"/>
               </a:rPr>
-              <a:t>to find or place</a:t>
+              <a:t>to or towards</a:t>
             </a:r>
             <a:endParaRPr lang="en-US" sz="850" dirty="0"/>
           </a:p>
@@ -30167,7 +31776,7 @@
         </p:nvSpPr>
         <p:spPr>
           <a:xfrm>
-            <a:off x="2938272" y="2752344"/>
+            <a:off x="2221992" y="2752344"/>
             <a:ext cx="1828800" cy="182880"/>
           </a:xfrm>
           <a:prstGeom prst="rect">
@@ -30192,7 +31801,7 @@
                 <a:ea typeface="Calibri" pitchFamily="34" charset="-122"/>
                 <a:cs typeface="Calibri" pitchFamily="34" charset="-120"/>
               </a:rPr>
-              <a:t>'e' dropped before vowel suffix</a:t>
+              <a:t>ad → al before 'l'</a:t>
             </a:r>
             <a:endParaRPr lang="en-US" sz="700" dirty="0"/>
           </a:p>
@@ -30206,7 +31815,7 @@
         </p:nvSpPr>
         <p:spPr>
           <a:xfrm>
-            <a:off x="5803392" y="2258568"/>
+            <a:off x="4370832" y="2258568"/>
             <a:ext cx="1828800" cy="292608"/>
           </a:xfrm>
           <a:prstGeom prst="rect">
@@ -30215,11 +31824,11 @@
             </a:avLst>
           </a:prstGeom>
           <a:solidFill>
-            <a:srgbClr val="FCE7F3"/>
+            <a:srgbClr val="CCFBF1"/>
           </a:solidFill>
           <a:ln w="19050">
             <a:solidFill>
-              <a:srgbClr val="DB2777"/>
+              <a:srgbClr val="0D9488"/>
             </a:solidFill>
             <a:prstDash val="solid"/>
           </a:ln>
@@ -30240,7 +31849,7 @@
         </p:nvSpPr>
         <p:spPr>
           <a:xfrm>
-            <a:off x="5803392" y="2258568"/>
+            <a:off x="4370832" y="2258568"/>
             <a:ext cx="1828800" cy="292608"/>
           </a:xfrm>
           <a:prstGeom prst="rect">
@@ -30259,13 +31868,13 @@
             <a:r>
               <a:rPr lang="en-US" sz="1300" b="1" dirty="0">
                 <a:solidFill>
-                  <a:srgbClr val="9D174D"/>
+                  <a:srgbClr val="0F766E"/>
                 </a:solidFill>
                 <a:latin typeface="Trebuchet MS" pitchFamily="34" charset="0"/>
                 <a:ea typeface="Trebuchet MS" pitchFamily="34" charset="-122"/>
                 <a:cs typeface="Trebuchet MS" pitchFamily="34" charset="-120"/>
               </a:rPr>
-              <a:t>ion</a:t>
+              <a:t>locate</a:t>
             </a:r>
             <a:endParaRPr lang="en-US" sz="1300" dirty="0"/>
           </a:p>
@@ -30279,7 +31888,7 @@
         </p:nvSpPr>
         <p:spPr>
           <a:xfrm>
-            <a:off x="5803392" y="2569464"/>
+            <a:off x="4370832" y="2569464"/>
             <a:ext cx="1828800" cy="201168"/>
           </a:xfrm>
           <a:prstGeom prst="rect">
@@ -30304,7 +31913,7 @@
                 <a:ea typeface="Calibri" pitchFamily="34" charset="-122"/>
                 <a:cs typeface="Calibri" pitchFamily="34" charset="-120"/>
               </a:rPr>
-              <a:t>act or result of</a:t>
+              <a:t>to find or place</a:t>
             </a:r>
             <a:endParaRPr lang="en-US" sz="850" dirty="0"/>
           </a:p>
@@ -30312,7 +31921,158 @@
       </p:sp>
       <p:sp>
         <p:nvSpPr>
-          <p:cNvPr id="23" name="Shape 21"/>
+          <p:cNvPr id="23" name="Text 21"/>
+          <p:cNvSpPr/>
+          <p:nvPr/>
+        </p:nvSpPr>
+        <p:spPr>
+          <a:xfrm>
+            <a:off x="4370832" y="2752344"/>
+            <a:ext cx="1828800" cy="182880"/>
+          </a:xfrm>
+          <a:prstGeom prst="rect">
+            <a:avLst/>
+          </a:prstGeom>
+          <a:noFill/>
+          <a:ln/>
+        </p:spPr>
+        <p:txBody>
+          <a:bodyPr wrap="square" lIns="0" tIns="0" rIns="0" bIns="0" rtlCol="0" anchor="t"/>
+          <a:lstStyle/>
+          <a:p>
+            <a:pPr algn="ctr" indent="0" marL="0">
+              <a:buNone/>
+            </a:pPr>
+            <a:r>
+              <a:rPr lang="en-US" sz="700" i="1" dirty="0">
+                <a:solidFill>
+                  <a:srgbClr val="94A3B8"/>
+                </a:solidFill>
+                <a:latin typeface="Calibri" pitchFamily="34" charset="0"/>
+                <a:ea typeface="Calibri" pitchFamily="34" charset="-122"/>
+                <a:cs typeface="Calibri" pitchFamily="34" charset="-120"/>
+              </a:rPr>
+              <a:t>'e' dropped before vowel suffix</a:t>
+            </a:r>
+            <a:endParaRPr lang="en-US" sz="700" dirty="0"/>
+          </a:p>
+        </p:txBody>
+      </p:sp>
+      <p:sp>
+        <p:nvSpPr>
+          <p:cNvPr id="24" name="Shape 22"/>
+          <p:cNvSpPr/>
+          <p:nvPr/>
+        </p:nvSpPr>
+        <p:spPr>
+          <a:xfrm>
+            <a:off x="6519672" y="2258568"/>
+            <a:ext cx="1828800" cy="292608"/>
+          </a:xfrm>
+          <a:prstGeom prst="rect">
+            <a:avLst>
+              <a:gd name="adj" fmla="val 25000"/>
+            </a:avLst>
+          </a:prstGeom>
+          <a:solidFill>
+            <a:srgbClr val="FCE7F3"/>
+          </a:solidFill>
+          <a:ln w="19050">
+            <a:solidFill>
+              <a:srgbClr val="DB2777"/>
+            </a:solidFill>
+            <a:prstDash val="solid"/>
+          </a:ln>
+          <a:effectLst>
+            <a:outerShdw sx="100000" sy="100000" kx="0" ky="0" algn="bl" rotWithShape="0" blurRad="101600" dist="38100" dir="8100000">
+              <a:srgbClr val="000000">
+                <a:alpha val="12000"/>
+              </a:srgbClr>
+            </a:outerShdw>
+          </a:effectLst>
+        </p:spPr>
+      </p:sp>
+      <p:sp>
+        <p:nvSpPr>
+          <p:cNvPr id="25" name="Text 23"/>
+          <p:cNvSpPr/>
+          <p:nvPr/>
+        </p:nvSpPr>
+        <p:spPr>
+          <a:xfrm>
+            <a:off x="6519672" y="2258568"/>
+            <a:ext cx="1828800" cy="292608"/>
+          </a:xfrm>
+          <a:prstGeom prst="rect">
+            <a:avLst/>
+          </a:prstGeom>
+          <a:noFill/>
+          <a:ln/>
+        </p:spPr>
+        <p:txBody>
+          <a:bodyPr wrap="square" lIns="0" tIns="0" rIns="0" bIns="0" rtlCol="0" anchor="ctr"/>
+          <a:lstStyle/>
+          <a:p>
+            <a:pPr algn="ctr" indent="0" marL="0">
+              <a:buNone/>
+            </a:pPr>
+            <a:r>
+              <a:rPr lang="en-US" sz="1300" b="1" dirty="0">
+                <a:solidFill>
+                  <a:srgbClr val="9D174D"/>
+                </a:solidFill>
+                <a:latin typeface="Trebuchet MS" pitchFamily="34" charset="0"/>
+                <a:ea typeface="Trebuchet MS" pitchFamily="34" charset="-122"/>
+                <a:cs typeface="Trebuchet MS" pitchFamily="34" charset="-120"/>
+              </a:rPr>
+              <a:t>ed</a:t>
+            </a:r>
+            <a:endParaRPr lang="en-US" sz="1300" dirty="0"/>
+          </a:p>
+        </p:txBody>
+      </p:sp>
+      <p:sp>
+        <p:nvSpPr>
+          <p:cNvPr id="26" name="Text 24"/>
+          <p:cNvSpPr/>
+          <p:nvPr/>
+        </p:nvSpPr>
+        <p:spPr>
+          <a:xfrm>
+            <a:off x="6519672" y="2569464"/>
+            <a:ext cx="1828800" cy="201168"/>
+          </a:xfrm>
+          <a:prstGeom prst="rect">
+            <a:avLst/>
+          </a:prstGeom>
+          <a:noFill/>
+          <a:ln/>
+        </p:spPr>
+        <p:txBody>
+          <a:bodyPr wrap="square" lIns="0" tIns="0" rIns="0" bIns="0" rtlCol="0" anchor="t"/>
+          <a:lstStyle/>
+          <a:p>
+            <a:pPr algn="ctr" indent="0" marL="0">
+              <a:buNone/>
+            </a:pPr>
+            <a:r>
+              <a:rPr lang="en-US" sz="850" dirty="0">
+                <a:solidFill>
+                  <a:srgbClr val="475569"/>
+                </a:solidFill>
+                <a:latin typeface="Calibri" pitchFamily="34" charset="0"/>
+                <a:ea typeface="Calibri" pitchFamily="34" charset="-122"/>
+                <a:cs typeface="Calibri" pitchFamily="34" charset="-120"/>
+              </a:rPr>
+              <a:t>past tense</a:t>
+            </a:r>
+            <a:endParaRPr lang="en-US" sz="850" dirty="0"/>
+          </a:p>
+        </p:txBody>
+      </p:sp>
+      <p:sp>
+        <p:nvSpPr>
+          <p:cNvPr id="27" name="Shape 25"/>
           <p:cNvSpPr/>
           <p:nvPr/>
         </p:nvSpPr>
@@ -30339,7 +32099,7 @@
       </p:sp>
       <p:sp>
         <p:nvSpPr>
-          <p:cNvPr id="24" name="Text 22"/>
+          <p:cNvPr id="28" name="Text 26"/>
           <p:cNvSpPr/>
           <p:nvPr/>
         </p:nvSpPr>
@@ -30378,7 +32138,7 @@
       </p:sp>
       <p:sp>
         <p:nvSpPr>
-          <p:cNvPr id="25" name="Shape 23"/>
+          <p:cNvPr id="29" name="Shape 27"/>
           <p:cNvSpPr/>
           <p:nvPr/>
         </p:nvSpPr>
@@ -30405,14 +32165,14 @@
       </p:sp>
       <p:sp>
         <p:nvSpPr>
-          <p:cNvPr id="26" name="Shape 24"/>
-          <p:cNvSpPr/>
-          <p:nvPr/>
-        </p:nvSpPr>
-        <p:spPr>
-          <a:xfrm>
-            <a:off x="2313432" y="3364992"/>
-            <a:ext cx="1645920" cy="475488"/>
+          <p:cNvPr id="30" name="Shape 28"/>
+          <p:cNvSpPr/>
+          <p:nvPr/>
+        </p:nvSpPr>
+        <p:spPr>
+          <a:xfrm>
+            <a:off x="1975104" y="3364992"/>
+            <a:ext cx="1554480" cy="475488"/>
           </a:xfrm>
           <a:prstGeom prst="rect">
             <a:avLst>
@@ -30432,14 +32192,14 @@
       </p:sp>
       <p:sp>
         <p:nvSpPr>
-          <p:cNvPr id="27" name="Text 25"/>
-          <p:cNvSpPr/>
-          <p:nvPr/>
-        </p:nvSpPr>
-        <p:spPr>
-          <a:xfrm>
-            <a:off x="2313432" y="3364992"/>
-            <a:ext cx="1645920" cy="475488"/>
+          <p:cNvPr id="31" name="Text 29"/>
+          <p:cNvSpPr/>
+          <p:nvPr/>
+        </p:nvSpPr>
+        <p:spPr>
+          <a:xfrm>
+            <a:off x="1975104" y="3364992"/>
+            <a:ext cx="1554480" cy="475488"/>
           </a:xfrm>
           <a:prstGeom prst="rect">
             <a:avLst/>
@@ -30463,7 +32223,7 @@
                 <a:ea typeface="Trebuchet MS" pitchFamily="34" charset="-122"/>
                 <a:cs typeface="Trebuchet MS" pitchFamily="34" charset="-120"/>
               </a:rPr>
-              <a:t>lo</a:t>
+              <a:t>al</a:t>
             </a:r>
             <a:endParaRPr lang="en-US" sz="1400" dirty="0"/>
           </a:p>
@@ -30471,14 +32231,14 @@
       </p:sp>
       <p:sp>
         <p:nvSpPr>
-          <p:cNvPr id="28" name="Text 26"/>
-          <p:cNvSpPr/>
-          <p:nvPr/>
-        </p:nvSpPr>
-        <p:spPr>
-          <a:xfrm>
-            <a:off x="3959352" y="3364992"/>
-            <a:ext cx="411480" cy="475488"/>
+          <p:cNvPr id="32" name="Text 30"/>
+          <p:cNvSpPr/>
+          <p:nvPr/>
+        </p:nvSpPr>
+        <p:spPr>
+          <a:xfrm>
+            <a:off x="3529584" y="3364992"/>
+            <a:ext cx="73152" cy="475488"/>
           </a:xfrm>
           <a:prstGeom prst="rect">
             <a:avLst/>
@@ -30510,14 +32270,14 @@
       </p:sp>
       <p:sp>
         <p:nvSpPr>
-          <p:cNvPr id="29" name="Shape 27"/>
-          <p:cNvSpPr/>
-          <p:nvPr/>
-        </p:nvSpPr>
-        <p:spPr>
-          <a:xfrm>
-            <a:off x="4370832" y="3364992"/>
-            <a:ext cx="1645920" cy="475488"/>
+          <p:cNvPr id="33" name="Shape 31"/>
+          <p:cNvSpPr/>
+          <p:nvPr/>
+        </p:nvSpPr>
+        <p:spPr>
+          <a:xfrm>
+            <a:off x="3602736" y="3364992"/>
+            <a:ext cx="1554480" cy="475488"/>
           </a:xfrm>
           <a:prstGeom prst="rect">
             <a:avLst>
@@ -30537,14 +32297,14 @@
       </p:sp>
       <p:sp>
         <p:nvSpPr>
-          <p:cNvPr id="30" name="Text 28"/>
-          <p:cNvSpPr/>
-          <p:nvPr/>
-        </p:nvSpPr>
-        <p:spPr>
-          <a:xfrm>
-            <a:off x="4370832" y="3364992"/>
-            <a:ext cx="1645920" cy="475488"/>
+          <p:cNvPr id="34" name="Text 32"/>
+          <p:cNvSpPr/>
+          <p:nvPr/>
+        </p:nvSpPr>
+        <p:spPr>
+          <a:xfrm>
+            <a:off x="3602736" y="3364992"/>
+            <a:ext cx="1554480" cy="475488"/>
           </a:xfrm>
           <a:prstGeom prst="rect">
             <a:avLst/>
@@ -30568,7 +32328,7 @@
                 <a:ea typeface="Trebuchet MS" pitchFamily="34" charset="-122"/>
                 <a:cs typeface="Trebuchet MS" pitchFamily="34" charset="-120"/>
               </a:rPr>
-              <a:t>ca</a:t>
+              <a:t>lo</a:t>
             </a:r>
             <a:endParaRPr lang="en-US" sz="1400" dirty="0"/>
           </a:p>
@@ -30576,14 +32336,14 @@
       </p:sp>
       <p:sp>
         <p:nvSpPr>
-          <p:cNvPr id="31" name="Text 29"/>
-          <p:cNvSpPr/>
-          <p:nvPr/>
-        </p:nvSpPr>
-        <p:spPr>
-          <a:xfrm>
-            <a:off x="6016752" y="3364992"/>
-            <a:ext cx="411480" cy="475488"/>
+          <p:cNvPr id="35" name="Text 33"/>
+          <p:cNvSpPr/>
+          <p:nvPr/>
+        </p:nvSpPr>
+        <p:spPr>
+          <a:xfrm>
+            <a:off x="5157216" y="3364992"/>
+            <a:ext cx="73152" cy="475488"/>
           </a:xfrm>
           <a:prstGeom prst="rect">
             <a:avLst/>
@@ -30615,14 +32375,14 @@
       </p:sp>
       <p:sp>
         <p:nvSpPr>
-          <p:cNvPr id="32" name="Shape 30"/>
-          <p:cNvSpPr/>
-          <p:nvPr/>
-        </p:nvSpPr>
-        <p:spPr>
-          <a:xfrm>
-            <a:off x="6428232" y="3364992"/>
-            <a:ext cx="1645920" cy="475488"/>
+          <p:cNvPr id="36" name="Shape 34"/>
+          <p:cNvSpPr/>
+          <p:nvPr/>
+        </p:nvSpPr>
+        <p:spPr>
+          <a:xfrm>
+            <a:off x="5230368" y="3364992"/>
+            <a:ext cx="1554480" cy="475488"/>
           </a:xfrm>
           <a:prstGeom prst="rect">
             <a:avLst>
@@ -30642,14 +32402,14 @@
       </p:sp>
       <p:sp>
         <p:nvSpPr>
-          <p:cNvPr id="33" name="Text 31"/>
-          <p:cNvSpPr/>
-          <p:nvPr/>
-        </p:nvSpPr>
-        <p:spPr>
-          <a:xfrm>
-            <a:off x="6428232" y="3364992"/>
-            <a:ext cx="1645920" cy="475488"/>
+          <p:cNvPr id="37" name="Text 35"/>
+          <p:cNvSpPr/>
+          <p:nvPr/>
+        </p:nvSpPr>
+        <p:spPr>
+          <a:xfrm>
+            <a:off x="5230368" y="3364992"/>
+            <a:ext cx="1554480" cy="475488"/>
           </a:xfrm>
           <a:prstGeom prst="rect">
             <a:avLst/>
@@ -30673,7 +32433,7 @@
                 <a:ea typeface="Trebuchet MS" pitchFamily="34" charset="-122"/>
                 <a:cs typeface="Trebuchet MS" pitchFamily="34" charset="-120"/>
               </a:rPr>
-              <a:t>tion</a:t>
+              <a:t>ca</a:t>
             </a:r>
             <a:endParaRPr lang="en-US" sz="1400" dirty="0"/>
           </a:p>
@@ -30681,7 +32441,112 @@
       </p:sp>
       <p:sp>
         <p:nvSpPr>
-          <p:cNvPr id="34" name="Shape 32"/>
+          <p:cNvPr id="38" name="Text 36"/>
+          <p:cNvSpPr/>
+          <p:nvPr/>
+        </p:nvSpPr>
+        <p:spPr>
+          <a:xfrm>
+            <a:off x="6784848" y="3364992"/>
+            <a:ext cx="73152" cy="475488"/>
+          </a:xfrm>
+          <a:prstGeom prst="rect">
+            <a:avLst/>
+          </a:prstGeom>
+          <a:noFill/>
+          <a:ln/>
+        </p:spPr>
+        <p:txBody>
+          <a:bodyPr wrap="square" lIns="0" tIns="0" rIns="0" bIns="0" rtlCol="0" anchor="ctr"/>
+          <a:lstStyle/>
+          <a:p>
+            <a:pPr algn="ctr" indent="0" marL="0">
+              <a:buNone/>
+            </a:pPr>
+            <a:r>
+              <a:rPr lang="en-US" sz="1600" b="1" dirty="0">
+                <a:solidFill>
+                  <a:srgbClr val="0D9488"/>
+                </a:solidFill>
+                <a:latin typeface="Trebuchet MS" pitchFamily="34" charset="0"/>
+                <a:ea typeface="Trebuchet MS" pitchFamily="34" charset="-122"/>
+                <a:cs typeface="Trebuchet MS" pitchFamily="34" charset="-120"/>
+              </a:rPr>
+              <a:t>·</a:t>
+            </a:r>
+            <a:endParaRPr lang="en-US" sz="1600" dirty="0"/>
+          </a:p>
+        </p:txBody>
+      </p:sp>
+      <p:sp>
+        <p:nvSpPr>
+          <p:cNvPr id="39" name="Shape 37"/>
+          <p:cNvSpPr/>
+          <p:nvPr/>
+        </p:nvSpPr>
+        <p:spPr>
+          <a:xfrm>
+            <a:off x="6858000" y="3364992"/>
+            <a:ext cx="1554480" cy="475488"/>
+          </a:xfrm>
+          <a:prstGeom prst="rect">
+            <a:avLst>
+              <a:gd name="adj" fmla="val 9615"/>
+            </a:avLst>
+          </a:prstGeom>
+          <a:solidFill>
+            <a:srgbClr val="FFFFFF"/>
+          </a:solidFill>
+          <a:ln w="12700">
+            <a:solidFill>
+              <a:srgbClr val="0D9488"/>
+            </a:solidFill>
+            <a:prstDash val="solid"/>
+          </a:ln>
+        </p:spPr>
+      </p:sp>
+      <p:sp>
+        <p:nvSpPr>
+          <p:cNvPr id="40" name="Text 38"/>
+          <p:cNvSpPr/>
+          <p:nvPr/>
+        </p:nvSpPr>
+        <p:spPr>
+          <a:xfrm>
+            <a:off x="6858000" y="3364992"/>
+            <a:ext cx="1554480" cy="475488"/>
+          </a:xfrm>
+          <a:prstGeom prst="rect">
+            <a:avLst/>
+          </a:prstGeom>
+          <a:noFill/>
+          <a:ln/>
+        </p:spPr>
+        <p:txBody>
+          <a:bodyPr wrap="square" lIns="0" tIns="0" rIns="0" bIns="0" rtlCol="0" anchor="ctr"/>
+          <a:lstStyle/>
+          <a:p>
+            <a:pPr algn="ctr" indent="0" marL="0">
+              <a:buNone/>
+            </a:pPr>
+            <a:r>
+              <a:rPr lang="en-US" sz="1400" b="1" dirty="0">
+                <a:solidFill>
+                  <a:srgbClr val="0D9488"/>
+                </a:solidFill>
+                <a:latin typeface="Trebuchet MS" pitchFamily="34" charset="0"/>
+                <a:ea typeface="Trebuchet MS" pitchFamily="34" charset="-122"/>
+                <a:cs typeface="Trebuchet MS" pitchFamily="34" charset="-120"/>
+              </a:rPr>
+              <a:t>ted</a:t>
+            </a:r>
+            <a:endParaRPr lang="en-US" sz="1400" dirty="0"/>
+          </a:p>
+        </p:txBody>
+      </p:sp>
+      <p:sp>
+        <p:nvSpPr>
+          <p:cNvPr id="41" name="Shape 39"/>
           <p:cNvSpPr/>
           <p:nvPr/>
         </p:nvSpPr>
@@ -30708,7 +32573,7 @@
       </p:sp>
       <p:sp>
         <p:nvSpPr>
-          <p:cNvPr id="35" name="Text 33"/>
+          <p:cNvPr id="42" name="Text 40"/>
           <p:cNvSpPr/>
           <p:nvPr/>
         </p:nvSpPr>
@@ -30747,7 +32612,7 @@
       </p:sp>
       <p:sp>
         <p:nvSpPr>
-          <p:cNvPr id="36" name="Shape 34"/>
+          <p:cNvPr id="43" name="Shape 41"/>
           <p:cNvSpPr/>
           <p:nvPr/>
         </p:nvSpPr>
@@ -30774,7 +32639,7 @@
       </p:sp>
       <p:sp>
         <p:nvSpPr>
-          <p:cNvPr id="37" name="Text 35"/>
+          <p:cNvPr id="44" name="Text 42"/>
           <p:cNvSpPr/>
           <p:nvPr/>
         </p:nvSpPr>
@@ -31097,7 +32962,7 @@
                 <a:ea typeface="Calibri" pitchFamily="34" charset="-122"/>
                 <a:cs typeface="Calibri" pitchFamily="34" charset="-120"/>
               </a:rPr>
-              <a:t>Word Labs  •  wordlabs.app  •  Root: 'locate' = to find or place something</a:t>
+              <a:t>Word Labs  •  wordlabs.app  •  Root: 'locate' = to find or place</a:t>
             </a:r>
             <a:endParaRPr lang="en-US" sz="800" dirty="0"/>
           </a:p>
@@ -31236,7 +33101,7 @@
                 <a:ea typeface="Trebuchet MS" pitchFamily="34" charset="-122"/>
                 <a:cs typeface="Trebuchet MS" pitchFamily="34" charset="-120"/>
               </a:rPr>
-              <a:t>location</a:t>
+              <a:t>allocated</a:t>
             </a:r>
             <a:endParaRPr lang="en-US" sz="2800" dirty="0"/>
           </a:p>
@@ -31316,7 +33181,7 @@
         </p:nvSpPr>
         <p:spPr>
           <a:xfrm>
-            <a:off x="2938272" y="2258568"/>
+            <a:off x="2221992" y="2258568"/>
             <a:ext cx="1828800" cy="292608"/>
           </a:xfrm>
           <a:prstGeom prst="rect">
@@ -31325,11 +33190,11 @@
             </a:avLst>
           </a:prstGeom>
           <a:solidFill>
-            <a:srgbClr val="CCFBF1"/>
+            <a:srgbClr val="DDD6FE"/>
           </a:solidFill>
           <a:ln w="19050">
             <a:solidFill>
-              <a:srgbClr val="0D9488"/>
+              <a:srgbClr val="7C3AED"/>
             </a:solidFill>
             <a:prstDash val="solid"/>
           </a:ln>
@@ -31350,7 +33215,7 @@
         </p:nvSpPr>
         <p:spPr>
           <a:xfrm>
-            <a:off x="2938272" y="2258568"/>
+            <a:off x="2221992" y="2258568"/>
             <a:ext cx="1828800" cy="292608"/>
           </a:xfrm>
           <a:prstGeom prst="rect">
@@ -31369,13 +33234,13 @@
             <a:r>
               <a:rPr lang="en-US" sz="1300" b="1" dirty="0">
                 <a:solidFill>
-                  <a:srgbClr val="0F766E"/>
+                  <a:srgbClr val="4C1D95"/>
                 </a:solidFill>
                 <a:latin typeface="Trebuchet MS" pitchFamily="34" charset="0"/>
                 <a:ea typeface="Trebuchet MS" pitchFamily="34" charset="-122"/>
                 <a:cs typeface="Trebuchet MS" pitchFamily="34" charset="-120"/>
               </a:rPr>
-              <a:t>locate</a:t>
+              <a:t>al</a:t>
             </a:r>
             <a:endParaRPr lang="en-US" sz="1300" dirty="0"/>
           </a:p>
@@ -31389,7 +33254,7 @@
         </p:nvSpPr>
         <p:spPr>
           <a:xfrm>
-            <a:off x="2938272" y="2569464"/>
+            <a:off x="2221992" y="2569464"/>
             <a:ext cx="1828800" cy="201168"/>
           </a:xfrm>
           <a:prstGeom prst="rect">
@@ -31414,7 +33279,7 @@
                 <a:ea typeface="Calibri" pitchFamily="34" charset="-122"/>
                 <a:cs typeface="Calibri" pitchFamily="34" charset="-120"/>
               </a:rPr>
-              <a:t>to find or place</a:t>
+              <a:t>to or towards</a:t>
             </a:r>
             <a:endParaRPr lang="en-US" sz="850" dirty="0"/>
           </a:p>
@@ -31428,7 +33293,7 @@
         </p:nvSpPr>
         <p:spPr>
           <a:xfrm>
-            <a:off x="2938272" y="2752344"/>
+            <a:off x="2221992" y="2752344"/>
             <a:ext cx="1828800" cy="182880"/>
           </a:xfrm>
           <a:prstGeom prst="rect">
@@ -31453,7 +33318,7 @@
                 <a:ea typeface="Calibri" pitchFamily="34" charset="-122"/>
                 <a:cs typeface="Calibri" pitchFamily="34" charset="-120"/>
               </a:rPr>
-              <a:t>'e' dropped before vowel suffix</a:t>
+              <a:t>ad → al before 'l'</a:t>
             </a:r>
             <a:endParaRPr lang="en-US" sz="700" dirty="0"/>
           </a:p>
@@ -31467,7 +33332,7 @@
         </p:nvSpPr>
         <p:spPr>
           <a:xfrm>
-            <a:off x="5803392" y="2258568"/>
+            <a:off x="4370832" y="2258568"/>
             <a:ext cx="1828800" cy="292608"/>
           </a:xfrm>
           <a:prstGeom prst="rect">
@@ -31476,11 +33341,11 @@
             </a:avLst>
           </a:prstGeom>
           <a:solidFill>
-            <a:srgbClr val="FCE7F3"/>
+            <a:srgbClr val="CCFBF1"/>
           </a:solidFill>
           <a:ln w="19050">
             <a:solidFill>
-              <a:srgbClr val="DB2777"/>
+              <a:srgbClr val="0D9488"/>
             </a:solidFill>
             <a:prstDash val="solid"/>
           </a:ln>
@@ -31501,7 +33366,7 @@
         </p:nvSpPr>
         <p:spPr>
           <a:xfrm>
-            <a:off x="5803392" y="2258568"/>
+            <a:off x="4370832" y="2258568"/>
             <a:ext cx="1828800" cy="292608"/>
           </a:xfrm>
           <a:prstGeom prst="rect">
@@ -31520,13 +33385,13 @@
             <a:r>
               <a:rPr lang="en-US" sz="1300" b="1" dirty="0">
                 <a:solidFill>
-                  <a:srgbClr val="9D174D"/>
+                  <a:srgbClr val="0F766E"/>
                 </a:solidFill>
                 <a:latin typeface="Trebuchet MS" pitchFamily="34" charset="0"/>
                 <a:ea typeface="Trebuchet MS" pitchFamily="34" charset="-122"/>
                 <a:cs typeface="Trebuchet MS" pitchFamily="34" charset="-120"/>
               </a:rPr>
-              <a:t>ion</a:t>
+              <a:t>locate</a:t>
             </a:r>
             <a:endParaRPr lang="en-US" sz="1300" dirty="0"/>
           </a:p>
@@ -31540,7 +33405,7 @@
         </p:nvSpPr>
         <p:spPr>
           <a:xfrm>
-            <a:off x="5803392" y="2569464"/>
+            <a:off x="4370832" y="2569464"/>
             <a:ext cx="1828800" cy="201168"/>
           </a:xfrm>
           <a:prstGeom prst="rect">
@@ -31565,7 +33430,7 @@
                 <a:ea typeface="Calibri" pitchFamily="34" charset="-122"/>
                 <a:cs typeface="Calibri" pitchFamily="34" charset="-120"/>
               </a:rPr>
-              <a:t>act or result of</a:t>
+              <a:t>to find or place</a:t>
             </a:r>
             <a:endParaRPr lang="en-US" sz="850" dirty="0"/>
           </a:p>
@@ -31573,7 +33438,158 @@
       </p:sp>
       <p:sp>
         <p:nvSpPr>
-          <p:cNvPr id="23" name="Shape 21"/>
+          <p:cNvPr id="23" name="Text 21"/>
+          <p:cNvSpPr/>
+          <p:nvPr/>
+        </p:nvSpPr>
+        <p:spPr>
+          <a:xfrm>
+            <a:off x="4370832" y="2752344"/>
+            <a:ext cx="1828800" cy="182880"/>
+          </a:xfrm>
+          <a:prstGeom prst="rect">
+            <a:avLst/>
+          </a:prstGeom>
+          <a:noFill/>
+          <a:ln/>
+        </p:spPr>
+        <p:txBody>
+          <a:bodyPr wrap="square" lIns="0" tIns="0" rIns="0" bIns="0" rtlCol="0" anchor="t"/>
+          <a:lstStyle/>
+          <a:p>
+            <a:pPr algn="ctr" indent="0" marL="0">
+              <a:buNone/>
+            </a:pPr>
+            <a:r>
+              <a:rPr lang="en-US" sz="700" i="1" dirty="0">
+                <a:solidFill>
+                  <a:srgbClr val="94A3B8"/>
+                </a:solidFill>
+                <a:latin typeface="Calibri" pitchFamily="34" charset="0"/>
+                <a:ea typeface="Calibri" pitchFamily="34" charset="-122"/>
+                <a:cs typeface="Calibri" pitchFamily="34" charset="-120"/>
+              </a:rPr>
+              <a:t>'e' dropped before vowel suffix</a:t>
+            </a:r>
+            <a:endParaRPr lang="en-US" sz="700" dirty="0"/>
+          </a:p>
+        </p:txBody>
+      </p:sp>
+      <p:sp>
+        <p:nvSpPr>
+          <p:cNvPr id="24" name="Shape 22"/>
+          <p:cNvSpPr/>
+          <p:nvPr/>
+        </p:nvSpPr>
+        <p:spPr>
+          <a:xfrm>
+            <a:off x="6519672" y="2258568"/>
+            <a:ext cx="1828800" cy="292608"/>
+          </a:xfrm>
+          <a:prstGeom prst="rect">
+            <a:avLst>
+              <a:gd name="adj" fmla="val 25000"/>
+            </a:avLst>
+          </a:prstGeom>
+          <a:solidFill>
+            <a:srgbClr val="FCE7F3"/>
+          </a:solidFill>
+          <a:ln w="19050">
+            <a:solidFill>
+              <a:srgbClr val="DB2777"/>
+            </a:solidFill>
+            <a:prstDash val="solid"/>
+          </a:ln>
+          <a:effectLst>
+            <a:outerShdw sx="100000" sy="100000" kx="0" ky="0" algn="bl" rotWithShape="0" blurRad="101600" dist="38100" dir="8100000">
+              <a:srgbClr val="000000">
+                <a:alpha val="12000"/>
+              </a:srgbClr>
+            </a:outerShdw>
+          </a:effectLst>
+        </p:spPr>
+      </p:sp>
+      <p:sp>
+        <p:nvSpPr>
+          <p:cNvPr id="25" name="Text 23"/>
+          <p:cNvSpPr/>
+          <p:nvPr/>
+        </p:nvSpPr>
+        <p:spPr>
+          <a:xfrm>
+            <a:off x="6519672" y="2258568"/>
+            <a:ext cx="1828800" cy="292608"/>
+          </a:xfrm>
+          <a:prstGeom prst="rect">
+            <a:avLst/>
+          </a:prstGeom>
+          <a:noFill/>
+          <a:ln/>
+        </p:spPr>
+        <p:txBody>
+          <a:bodyPr wrap="square" lIns="0" tIns="0" rIns="0" bIns="0" rtlCol="0" anchor="ctr"/>
+          <a:lstStyle/>
+          <a:p>
+            <a:pPr algn="ctr" indent="0" marL="0">
+              <a:buNone/>
+            </a:pPr>
+            <a:r>
+              <a:rPr lang="en-US" sz="1300" b="1" dirty="0">
+                <a:solidFill>
+                  <a:srgbClr val="9D174D"/>
+                </a:solidFill>
+                <a:latin typeface="Trebuchet MS" pitchFamily="34" charset="0"/>
+                <a:ea typeface="Trebuchet MS" pitchFamily="34" charset="-122"/>
+                <a:cs typeface="Trebuchet MS" pitchFamily="34" charset="-120"/>
+              </a:rPr>
+              <a:t>ed</a:t>
+            </a:r>
+            <a:endParaRPr lang="en-US" sz="1300" dirty="0"/>
+          </a:p>
+        </p:txBody>
+      </p:sp>
+      <p:sp>
+        <p:nvSpPr>
+          <p:cNvPr id="26" name="Text 24"/>
+          <p:cNvSpPr/>
+          <p:nvPr/>
+        </p:nvSpPr>
+        <p:spPr>
+          <a:xfrm>
+            <a:off x="6519672" y="2569464"/>
+            <a:ext cx="1828800" cy="201168"/>
+          </a:xfrm>
+          <a:prstGeom prst="rect">
+            <a:avLst/>
+          </a:prstGeom>
+          <a:noFill/>
+          <a:ln/>
+        </p:spPr>
+        <p:txBody>
+          <a:bodyPr wrap="square" lIns="0" tIns="0" rIns="0" bIns="0" rtlCol="0" anchor="t"/>
+          <a:lstStyle/>
+          <a:p>
+            <a:pPr algn="ctr" indent="0" marL="0">
+              <a:buNone/>
+            </a:pPr>
+            <a:r>
+              <a:rPr lang="en-US" sz="850" dirty="0">
+                <a:solidFill>
+                  <a:srgbClr val="475569"/>
+                </a:solidFill>
+                <a:latin typeface="Calibri" pitchFamily="34" charset="0"/>
+                <a:ea typeface="Calibri" pitchFamily="34" charset="-122"/>
+                <a:cs typeface="Calibri" pitchFamily="34" charset="-120"/>
+              </a:rPr>
+              <a:t>past tense</a:t>
+            </a:r>
+            <a:endParaRPr lang="en-US" sz="850" dirty="0"/>
+          </a:p>
+        </p:txBody>
+      </p:sp>
+      <p:sp>
+        <p:nvSpPr>
+          <p:cNvPr id="27" name="Shape 25"/>
           <p:cNvSpPr/>
           <p:nvPr/>
         </p:nvSpPr>
@@ -31600,7 +33616,7 @@
       </p:sp>
       <p:sp>
         <p:nvSpPr>
-          <p:cNvPr id="24" name="Text 22"/>
+          <p:cNvPr id="28" name="Text 26"/>
           <p:cNvSpPr/>
           <p:nvPr/>
         </p:nvSpPr>
@@ -31639,7 +33655,7 @@
       </p:sp>
       <p:sp>
         <p:nvSpPr>
-          <p:cNvPr id="25" name="Shape 23"/>
+          <p:cNvPr id="29" name="Shape 27"/>
           <p:cNvSpPr/>
           <p:nvPr/>
         </p:nvSpPr>
@@ -31666,14 +33682,14 @@
       </p:sp>
       <p:sp>
         <p:nvSpPr>
-          <p:cNvPr id="26" name="Shape 24"/>
-          <p:cNvSpPr/>
-          <p:nvPr/>
-        </p:nvSpPr>
-        <p:spPr>
-          <a:xfrm>
-            <a:off x="2313432" y="3364992"/>
-            <a:ext cx="1645920" cy="475488"/>
+          <p:cNvPr id="30" name="Shape 28"/>
+          <p:cNvSpPr/>
+          <p:nvPr/>
+        </p:nvSpPr>
+        <p:spPr>
+          <a:xfrm>
+            <a:off x="1975104" y="3364992"/>
+            <a:ext cx="1554480" cy="475488"/>
           </a:xfrm>
           <a:prstGeom prst="rect">
             <a:avLst>
@@ -31693,14 +33709,14 @@
       </p:sp>
       <p:sp>
         <p:nvSpPr>
-          <p:cNvPr id="27" name="Text 25"/>
-          <p:cNvSpPr/>
-          <p:nvPr/>
-        </p:nvSpPr>
-        <p:spPr>
-          <a:xfrm>
-            <a:off x="2313432" y="3364992"/>
-            <a:ext cx="1645920" cy="475488"/>
+          <p:cNvPr id="31" name="Text 29"/>
+          <p:cNvSpPr/>
+          <p:nvPr/>
+        </p:nvSpPr>
+        <p:spPr>
+          <a:xfrm>
+            <a:off x="1975104" y="3364992"/>
+            <a:ext cx="1554480" cy="475488"/>
           </a:xfrm>
           <a:prstGeom prst="rect">
             <a:avLst/>
@@ -31724,7 +33740,7 @@
                 <a:ea typeface="Trebuchet MS" pitchFamily="34" charset="-122"/>
                 <a:cs typeface="Trebuchet MS" pitchFamily="34" charset="-120"/>
               </a:rPr>
-              <a:t>lo</a:t>
+              <a:t>al</a:t>
             </a:r>
             <a:endParaRPr lang="en-US" sz="1400" dirty="0"/>
           </a:p>
@@ -31732,14 +33748,14 @@
       </p:sp>
       <p:sp>
         <p:nvSpPr>
-          <p:cNvPr id="28" name="Text 26"/>
-          <p:cNvSpPr/>
-          <p:nvPr/>
-        </p:nvSpPr>
-        <p:spPr>
-          <a:xfrm>
-            <a:off x="3959352" y="3364992"/>
-            <a:ext cx="411480" cy="475488"/>
+          <p:cNvPr id="32" name="Text 30"/>
+          <p:cNvSpPr/>
+          <p:nvPr/>
+        </p:nvSpPr>
+        <p:spPr>
+          <a:xfrm>
+            <a:off x="3529584" y="3364992"/>
+            <a:ext cx="73152" cy="475488"/>
           </a:xfrm>
           <a:prstGeom prst="rect">
             <a:avLst/>
@@ -31771,14 +33787,14 @@
       </p:sp>
       <p:sp>
         <p:nvSpPr>
-          <p:cNvPr id="29" name="Shape 27"/>
-          <p:cNvSpPr/>
-          <p:nvPr/>
-        </p:nvSpPr>
-        <p:spPr>
-          <a:xfrm>
-            <a:off x="4370832" y="3364992"/>
-            <a:ext cx="1645920" cy="475488"/>
+          <p:cNvPr id="33" name="Shape 31"/>
+          <p:cNvSpPr/>
+          <p:nvPr/>
+        </p:nvSpPr>
+        <p:spPr>
+          <a:xfrm>
+            <a:off x="3602736" y="3364992"/>
+            <a:ext cx="1554480" cy="475488"/>
           </a:xfrm>
           <a:prstGeom prst="rect">
             <a:avLst>
@@ -31798,14 +33814,14 @@
       </p:sp>
       <p:sp>
         <p:nvSpPr>
-          <p:cNvPr id="30" name="Text 28"/>
-          <p:cNvSpPr/>
-          <p:nvPr/>
-        </p:nvSpPr>
-        <p:spPr>
-          <a:xfrm>
-            <a:off x="4370832" y="3364992"/>
-            <a:ext cx="1645920" cy="475488"/>
+          <p:cNvPr id="34" name="Text 32"/>
+          <p:cNvSpPr/>
+          <p:nvPr/>
+        </p:nvSpPr>
+        <p:spPr>
+          <a:xfrm>
+            <a:off x="3602736" y="3364992"/>
+            <a:ext cx="1554480" cy="475488"/>
           </a:xfrm>
           <a:prstGeom prst="rect">
             <a:avLst/>
@@ -31829,7 +33845,7 @@
                 <a:ea typeface="Trebuchet MS" pitchFamily="34" charset="-122"/>
                 <a:cs typeface="Trebuchet MS" pitchFamily="34" charset="-120"/>
               </a:rPr>
-              <a:t>ca</a:t>
+              <a:t>lo</a:t>
             </a:r>
             <a:endParaRPr lang="en-US" sz="1400" dirty="0"/>
           </a:p>
@@ -31837,14 +33853,14 @@
       </p:sp>
       <p:sp>
         <p:nvSpPr>
-          <p:cNvPr id="31" name="Text 29"/>
-          <p:cNvSpPr/>
-          <p:nvPr/>
-        </p:nvSpPr>
-        <p:spPr>
-          <a:xfrm>
-            <a:off x="6016752" y="3364992"/>
-            <a:ext cx="411480" cy="475488"/>
+          <p:cNvPr id="35" name="Text 33"/>
+          <p:cNvSpPr/>
+          <p:nvPr/>
+        </p:nvSpPr>
+        <p:spPr>
+          <a:xfrm>
+            <a:off x="5157216" y="3364992"/>
+            <a:ext cx="73152" cy="475488"/>
           </a:xfrm>
           <a:prstGeom prst="rect">
             <a:avLst/>
@@ -31876,14 +33892,14 @@
       </p:sp>
       <p:sp>
         <p:nvSpPr>
-          <p:cNvPr id="32" name="Shape 30"/>
-          <p:cNvSpPr/>
-          <p:nvPr/>
-        </p:nvSpPr>
-        <p:spPr>
-          <a:xfrm>
-            <a:off x="6428232" y="3364992"/>
-            <a:ext cx="1645920" cy="475488"/>
+          <p:cNvPr id="36" name="Shape 34"/>
+          <p:cNvSpPr/>
+          <p:nvPr/>
+        </p:nvSpPr>
+        <p:spPr>
+          <a:xfrm>
+            <a:off x="5230368" y="3364992"/>
+            <a:ext cx="1554480" cy="475488"/>
           </a:xfrm>
           <a:prstGeom prst="rect">
             <a:avLst>
@@ -31903,14 +33919,14 @@
       </p:sp>
       <p:sp>
         <p:nvSpPr>
-          <p:cNvPr id="33" name="Text 31"/>
-          <p:cNvSpPr/>
-          <p:nvPr/>
-        </p:nvSpPr>
-        <p:spPr>
-          <a:xfrm>
-            <a:off x="6428232" y="3364992"/>
-            <a:ext cx="1645920" cy="475488"/>
+          <p:cNvPr id="37" name="Text 35"/>
+          <p:cNvSpPr/>
+          <p:nvPr/>
+        </p:nvSpPr>
+        <p:spPr>
+          <a:xfrm>
+            <a:off x="5230368" y="3364992"/>
+            <a:ext cx="1554480" cy="475488"/>
           </a:xfrm>
           <a:prstGeom prst="rect">
             <a:avLst/>
@@ -31934,7 +33950,7 @@
                 <a:ea typeface="Trebuchet MS" pitchFamily="34" charset="-122"/>
                 <a:cs typeface="Trebuchet MS" pitchFamily="34" charset="-120"/>
               </a:rPr>
-              <a:t>tion</a:t>
+              <a:t>ca</a:t>
             </a:r>
             <a:endParaRPr lang="en-US" sz="1400" dirty="0"/>
           </a:p>
@@ -31942,7 +33958,112 @@
       </p:sp>
       <p:sp>
         <p:nvSpPr>
-          <p:cNvPr id="34" name="Shape 32"/>
+          <p:cNvPr id="38" name="Text 36"/>
+          <p:cNvSpPr/>
+          <p:nvPr/>
+        </p:nvSpPr>
+        <p:spPr>
+          <a:xfrm>
+            <a:off x="6784848" y="3364992"/>
+            <a:ext cx="73152" cy="475488"/>
+          </a:xfrm>
+          <a:prstGeom prst="rect">
+            <a:avLst/>
+          </a:prstGeom>
+          <a:noFill/>
+          <a:ln/>
+        </p:spPr>
+        <p:txBody>
+          <a:bodyPr wrap="square" lIns="0" tIns="0" rIns="0" bIns="0" rtlCol="0" anchor="ctr"/>
+          <a:lstStyle/>
+          <a:p>
+            <a:pPr algn="ctr" indent="0" marL="0">
+              <a:buNone/>
+            </a:pPr>
+            <a:r>
+              <a:rPr lang="en-US" sz="1600" b="1" dirty="0">
+                <a:solidFill>
+                  <a:srgbClr val="0D9488"/>
+                </a:solidFill>
+                <a:latin typeface="Trebuchet MS" pitchFamily="34" charset="0"/>
+                <a:ea typeface="Trebuchet MS" pitchFamily="34" charset="-122"/>
+                <a:cs typeface="Trebuchet MS" pitchFamily="34" charset="-120"/>
+              </a:rPr>
+              <a:t>·</a:t>
+            </a:r>
+            <a:endParaRPr lang="en-US" sz="1600" dirty="0"/>
+          </a:p>
+        </p:txBody>
+      </p:sp>
+      <p:sp>
+        <p:nvSpPr>
+          <p:cNvPr id="39" name="Shape 37"/>
+          <p:cNvSpPr/>
+          <p:nvPr/>
+        </p:nvSpPr>
+        <p:spPr>
+          <a:xfrm>
+            <a:off x="6858000" y="3364992"/>
+            <a:ext cx="1554480" cy="475488"/>
+          </a:xfrm>
+          <a:prstGeom prst="rect">
+            <a:avLst>
+              <a:gd name="adj" fmla="val 9615"/>
+            </a:avLst>
+          </a:prstGeom>
+          <a:solidFill>
+            <a:srgbClr val="FFFFFF"/>
+          </a:solidFill>
+          <a:ln w="12700">
+            <a:solidFill>
+              <a:srgbClr val="0D9488"/>
+            </a:solidFill>
+            <a:prstDash val="solid"/>
+          </a:ln>
+        </p:spPr>
+      </p:sp>
+      <p:sp>
+        <p:nvSpPr>
+          <p:cNvPr id="40" name="Text 38"/>
+          <p:cNvSpPr/>
+          <p:nvPr/>
+        </p:nvSpPr>
+        <p:spPr>
+          <a:xfrm>
+            <a:off x="6858000" y="3364992"/>
+            <a:ext cx="1554480" cy="475488"/>
+          </a:xfrm>
+          <a:prstGeom prst="rect">
+            <a:avLst/>
+          </a:prstGeom>
+          <a:noFill/>
+          <a:ln/>
+        </p:spPr>
+        <p:txBody>
+          <a:bodyPr wrap="square" lIns="0" tIns="0" rIns="0" bIns="0" rtlCol="0" anchor="ctr"/>
+          <a:lstStyle/>
+          <a:p>
+            <a:pPr algn="ctr" indent="0" marL="0">
+              <a:buNone/>
+            </a:pPr>
+            <a:r>
+              <a:rPr lang="en-US" sz="1400" b="1" dirty="0">
+                <a:solidFill>
+                  <a:srgbClr val="0D9488"/>
+                </a:solidFill>
+                <a:latin typeface="Trebuchet MS" pitchFamily="34" charset="0"/>
+                <a:ea typeface="Trebuchet MS" pitchFamily="34" charset="-122"/>
+                <a:cs typeface="Trebuchet MS" pitchFamily="34" charset="-120"/>
+              </a:rPr>
+              <a:t>ted</a:t>
+            </a:r>
+            <a:endParaRPr lang="en-US" sz="1400" dirty="0"/>
+          </a:p>
+        </p:txBody>
+      </p:sp>
+      <p:sp>
+        <p:nvSpPr>
+          <p:cNvPr id="41" name="Shape 39"/>
           <p:cNvSpPr/>
           <p:nvPr/>
         </p:nvSpPr>
@@ -31969,7 +34090,7 @@
       </p:sp>
       <p:sp>
         <p:nvSpPr>
-          <p:cNvPr id="35" name="Text 33"/>
+          <p:cNvPr id="42" name="Text 40"/>
           <p:cNvSpPr/>
           <p:nvPr/>
         </p:nvSpPr>
@@ -32008,7 +34129,7 @@
       </p:sp>
       <p:sp>
         <p:nvSpPr>
-          <p:cNvPr id="36" name="Shape 34"/>
+          <p:cNvPr id="43" name="Shape 41"/>
           <p:cNvSpPr/>
           <p:nvPr/>
         </p:nvSpPr>
@@ -32035,7 +34156,7 @@
       </p:sp>
       <p:sp>
         <p:nvSpPr>
-          <p:cNvPr id="37" name="Shape 35"/>
+          <p:cNvPr id="44" name="Shape 42"/>
           <p:cNvSpPr/>
           <p:nvPr/>
         </p:nvSpPr>
@@ -32062,7 +34183,7 @@
       </p:sp>
       <p:sp>
         <p:nvSpPr>
-          <p:cNvPr id="38" name="Text 36"/>
+          <p:cNvPr id="45" name="Text 43"/>
           <p:cNvSpPr/>
           <p:nvPr/>
         </p:nvSpPr>
@@ -32093,7 +34214,7 @@
                 <a:ea typeface="Trebuchet MS" pitchFamily="34" charset="-122"/>
                 <a:cs typeface="Trebuchet MS" pitchFamily="34" charset="-120"/>
               </a:rPr>
-              <a:t>l</a:t>
+              <a:t>a</a:t>
             </a:r>
             <a:endParaRPr lang="en-US" sz="900" dirty="0"/>
           </a:p>
@@ -32101,7 +34222,7 @@
       </p:sp>
       <p:sp>
         <p:nvSpPr>
-          <p:cNvPr id="39" name="Shape 37"/>
+          <p:cNvPr id="46" name="Shape 44"/>
           <p:cNvSpPr/>
           <p:nvPr/>
         </p:nvSpPr>
@@ -32128,7 +34249,7 @@
       </p:sp>
       <p:sp>
         <p:nvSpPr>
-          <p:cNvPr id="40" name="Text 38"/>
+          <p:cNvPr id="47" name="Text 45"/>
           <p:cNvSpPr/>
           <p:nvPr/>
         </p:nvSpPr>
@@ -32159,7 +34280,7 @@
                 <a:ea typeface="Trebuchet MS" pitchFamily="34" charset="-122"/>
                 <a:cs typeface="Trebuchet MS" pitchFamily="34" charset="-120"/>
               </a:rPr>
-              <a:t>o</a:t>
+              <a:t>ll</a:t>
             </a:r>
             <a:endParaRPr lang="en-US" sz="900" dirty="0"/>
           </a:p>
@@ -32167,7 +34288,7 @@
       </p:sp>
       <p:sp>
         <p:nvSpPr>
-          <p:cNvPr id="41" name="Shape 39"/>
+          <p:cNvPr id="48" name="Shape 46"/>
           <p:cNvSpPr/>
           <p:nvPr/>
         </p:nvSpPr>
@@ -32194,7 +34315,7 @@
       </p:sp>
       <p:sp>
         <p:nvSpPr>
-          <p:cNvPr id="42" name="Text 40"/>
+          <p:cNvPr id="49" name="Text 47"/>
           <p:cNvSpPr/>
           <p:nvPr/>
         </p:nvSpPr>
@@ -32225,6 +34346,72 @@
                 <a:ea typeface="Trebuchet MS" pitchFamily="34" charset="-122"/>
                 <a:cs typeface="Trebuchet MS" pitchFamily="34" charset="-120"/>
               </a:rPr>
+              <a:t>o</a:t>
+            </a:r>
+            <a:endParaRPr lang="en-US" sz="900" dirty="0"/>
+          </a:p>
+        </p:txBody>
+      </p:sp>
+      <p:sp>
+        <p:nvSpPr>
+          <p:cNvPr id="50" name="Shape 48"/>
+          <p:cNvSpPr/>
+          <p:nvPr/>
+        </p:nvSpPr>
+        <p:spPr>
+          <a:xfrm>
+            <a:off x="4850892" y="4169664"/>
+            <a:ext cx="685800" cy="384048"/>
+          </a:xfrm>
+          <a:prstGeom prst="rect">
+            <a:avLst>
+              <a:gd name="adj" fmla="val 9524"/>
+            </a:avLst>
+          </a:prstGeom>
+          <a:solidFill>
+            <a:srgbClr val="FFFFFF"/>
+          </a:solidFill>
+          <a:ln w="12700">
+            <a:solidFill>
+              <a:srgbClr val="DB2777"/>
+            </a:solidFill>
+            <a:prstDash val="solid"/>
+          </a:ln>
+        </p:spPr>
+      </p:sp>
+      <p:sp>
+        <p:nvSpPr>
+          <p:cNvPr id="51" name="Text 49"/>
+          <p:cNvSpPr/>
+          <p:nvPr/>
+        </p:nvSpPr>
+        <p:spPr>
+          <a:xfrm>
+            <a:off x="4850892" y="4169664"/>
+            <a:ext cx="685800" cy="384048"/>
+          </a:xfrm>
+          <a:prstGeom prst="rect">
+            <a:avLst/>
+          </a:prstGeom>
+          <a:noFill/>
+          <a:ln/>
+        </p:spPr>
+        <p:txBody>
+          <a:bodyPr wrap="square" lIns="0" tIns="0" rIns="0" bIns="0" rtlCol="0" anchor="ctr"/>
+          <a:lstStyle/>
+          <a:p>
+            <a:pPr algn="ctr" indent="0" marL="0">
+              <a:buNone/>
+            </a:pPr>
+            <a:r>
+              <a:rPr lang="en-US" sz="900" b="1" dirty="0">
+                <a:solidFill>
+                  <a:srgbClr val="9D174D"/>
+                </a:solidFill>
+                <a:latin typeface="Trebuchet MS" pitchFamily="34" charset="0"/>
+                <a:ea typeface="Trebuchet MS" pitchFamily="34" charset="-122"/>
+                <a:cs typeface="Trebuchet MS" pitchFamily="34" charset="-120"/>
+              </a:rPr>
               <a:t>c</a:t>
             </a:r>
             <a:endParaRPr lang="en-US" sz="900" dirty="0"/>
@@ -32233,13 +34420,13 @@
       </p:sp>
       <p:sp>
         <p:nvSpPr>
-          <p:cNvPr id="43" name="Text 41"/>
-          <p:cNvSpPr/>
-          <p:nvPr/>
-        </p:nvSpPr>
-        <p:spPr>
-          <a:xfrm>
-            <a:off x="3942207" y="4572000"/>
+          <p:cNvPr id="52" name="Text 50"/>
+          <p:cNvSpPr/>
+          <p:nvPr/>
+        </p:nvSpPr>
+        <p:spPr>
+          <a:xfrm>
+            <a:off x="4850892" y="4572000"/>
             <a:ext cx="685800" cy="219456"/>
           </a:xfrm>
           <a:prstGeom prst="rect">
@@ -32272,13 +34459,13 @@
       </p:sp>
       <p:sp>
         <p:nvSpPr>
-          <p:cNvPr id="44" name="Shape 42"/>
-          <p:cNvSpPr/>
-          <p:nvPr/>
-        </p:nvSpPr>
-        <p:spPr>
-          <a:xfrm>
-            <a:off x="4850892" y="4169664"/>
+          <p:cNvPr id="53" name="Shape 51"/>
+          <p:cNvSpPr/>
+          <p:nvPr/>
+        </p:nvSpPr>
+        <p:spPr>
+          <a:xfrm>
+            <a:off x="5759577" y="4169664"/>
             <a:ext cx="685800" cy="384048"/>
           </a:xfrm>
           <a:prstGeom prst="rect">
@@ -32299,13 +34486,13 @@
       </p:sp>
       <p:sp>
         <p:nvSpPr>
-          <p:cNvPr id="45" name="Text 43"/>
-          <p:cNvSpPr/>
-          <p:nvPr/>
-        </p:nvSpPr>
-        <p:spPr>
-          <a:xfrm>
-            <a:off x="4850892" y="4169664"/>
+          <p:cNvPr id="54" name="Text 52"/>
+          <p:cNvSpPr/>
+          <p:nvPr/>
+        </p:nvSpPr>
+        <p:spPr>
+          <a:xfrm>
+            <a:off x="5759577" y="4169664"/>
             <a:ext cx="685800" cy="384048"/>
           </a:xfrm>
           <a:prstGeom prst="rect">
@@ -32338,13 +34525,13 @@
       </p:sp>
       <p:sp>
         <p:nvSpPr>
-          <p:cNvPr id="46" name="Shape 44"/>
-          <p:cNvSpPr/>
-          <p:nvPr/>
-        </p:nvSpPr>
-        <p:spPr>
-          <a:xfrm>
-            <a:off x="5759577" y="4169664"/>
+          <p:cNvPr id="55" name="Shape 53"/>
+          <p:cNvSpPr/>
+          <p:nvPr/>
+        </p:nvSpPr>
+        <p:spPr>
+          <a:xfrm>
+            <a:off x="6668262" y="4169664"/>
             <a:ext cx="685800" cy="384048"/>
           </a:xfrm>
           <a:prstGeom prst="rect">
@@ -32365,13 +34552,13 @@
       </p:sp>
       <p:sp>
         <p:nvSpPr>
-          <p:cNvPr id="47" name="Text 45"/>
-          <p:cNvSpPr/>
-          <p:nvPr/>
-        </p:nvSpPr>
-        <p:spPr>
-          <a:xfrm>
-            <a:off x="5759577" y="4169664"/>
+          <p:cNvPr id="56" name="Text 54"/>
+          <p:cNvSpPr/>
+          <p:nvPr/>
+        </p:nvSpPr>
+        <p:spPr>
+          <a:xfrm>
+            <a:off x="6668262" y="4169664"/>
             <a:ext cx="685800" cy="384048"/>
           </a:xfrm>
           <a:prstGeom prst="rect">
@@ -32404,52 +34591,13 @@
       </p:sp>
       <p:sp>
         <p:nvSpPr>
-          <p:cNvPr id="48" name="Text 46"/>
-          <p:cNvSpPr/>
-          <p:nvPr/>
-        </p:nvSpPr>
-        <p:spPr>
-          <a:xfrm>
-            <a:off x="5759577" y="4572000"/>
-            <a:ext cx="685800" cy="219456"/>
-          </a:xfrm>
-          <a:prstGeom prst="rect">
-            <a:avLst/>
-          </a:prstGeom>
-          <a:noFill/>
-          <a:ln/>
-        </p:spPr>
-        <p:txBody>
-          <a:bodyPr wrap="square" lIns="0" tIns="0" rIns="0" bIns="0" rtlCol="0" anchor="t"/>
-          <a:lstStyle/>
-          <a:p>
-            <a:pPr algn="ctr" indent="0" marL="0">
-              <a:buNone/>
-            </a:pPr>
-            <a:r>
-              <a:rPr lang="en-US" sz="750" i="1" dirty="0">
-                <a:solidFill>
-                  <a:srgbClr val="94A3B8"/>
-                </a:solidFill>
-                <a:latin typeface="Calibri" pitchFamily="34" charset="0"/>
-                <a:ea typeface="Calibri" pitchFamily="34" charset="-122"/>
-                <a:cs typeface="Calibri" pitchFamily="34" charset="-120"/>
-              </a:rPr>
-              <a:t>/sh/</a:t>
-            </a:r>
-            <a:endParaRPr lang="en-US" sz="750" dirty="0"/>
-          </a:p>
-        </p:txBody>
-      </p:sp>
-      <p:sp>
-        <p:nvSpPr>
-          <p:cNvPr id="49" name="Shape 47"/>
-          <p:cNvSpPr/>
-          <p:nvPr/>
-        </p:nvSpPr>
-        <p:spPr>
-          <a:xfrm>
-            <a:off x="6668262" y="4169664"/>
+          <p:cNvPr id="57" name="Shape 55"/>
+          <p:cNvSpPr/>
+          <p:nvPr/>
+        </p:nvSpPr>
+        <p:spPr>
+          <a:xfrm>
+            <a:off x="7576947" y="4169664"/>
             <a:ext cx="685800" cy="384048"/>
           </a:xfrm>
           <a:prstGeom prst="rect">
@@ -32470,13 +34618,13 @@
       </p:sp>
       <p:sp>
         <p:nvSpPr>
-          <p:cNvPr id="50" name="Text 48"/>
-          <p:cNvSpPr/>
-          <p:nvPr/>
-        </p:nvSpPr>
-        <p:spPr>
-          <a:xfrm>
-            <a:off x="6668262" y="4169664"/>
+          <p:cNvPr id="58" name="Text 56"/>
+          <p:cNvSpPr/>
+          <p:nvPr/>
+        </p:nvSpPr>
+        <p:spPr>
+          <a:xfrm>
+            <a:off x="7576947" y="4169664"/>
             <a:ext cx="685800" cy="384048"/>
           </a:xfrm>
           <a:prstGeom prst="rect">
@@ -32501,73 +34649,7 @@
                 <a:ea typeface="Trebuchet MS" pitchFamily="34" charset="-122"/>
                 <a:cs typeface="Trebuchet MS" pitchFamily="34" charset="-120"/>
               </a:rPr>
-              <a:t>io</a:t>
-            </a:r>
-            <a:endParaRPr lang="en-US" sz="900" dirty="0"/>
-          </a:p>
-        </p:txBody>
-      </p:sp>
-      <p:sp>
-        <p:nvSpPr>
-          <p:cNvPr id="51" name="Shape 49"/>
-          <p:cNvSpPr/>
-          <p:nvPr/>
-        </p:nvSpPr>
-        <p:spPr>
-          <a:xfrm>
-            <a:off x="7576947" y="4169664"/>
-            <a:ext cx="685800" cy="384048"/>
-          </a:xfrm>
-          <a:prstGeom prst="rect">
-            <a:avLst>
-              <a:gd name="adj" fmla="val 9524"/>
-            </a:avLst>
-          </a:prstGeom>
-          <a:solidFill>
-            <a:srgbClr val="FFFFFF"/>
-          </a:solidFill>
-          <a:ln w="12700">
-            <a:solidFill>
-              <a:srgbClr val="DB2777"/>
-            </a:solidFill>
-            <a:prstDash val="solid"/>
-          </a:ln>
-        </p:spPr>
-      </p:sp>
-      <p:sp>
-        <p:nvSpPr>
-          <p:cNvPr id="52" name="Text 50"/>
-          <p:cNvSpPr/>
-          <p:nvPr/>
-        </p:nvSpPr>
-        <p:spPr>
-          <a:xfrm>
-            <a:off x="7576947" y="4169664"/>
-            <a:ext cx="685800" cy="384048"/>
-          </a:xfrm>
-          <a:prstGeom prst="rect">
-            <a:avLst/>
-          </a:prstGeom>
-          <a:noFill/>
-          <a:ln/>
-        </p:spPr>
-        <p:txBody>
-          <a:bodyPr wrap="square" lIns="0" tIns="0" rIns="0" bIns="0" rtlCol="0" anchor="ctr"/>
-          <a:lstStyle/>
-          <a:p>
-            <a:pPr algn="ctr" indent="0" marL="0">
-              <a:buNone/>
-            </a:pPr>
-            <a:r>
-              <a:rPr lang="en-US" sz="900" b="1" dirty="0">
-                <a:solidFill>
-                  <a:srgbClr val="9D174D"/>
-                </a:solidFill>
-                <a:latin typeface="Trebuchet MS" pitchFamily="34" charset="0"/>
-                <a:ea typeface="Trebuchet MS" pitchFamily="34" charset="-122"/>
-                <a:cs typeface="Trebuchet MS" pitchFamily="34" charset="-120"/>
-              </a:rPr>
-              <a:t>n</a:t>
+              <a:t>ed</a:t>
             </a:r>
             <a:endParaRPr lang="en-US" sz="900" dirty="0"/>
           </a:p>
@@ -32859,7 +34941,7 @@
                 <a:ea typeface="Calibri" pitchFamily="34" charset="-122"/>
                 <a:cs typeface="Calibri" pitchFamily="34" charset="-120"/>
               </a:rPr>
-              <a:t>Word Labs  •  wordlabs.app  •  Root: 'locate' = to find or place something</a:t>
+              <a:t>Word Labs  •  wordlabs.app  •  Root: 'locate' = to find or place</a:t>
             </a:r>
             <a:endParaRPr lang="en-US" sz="800" dirty="0"/>
           </a:p>
@@ -34028,7 +36110,7 @@
                 <a:ea typeface="Calibri" pitchFamily="34" charset="-122"/>
                 <a:cs typeface="Calibri" pitchFamily="34" charset="-120"/>
               </a:rPr>
-              <a:t>Word Labs  •  wordlabs.app  •  Root: 'locate' = to find or place something</a:t>
+              <a:t>Word Labs  •  wordlabs.app  •  Root: 'locate' = to find or place</a:t>
             </a:r>
             <a:endParaRPr lang="en-US" sz="800" dirty="0"/>
           </a:p>
@@ -34674,7 +36756,7 @@
                 <a:ea typeface="Trebuchet MS" pitchFamily="34" charset="-122"/>
                 <a:cs typeface="Trebuchet MS" pitchFamily="34" charset="-120"/>
               </a:rPr>
-              <a:t>trans-</a:t>
+              <a:t>mis-</a:t>
             </a:r>
             <a:endParaRPr lang="en-US" sz="1300" dirty="0"/>
           </a:p>
@@ -34980,7 +37062,7 @@
                 <a:ea typeface="Trebuchet MS" pitchFamily="34" charset="-122"/>
                 <a:cs typeface="Trebuchet MS" pitchFamily="34" charset="-120"/>
               </a:rPr>
-              <a:t>de-</a:t>
+              <a:t>co-</a:t>
             </a:r>
             <a:endParaRPr lang="en-US" sz="1300" dirty="0"/>
           </a:p>
@@ -35174,7 +37256,7 @@
                 <a:ea typeface="Trebuchet MS" pitchFamily="34" charset="-122"/>
                 <a:cs typeface="Trebuchet MS" pitchFamily="34" charset="-120"/>
               </a:rPr>
-              <a:t>relocate</a:t>
+              <a:t>location</a:t>
             </a:r>
             <a:endParaRPr lang="en-US" sz="1200" dirty="0"/>
           </a:p>
@@ -35240,7 +37322,7 @@
                 <a:ea typeface="Trebuchet MS" pitchFamily="34" charset="-122"/>
                 <a:cs typeface="Trebuchet MS" pitchFamily="34" charset="-120"/>
               </a:rPr>
-              <a:t>dislocate</a:t>
+              <a:t>relocate</a:t>
             </a:r>
             <a:endParaRPr lang="en-US" sz="1200" dirty="0"/>
           </a:p>
@@ -35306,7 +37388,7 @@
                 <a:ea typeface="Trebuchet MS" pitchFamily="34" charset="-122"/>
                 <a:cs typeface="Trebuchet MS" pitchFamily="34" charset="-120"/>
               </a:rPr>
-              <a:t>location</a:t>
+              <a:t>dislocate</a:t>
             </a:r>
             <a:endParaRPr lang="en-US" sz="1200" dirty="0"/>
           </a:p>
@@ -35438,7 +37520,7 @@
                 <a:ea typeface="Trebuchet MS" pitchFamily="34" charset="-122"/>
                 <a:cs typeface="Trebuchet MS" pitchFamily="34" charset="-120"/>
               </a:rPr>
-              <a:t>translocation</a:t>
+              <a:t>relocation</a:t>
             </a:r>
             <a:endParaRPr lang="en-US" sz="1200" dirty="0"/>
           </a:p>
@@ -35504,7 +37586,7 @@
                 <a:ea typeface="Trebuchet MS" pitchFamily="34" charset="-122"/>
                 <a:cs typeface="Trebuchet MS" pitchFamily="34" charset="-120"/>
               </a:rPr>
-              <a:t>located</a:t>
+              <a:t>locator</a:t>
             </a:r>
             <a:endParaRPr lang="en-US" sz="1200" dirty="0"/>
           </a:p>
@@ -35570,7 +37652,7 @@
                 <a:ea typeface="Trebuchet MS" pitchFamily="34" charset="-122"/>
                 <a:cs typeface="Trebuchet MS" pitchFamily="34" charset="-120"/>
               </a:rPr>
-              <a:t>locator</a:t>
+              <a:t>allocated</a:t>
             </a:r>
             <a:endParaRPr lang="en-US" sz="1200" dirty="0"/>
           </a:p>
@@ -35636,7 +37718,7 @@
                 <a:ea typeface="Trebuchet MS" pitchFamily="34" charset="-122"/>
                 <a:cs typeface="Trebuchet MS" pitchFamily="34" charset="-120"/>
               </a:rPr>
-              <a:t>relocating</a:t>
+              <a:t>collocate</a:t>
             </a:r>
             <a:endParaRPr lang="en-US" sz="1200" dirty="0"/>
           </a:p>
@@ -35928,7 +38010,7 @@
                 <a:ea typeface="Calibri" pitchFamily="34" charset="-122"/>
                 <a:cs typeface="Calibri" pitchFamily="34" charset="-120"/>
               </a:rPr>
-              <a:t>Word Labs  •  wordlabs.app  •  Root: 'locate' = to find or place something</a:t>
+              <a:t>Word Labs  •  wordlabs.app  •  Root: 'locate' = to find or place</a:t>
             </a:r>
             <a:endParaRPr lang="en-US" sz="800" dirty="0"/>
           </a:p>
@@ -36092,7 +38174,7 @@
                 <a:ea typeface="Calibri" pitchFamily="34" charset="-122"/>
                 <a:cs typeface="Calibri" pitchFamily="34" charset="-120"/>
               </a:rPr>
-              <a:t>The core part of a word carrying its basic meaning. For example, 'locate' means 'to find or place something'.</a:t>
+              <a:t>The core part of a word carrying its basic meaning. For example, 'locate' means 'to find or place'.</a:t>
             </a:r>
             <a:endParaRPr lang="en-US" sz="1350" dirty="0"/>
           </a:p>
@@ -36712,7 +38794,7 @@
                 <a:ea typeface="Calibri" pitchFamily="34" charset="-122"/>
                 <a:cs typeface="Calibri" pitchFamily="34" charset="-120"/>
               </a:rPr>
-              <a:t>Word Labs  •  wordlabs.app  •  Root: 'locate' = to find or place something</a:t>
+              <a:t>Word Labs  •  wordlabs.app  •  Root: 'locate' = to find or place</a:t>
             </a:r>
             <a:endParaRPr lang="en-US" sz="800" dirty="0"/>
           </a:p>
@@ -36824,7 +38906,7 @@
                 <a:ea typeface="Calibri" pitchFamily="34" charset="-122"/>
                 <a:cs typeface="Calibri" pitchFamily="34" charset="-120"/>
               </a:rPr>
-              <a:t>1.  The root 'locate' comes from a Latin word meaning to place or find.</a:t>
+              <a:t>1.  The word 'dislocate' means to find something that was lost.</a:t>
             </a:r>
             <a:endParaRPr lang="en-US" sz="1300" dirty="0"/>
           </a:p>
@@ -36847,11 +38929,11 @@
             </a:avLst>
           </a:prstGeom>
           <a:solidFill>
-            <a:srgbClr val="DCFCE7"/>
-          </a:solidFill>
-          <a:ln w="12700">
-            <a:solidFill>
-              <a:srgbClr val="16A34A"/>
+            <a:srgbClr val="FEE2E2"/>
+          </a:solidFill>
+          <a:ln w="12700">
+            <a:solidFill>
+              <a:srgbClr val="DC2626"/>
             </a:solidFill>
             <a:prstDash val="solid"/>
           </a:ln>
@@ -36884,13 +38966,13 @@
             <a:r>
               <a:rPr lang="en-US" sz="1100" b="1" dirty="0">
                 <a:solidFill>
-                  <a:srgbClr val="16A34A"/>
+                  <a:srgbClr val="DC2626"/>
                 </a:solidFill>
                 <a:latin typeface="Trebuchet MS" pitchFamily="34" charset="0"/>
                 <a:ea typeface="Trebuchet MS" pitchFamily="34" charset="-122"/>
                 <a:cs typeface="Trebuchet MS" pitchFamily="34" charset="-120"/>
               </a:rPr>
-              <a:t>TRUE</a:t>
+              <a:t>FALSE</a:t>
             </a:r>
             <a:endParaRPr lang="en-US" sz="1100" dirty="0"/>
           </a:p>
@@ -36963,7 +39045,7 @@
                 <a:ea typeface="Calibri" pitchFamily="34" charset="-122"/>
                 <a:cs typeface="Calibri" pitchFamily="34" charset="-120"/>
               </a:rPr>
-              <a:t>2.  The word 'dislocate' means to move something to a better location.</a:t>
+              <a:t>2.  The root 'locate' comes from a Latin word meaning to place or put.</a:t>
             </a:r>
             <a:endParaRPr lang="en-US" sz="1300" dirty="0"/>
           </a:p>
@@ -36986,11 +39068,11 @@
             </a:avLst>
           </a:prstGeom>
           <a:solidFill>
-            <a:srgbClr val="FEE2E2"/>
-          </a:solidFill>
-          <a:ln w="12700">
-            <a:solidFill>
-              <a:srgbClr val="DC2626"/>
+            <a:srgbClr val="DCFCE7"/>
+          </a:solidFill>
+          <a:ln w="12700">
+            <a:solidFill>
+              <a:srgbClr val="16A34A"/>
             </a:solidFill>
             <a:prstDash val="solid"/>
           </a:ln>
@@ -37023,13 +39105,13 @@
             <a:r>
               <a:rPr lang="en-US" sz="1100" b="1" dirty="0">
                 <a:solidFill>
-                  <a:srgbClr val="DC2626"/>
+                  <a:srgbClr val="16A34A"/>
                 </a:solidFill>
                 <a:latin typeface="Trebuchet MS" pitchFamily="34" charset="0"/>
                 <a:ea typeface="Trebuchet MS" pitchFamily="34" charset="-122"/>
                 <a:cs typeface="Trebuchet MS" pitchFamily="34" charset="-120"/>
               </a:rPr>
-              <a:t>FALSE</a:t>
+              <a:t>TRUE</a:t>
             </a:r>
             <a:endParaRPr lang="en-US" sz="1100" dirty="0"/>
           </a:p>
@@ -37102,7 +39184,7 @@
                 <a:ea typeface="Calibri" pitchFamily="34" charset="-122"/>
                 <a:cs typeface="Calibri" pitchFamily="34" charset="-120"/>
               </a:rPr>
-              <a:t>3.  A 'locator' is something that helps you find where something is.</a:t>
+              <a:t>3.  Adding the prefix 're-' to 'locate' makes the word 'relocate', meaning to move to a new place.</a:t>
             </a:r>
             <a:endParaRPr lang="en-US" sz="1300" dirty="0"/>
           </a:p>
@@ -37241,7 +39323,7 @@
                 <a:ea typeface="Calibri" pitchFamily="34" charset="-122"/>
                 <a:cs typeface="Calibri" pitchFamily="34" charset="-120"/>
               </a:rPr>
-              <a:t>4.  The word 'relocate' contains the prefix 're-' meaning again.</a:t>
+              <a:t>4.  The suffix '-ion' can be added to 'locate' to make the noun 'location'.</a:t>
             </a:r>
             <a:endParaRPr lang="en-US" sz="1300" dirty="0"/>
           </a:p>
@@ -37380,7 +39462,7 @@
                 <a:ea typeface="Calibri" pitchFamily="34" charset="-122"/>
                 <a:cs typeface="Calibri" pitchFamily="34" charset="-120"/>
               </a:rPr>
-              <a:t>5.  The root 'locate' comes from a Greek word.</a:t>
+              <a:t>5.  The root 'locate' originally comes from a Greek word.</a:t>
             </a:r>
             <a:endParaRPr lang="en-US" sz="1300" dirty="0"/>
           </a:p>
@@ -37738,7 +39820,7 @@
                 <a:ea typeface="Calibri" pitchFamily="34" charset="-122"/>
                 <a:cs typeface="Calibri" pitchFamily="34" charset="-120"/>
               </a:rPr>
-              <a:t>Word Labs  •  wordlabs.app  •  Root: 'locate' = to find or place something</a:t>
+              <a:t>Word Labs  •  wordlabs.app  •  Root: 'locate' = to find or place</a:t>
             </a:r>
             <a:endParaRPr lang="en-US" sz="800" dirty="0"/>
           </a:p>
@@ -37875,7 +39957,7 @@
                 <a:ea typeface="Trebuchet MS" pitchFamily="34" charset="-122"/>
                 <a:cs typeface="Trebuchet MS" pitchFamily="34" charset="-120"/>
               </a:rPr>
-              <a:t>to find or place something</a:t>
+              <a:t>to find or place</a:t>
             </a:r>
             <a:endParaRPr lang="en-US" sz="2000" dirty="0"/>
           </a:p>
@@ -38019,7 +40101,7 @@
                 <a:ea typeface="Trebuchet MS" pitchFamily="34" charset="-122"/>
                 <a:cs typeface="Trebuchet MS" pitchFamily="34" charset="-120"/>
               </a:rPr>
-              <a:t>relocate</a:t>
+              <a:t>location</a:t>
             </a:r>
             <a:endParaRPr lang="en-US" sz="1300" dirty="0"/>
           </a:p>
@@ -38085,7 +40167,7 @@
                 <a:ea typeface="Trebuchet MS" pitchFamily="34" charset="-122"/>
                 <a:cs typeface="Trebuchet MS" pitchFamily="34" charset="-120"/>
               </a:rPr>
-              <a:t>dislocate</a:t>
+              <a:t>relocate</a:t>
             </a:r>
             <a:endParaRPr lang="en-US" sz="1300" dirty="0"/>
           </a:p>
@@ -38151,7 +40233,7 @@
                 <a:ea typeface="Trebuchet MS" pitchFamily="34" charset="-122"/>
                 <a:cs typeface="Trebuchet MS" pitchFamily="34" charset="-120"/>
               </a:rPr>
-              <a:t>location</a:t>
+              <a:t>dislocate</a:t>
             </a:r>
             <a:endParaRPr lang="en-US" sz="1300" dirty="0"/>
           </a:p>
@@ -38283,7 +40365,7 @@
                 <a:ea typeface="Trebuchet MS" pitchFamily="34" charset="-122"/>
                 <a:cs typeface="Trebuchet MS" pitchFamily="34" charset="-120"/>
               </a:rPr>
-              <a:t>translocation</a:t>
+              <a:t>relocation</a:t>
             </a:r>
             <a:endParaRPr lang="en-US" sz="1300" dirty="0"/>
           </a:p>
@@ -38349,7 +40431,7 @@
                 <a:ea typeface="Trebuchet MS" pitchFamily="34" charset="-122"/>
                 <a:cs typeface="Trebuchet MS" pitchFamily="34" charset="-120"/>
               </a:rPr>
-              <a:t>located</a:t>
+              <a:t>locator</a:t>
             </a:r>
             <a:endParaRPr lang="en-US" sz="1300" dirty="0"/>
           </a:p>
@@ -38415,7 +40497,7 @@
                 <a:ea typeface="Trebuchet MS" pitchFamily="34" charset="-122"/>
                 <a:cs typeface="Trebuchet MS" pitchFamily="34" charset="-120"/>
               </a:rPr>
-              <a:t>locator</a:t>
+              <a:t>allocated</a:t>
             </a:r>
             <a:endParaRPr lang="en-US" sz="1300" dirty="0"/>
           </a:p>
@@ -38707,7 +40789,7 @@
                 <a:ea typeface="Calibri" pitchFamily="34" charset="-122"/>
                 <a:cs typeface="Calibri" pitchFamily="34" charset="-120"/>
               </a:rPr>
-              <a:t>Word Labs  •  wordlabs.app  •  Root: 'locate' = to find or place something</a:t>
+              <a:t>Word Labs  •  wordlabs.app  •  Root: 'locate' = to find or place</a:t>
             </a:r>
             <a:endParaRPr lang="en-US" sz="800" dirty="0"/>
           </a:p>
@@ -39353,7 +41435,7 @@
                 <a:ea typeface="Trebuchet MS" pitchFamily="34" charset="-122"/>
                 <a:cs typeface="Trebuchet MS" pitchFamily="34" charset="-120"/>
               </a:rPr>
-              <a:t>trans-</a:t>
+              <a:t>mis-</a:t>
             </a:r>
             <a:endParaRPr lang="en-US" sz="1300" dirty="0"/>
           </a:p>
@@ -39659,7 +41741,7 @@
                 <a:ea typeface="Trebuchet MS" pitchFamily="34" charset="-122"/>
                 <a:cs typeface="Trebuchet MS" pitchFamily="34" charset="-120"/>
               </a:rPr>
-              <a:t>de-</a:t>
+              <a:t>co-</a:t>
             </a:r>
             <a:endParaRPr lang="en-US" sz="1300" dirty="0"/>
           </a:p>
@@ -40189,7 +42271,7 @@
                 <a:ea typeface="Trebuchet MS" pitchFamily="34" charset="-122"/>
                 <a:cs typeface="Trebuchet MS" pitchFamily="34" charset="-120"/>
               </a:rPr>
-              <a:t>relocate</a:t>
+              <a:t>location</a:t>
             </a:r>
             <a:endParaRPr lang="en-US" sz="1400" dirty="0"/>
           </a:p>
@@ -40481,7 +42563,7 @@
                 <a:ea typeface="Calibri" pitchFamily="34" charset="-122"/>
                 <a:cs typeface="Calibri" pitchFamily="34" charset="-120"/>
               </a:rPr>
-              <a:t>Word Labs  •  wordlabs.app  •  Root: 'locate' = to find or place something</a:t>
+              <a:t>Word Labs  •  wordlabs.app  •  Root: 'locate' = to find or place</a:t>
             </a:r>
             <a:endParaRPr lang="en-US" sz="800" dirty="0"/>
           </a:p>
@@ -40593,7 +42675,7 @@
                 <a:ea typeface="Trebuchet MS" pitchFamily="34" charset="-122"/>
                 <a:cs typeface="Trebuchet MS" pitchFamily="34" charset="-120"/>
               </a:rPr>
-              <a:t>relocate</a:t>
+              <a:t>location</a:t>
             </a:r>
             <a:endParaRPr lang="en-US" sz="1200" dirty="0"/>
           </a:p>
@@ -40659,7 +42741,7 @@
                 <a:ea typeface="Calibri" pitchFamily="34" charset="-122"/>
                 <a:cs typeface="Calibri" pitchFamily="34" charset="-120"/>
               </a:rPr>
-              <a:t>To move to a new place or find a new position for something.</a:t>
+              <a:t>The place where something is found or situated.</a:t>
             </a:r>
             <a:endParaRPr lang="en-US" sz="1200" dirty="0"/>
           </a:p>
@@ -40732,7 +42814,7 @@
                 <a:ea typeface="Trebuchet MS" pitchFamily="34" charset="-122"/>
                 <a:cs typeface="Trebuchet MS" pitchFamily="34" charset="-120"/>
               </a:rPr>
-              <a:t>dislocate</a:t>
+              <a:t>relocate</a:t>
             </a:r>
             <a:endParaRPr lang="en-US" sz="1200" dirty="0"/>
           </a:p>
@@ -40798,7 +42880,7 @@
                 <a:ea typeface="Calibri" pitchFamily="34" charset="-122"/>
                 <a:cs typeface="Calibri" pitchFamily="34" charset="-120"/>
               </a:rPr>
-              <a:t>A person or device that helps find where something is.</a:t>
+              <a:t>Already given out or assigned to a specific person or purpose.</a:t>
             </a:r>
             <a:endParaRPr lang="en-US" sz="1200" dirty="0"/>
           </a:p>
@@ -40871,7 +42953,7 @@
                 <a:ea typeface="Trebuchet MS" pitchFamily="34" charset="-122"/>
                 <a:cs typeface="Trebuchet MS" pitchFamily="34" charset="-120"/>
               </a:rPr>
-              <a:t>location</a:t>
+              <a:t>dislocate</a:t>
             </a:r>
             <a:endParaRPr lang="en-US" sz="1200" dirty="0"/>
           </a:p>
@@ -40937,7 +43019,7 @@
                 <a:ea typeface="Calibri" pitchFamily="34" charset="-122"/>
                 <a:cs typeface="Calibri" pitchFamily="34" charset="-120"/>
               </a:rPr>
-              <a:t>The place where something is found or situated.</a:t>
+              <a:t>To put a bone out of its normal position in the body.</a:t>
             </a:r>
             <a:endParaRPr lang="en-US" sz="1200" dirty="0"/>
           </a:p>
@@ -41076,7 +43158,7 @@
                 <a:ea typeface="Calibri" pitchFamily="34" charset="-122"/>
                 <a:cs typeface="Calibri" pitchFamily="34" charset="-120"/>
               </a:rPr>
-              <a:t>The process of moving something, like an animal or plant, from one place to another.</a:t>
+              <a:t>The act of moving somewhere new, like a business moving to a different building.</a:t>
             </a:r>
             <a:endParaRPr lang="en-US" sz="1200" dirty="0"/>
           </a:p>
@@ -41149,7 +43231,7 @@
                 <a:ea typeface="Trebuchet MS" pitchFamily="34" charset="-122"/>
                 <a:cs typeface="Trebuchet MS" pitchFamily="34" charset="-120"/>
               </a:rPr>
-              <a:t>translocation</a:t>
+              <a:t>relocation</a:t>
             </a:r>
             <a:endParaRPr lang="en-US" sz="1200" dirty="0"/>
           </a:p>
@@ -41215,7 +43297,7 @@
                 <a:ea typeface="Calibri" pitchFamily="34" charset="-122"/>
                 <a:cs typeface="Calibri" pitchFamily="34" charset="-120"/>
               </a:rPr>
-              <a:t>To give out or assign something, like time or money, for a special purpose.</a:t>
+              <a:t>To give out or set aside something for a particular purpose.</a:t>
             </a:r>
             <a:endParaRPr lang="en-US" sz="1200" dirty="0"/>
           </a:p>
@@ -41288,7 +43370,7 @@
                 <a:ea typeface="Trebuchet MS" pitchFamily="34" charset="-122"/>
                 <a:cs typeface="Trebuchet MS" pitchFamily="34" charset="-120"/>
               </a:rPr>
-              <a:t>located</a:t>
+              <a:t>locator</a:t>
             </a:r>
             <a:endParaRPr lang="en-US" sz="1200" dirty="0"/>
           </a:p>
@@ -41354,7 +43436,7 @@
                 <a:ea typeface="Calibri" pitchFamily="34" charset="-122"/>
                 <a:cs typeface="Calibri" pitchFamily="34" charset="-120"/>
               </a:rPr>
-              <a:t>Describes where something has been found or placed.</a:t>
+              <a:t>A tool or person that helps find where something is.</a:t>
             </a:r>
             <a:endParaRPr lang="en-US" sz="1200" dirty="0"/>
           </a:p>
@@ -41427,7 +43509,7 @@
                 <a:ea typeface="Trebuchet MS" pitchFamily="34" charset="-122"/>
                 <a:cs typeface="Trebuchet MS" pitchFamily="34" charset="-120"/>
               </a:rPr>
-              <a:t>locator</a:t>
+              <a:t>allocated</a:t>
             </a:r>
             <a:endParaRPr lang="en-US" sz="1200" dirty="0"/>
           </a:p>
@@ -41493,7 +43575,7 @@
                 <a:ea typeface="Calibri" pitchFamily="34" charset="-122"/>
                 <a:cs typeface="Calibri" pitchFamily="34" charset="-120"/>
               </a:rPr>
-              <a:t>To put a bone out of its normal position in a joint.</a:t>
+              <a:t>To move to a new place, like when a family moves to a different town.</a:t>
             </a:r>
             <a:endParaRPr lang="en-US" sz="1200" dirty="0"/>
           </a:p>
@@ -41785,7 +43867,7 @@
                 <a:ea typeface="Calibri" pitchFamily="34" charset="-122"/>
                 <a:cs typeface="Calibri" pitchFamily="34" charset="-120"/>
               </a:rPr>
-              <a:t>Word Labs  •  wordlabs.app  •  Root: 'locate' = to find or place something</a:t>
+              <a:t>Word Labs  •  wordlabs.app  •  Root: 'locate' = to find or place</a:t>
             </a:r>
             <a:endParaRPr lang="en-US" sz="800" dirty="0"/>
           </a:p>
@@ -41988,7 +44070,7 @@
                 <a:ea typeface="Calibri" pitchFamily="34" charset="-122"/>
                 <a:cs typeface="Calibri" pitchFamily="34" charset="-120"/>
               </a:rPr>
-              <a:t>Can you locate Australia on the world map and point to our capital city?</a:t>
+              <a:t>The explorer used a map to locate the hidden treasure buried beneath the old oak tree.</a:t>
             </a:r>
             <a:endParaRPr lang="en-US" sz="1500" dirty="0"/>
           </a:p>
@@ -42152,7 +44234,7 @@
                 <a:ea typeface="Calibri" pitchFamily="34" charset="-122"/>
                 <a:cs typeface="Calibri" pitchFamily="34" charset="-120"/>
               </a:rPr>
-              <a:t>The family had to relocate to a new town when Mum got a new job.</a:t>
+              <a:t>After the storm, the family had to relocate to a new house in a different suburb.</a:t>
             </a:r>
             <a:endParaRPr lang="en-US" sz="1500" dirty="0"/>
           </a:p>
@@ -42316,7 +44398,7 @@
                 <a:ea typeface="Calibri" pitchFamily="34" charset="-122"/>
                 <a:cs typeface="Calibri" pitchFamily="34" charset="-120"/>
               </a:rPr>
-              <a:t>The teacher asked us to write the location of our school at the top of the page.</a:t>
+              <a:t>The teacher will allocate each student a special role in the class presentation.</a:t>
             </a:r>
             <a:endParaRPr lang="en-US" sz="1500" dirty="0"/>
           </a:p>
